--- a/SIH2026-IDEA-Presentation-Submission.pptx
+++ b/SIH2026-IDEA-Presentation-Submission.pptx
@@ -374,7 +374,7 @@
             <a:pPr indent="0" algn="r">
               <a:buNone/>
             </a:pPr>
-            <a:fld id="{F0EDB438-B085-424B-B311-4CA74E516B73}" type="slidenum">
+            <a:fld id="{0F5C1504-A4D9-4C41-A5FC-A68016C6593F}" type="slidenum">
               <a:rPr lang="en-IN" sz="1400" b="0" u="none" strike="noStrike">
                 <a:solidFill>
                   <a:srgbClr val="000000"/>
@@ -432,7 +432,7 @@
         <p:spPr>
           <a:xfrm>
             <a:off x="380880" y="685800"/>
-            <a:ext cx="6094800" cy="3427920"/>
+            <a:ext cx="6094440" cy="3427560"/>
           </a:xfrm>
           <a:prstGeom prst="rect">
             <a:avLst/>
@@ -455,7 +455,7 @@
         <p:spPr>
           <a:xfrm>
             <a:off x="685800" y="4343400"/>
-            <a:ext cx="5485320" cy="4113720"/>
+            <a:ext cx="5484960" cy="4113360"/>
           </a:xfrm>
           <a:prstGeom prst="rect">
             <a:avLst/>
@@ -497,7 +497,7 @@
         <p:spPr>
           <a:xfrm>
             <a:off x="3884760" y="8685360"/>
-            <a:ext cx="2970720" cy="456120"/>
+            <a:ext cx="2970360" cy="455760"/>
           </a:xfrm>
           <a:prstGeom prst="rect">
             <a:avLst/>
@@ -540,7 +540,7 @@
                 <a:tab pos="0" algn="l"/>
               </a:tabLst>
             </a:pPr>
-            <a:fld id="{2CD85AEA-B845-49BD-AECF-4D4B8CB8B80A}" type="slidenum">
+            <a:fld id="{ED8B6D3B-B160-4A3F-9A61-9650D26BD317}" type="slidenum">
               <a:rPr lang="en-US" sz="1200" b="0" u="none" strike="noStrike">
                 <a:solidFill>
                   <a:srgbClr val="000000"/>
@@ -597,7 +597,7 @@
         <p:spPr>
           <a:xfrm>
             <a:off x="380880" y="685800"/>
-            <a:ext cx="6094800" cy="3427920"/>
+            <a:ext cx="6094440" cy="3427560"/>
           </a:xfrm>
           <a:prstGeom prst="rect">
             <a:avLst/>
@@ -620,7 +620,7 @@
         <p:spPr>
           <a:xfrm>
             <a:off x="685800" y="4343400"/>
-            <a:ext cx="5485320" cy="4113720"/>
+            <a:ext cx="5484960" cy="4113360"/>
           </a:xfrm>
           <a:prstGeom prst="rect">
             <a:avLst/>
@@ -662,7 +662,7 @@
         <p:spPr>
           <a:xfrm>
             <a:off x="3884760" y="8685360"/>
-            <a:ext cx="2970720" cy="456120"/>
+            <a:ext cx="2970360" cy="455760"/>
           </a:xfrm>
           <a:prstGeom prst="rect">
             <a:avLst/>
@@ -705,7 +705,7 @@
                 <a:tab pos="0" algn="l"/>
               </a:tabLst>
             </a:pPr>
-            <a:fld id="{7A5F6DCD-128D-48A5-9F69-5F6398852B66}" type="slidenum">
+            <a:fld id="{E4045559-0F36-4932-B1F4-656AC86EC983}" type="slidenum">
               <a:rPr lang="en-US" sz="1200" b="0" u="none" strike="noStrike">
                 <a:solidFill>
                   <a:srgbClr val="000000"/>
@@ -762,7 +762,7 @@
         <p:spPr>
           <a:xfrm>
             <a:off x="380880" y="685800"/>
-            <a:ext cx="6094800" cy="3427920"/>
+            <a:ext cx="6094440" cy="3427560"/>
           </a:xfrm>
           <a:prstGeom prst="rect">
             <a:avLst/>
@@ -785,7 +785,7 @@
         <p:spPr>
           <a:xfrm>
             <a:off x="685800" y="4343400"/>
-            <a:ext cx="5485320" cy="4113720"/>
+            <a:ext cx="5484960" cy="4113360"/>
           </a:xfrm>
           <a:prstGeom prst="rect">
             <a:avLst/>
@@ -827,7 +827,7 @@
         <p:spPr>
           <a:xfrm>
             <a:off x="3884760" y="8685360"/>
-            <a:ext cx="2970720" cy="456120"/>
+            <a:ext cx="2970360" cy="455760"/>
           </a:xfrm>
           <a:prstGeom prst="rect">
             <a:avLst/>
@@ -871,7 +871,7 @@
                 <a:tab pos="0" algn="l"/>
               </a:tabLst>
             </a:pPr>
-            <a:fld id="{51F521C0-5C03-4487-93FB-8DC7AE97EF53}" type="slidenum">
+            <a:fld id="{4A6ABE36-A900-4567-B200-51CD65241B50}" type="slidenum">
               <a:rPr lang="en-US" sz="1200" b="0" u="none" strike="noStrike">
                 <a:solidFill>
                   <a:srgbClr val="000000"/>
@@ -929,7 +929,7 @@
         <p:spPr>
           <a:xfrm>
             <a:off x="380880" y="685800"/>
-            <a:ext cx="6094800" cy="3427920"/>
+            <a:ext cx="6094440" cy="3427560"/>
           </a:xfrm>
           <a:prstGeom prst="rect">
             <a:avLst/>
@@ -952,7 +952,7 @@
         <p:spPr>
           <a:xfrm>
             <a:off x="685800" y="4343400"/>
-            <a:ext cx="5485320" cy="4113720"/>
+            <a:ext cx="5484960" cy="4113360"/>
           </a:xfrm>
           <a:prstGeom prst="rect">
             <a:avLst/>
@@ -994,7 +994,7 @@
         <p:spPr>
           <a:xfrm>
             <a:off x="3884760" y="8685360"/>
-            <a:ext cx="2970720" cy="456120"/>
+            <a:ext cx="2970360" cy="455760"/>
           </a:xfrm>
           <a:prstGeom prst="rect">
             <a:avLst/>
@@ -1038,7 +1038,7 @@
                 <a:tab pos="0" algn="l"/>
               </a:tabLst>
             </a:pPr>
-            <a:fld id="{0FA8D0C2-F30F-48B0-9F37-A707BC1B35A2}" type="slidenum">
+            <a:fld id="{BC356513-208F-4DBA-9FB0-88A8E987C769}" type="slidenum">
               <a:rPr lang="en-US" sz="1200" b="0" u="none" strike="noStrike">
                 <a:solidFill>
                   <a:srgbClr val="000000"/>
@@ -1096,7 +1096,7 @@
         <p:spPr>
           <a:xfrm>
             <a:off x="380880" y="685800"/>
-            <a:ext cx="6094800" cy="3427920"/>
+            <a:ext cx="6094440" cy="3427560"/>
           </a:xfrm>
           <a:prstGeom prst="rect">
             <a:avLst/>
@@ -1119,7 +1119,7 @@
         <p:spPr>
           <a:xfrm>
             <a:off x="685800" y="4343400"/>
-            <a:ext cx="5485320" cy="4113720"/>
+            <a:ext cx="5484960" cy="4113360"/>
           </a:xfrm>
           <a:prstGeom prst="rect">
             <a:avLst/>
@@ -1161,7 +1161,7 @@
         <p:spPr>
           <a:xfrm>
             <a:off x="3884760" y="8685360"/>
-            <a:ext cx="2970720" cy="456120"/>
+            <a:ext cx="2970360" cy="455760"/>
           </a:xfrm>
           <a:prstGeom prst="rect">
             <a:avLst/>
@@ -1205,7 +1205,7 @@
                 <a:tab pos="0" algn="l"/>
               </a:tabLst>
             </a:pPr>
-            <a:fld id="{633C37BA-CF4C-448D-A4DA-865A60CF0593}" type="slidenum">
+            <a:fld id="{8359F00A-2462-4766-B6CC-163887CE2A7B}" type="slidenum">
               <a:rPr lang="en-US" sz="1200" b="0" u="none" strike="noStrike">
                 <a:solidFill>
                   <a:srgbClr val="000000"/>
@@ -1234,8 +1234,8 @@
 </file>
 
 <file path=ppt/slideLayouts/slideLayout1.xml><?xml version="1.0" encoding="utf-8"?>
-<p:sldLayout xmlns:a="http://schemas.openxmlformats.org/drawingml/2006/main" xmlns:p="http://schemas.openxmlformats.org/presentationml/2006/main" xmlns:r="http://schemas.openxmlformats.org/officeDocument/2006/relationships" xmlns:p14="http://schemas.microsoft.com/office/powerpoint/2010/main" xmlns:p15="http://schemas.microsoft.com/office/powerpoint/2012/main" xmlns:mc="http://schemas.openxmlformats.org/markup-compatibility/2006" type="twoObj" preserve="1">
-  <p:cSld name="Two Content">
+<p:sldLayout xmlns:a="http://schemas.openxmlformats.org/drawingml/2006/main" xmlns:p="http://schemas.openxmlformats.org/presentationml/2006/main" xmlns:r="http://schemas.openxmlformats.org/officeDocument/2006/relationships" xmlns:p14="http://schemas.microsoft.com/office/powerpoint/2010/main" xmlns:p15="http://schemas.microsoft.com/office/powerpoint/2012/main" xmlns:mc="http://schemas.openxmlformats.org/markup-compatibility/2006" type="vertTitleAndTx" preserve="1">
+  <p:cSld name="Vertical Title and Text">
     <p:bg>
       <p:bgPr>
         <a:solidFill>
@@ -1269,8 +1269,8 @@
         </p:nvSpPr>
         <p:spPr>
           <a:xfrm>
-            <a:off x="609480" y="-47520"/>
-            <a:ext cx="10971720" cy="1141920"/>
+            <a:off x="8839080" y="274680"/>
+            <a:ext cx="2741760" cy="5850000"/>
           </a:xfrm>
           <a:prstGeom prst="rect">
             <a:avLst/>
@@ -1281,7 +1281,7 @@
           </a:ln>
         </p:spPr>
         <p:txBody>
-          <a:bodyPr numCol="1" spcCol="0" lIns="91440" tIns="45720" rIns="91440" bIns="45720" anchor="ctr">
+          <a:bodyPr numCol="1" spcCol="0" lIns="91440" tIns="45720" rIns="91440" bIns="45720" anchor="ctr" vert="eaVert">
             <a:noAutofit/>
           </a:bodyPr>
           <a:lstStyle>
@@ -1324,7 +1324,7 @@
                 <a:latin typeface="TradeGothic"/>
                 <a:ea typeface="ＭＳ Ｐゴシック"/>
               </a:rPr>
-              <a:t>Click to edit </a:t>
+              <a:t>Cl</a:t>
             </a:r>
             <a:r>
               <a:rPr lang="en-US" sz="4400" b="0" u="none" strike="noStrike">
@@ -1336,7 +1336,175 @@
                 <a:latin typeface="TradeGothic"/>
                 <a:ea typeface="ＭＳ Ｐゴシック"/>
               </a:rPr>
-              <a:t>Master title style</a:t>
+              <a:t>ic</a:t>
+            </a:r>
+            <a:r>
+              <a:rPr lang="en-US" sz="4400" b="0" u="none" strike="noStrike">
+                <a:solidFill>
+                  <a:schemeClr val="dk1"/>
+                </a:solidFill>
+                <a:effectLst/>
+                <a:uFillTx/>
+                <a:latin typeface="TradeGothic"/>
+                <a:ea typeface="ＭＳ Ｐゴシック"/>
+              </a:rPr>
+              <a:t>k </a:t>
+            </a:r>
+            <a:r>
+              <a:rPr lang="en-US" sz="4400" b="0" u="none" strike="noStrike">
+                <a:solidFill>
+                  <a:schemeClr val="dk1"/>
+                </a:solidFill>
+                <a:effectLst/>
+                <a:uFillTx/>
+                <a:latin typeface="TradeGothic"/>
+                <a:ea typeface="ＭＳ Ｐゴシック"/>
+              </a:rPr>
+              <a:t>to </a:t>
+            </a:r>
+            <a:r>
+              <a:rPr lang="en-US" sz="4400" b="0" u="none" strike="noStrike">
+                <a:solidFill>
+                  <a:schemeClr val="dk1"/>
+                </a:solidFill>
+                <a:effectLst/>
+                <a:uFillTx/>
+                <a:latin typeface="TradeGothic"/>
+                <a:ea typeface="ＭＳ Ｐゴシック"/>
+              </a:rPr>
+              <a:t>e</a:t>
+            </a:r>
+            <a:r>
+              <a:rPr lang="en-US" sz="4400" b="0" u="none" strike="noStrike">
+                <a:solidFill>
+                  <a:schemeClr val="dk1"/>
+                </a:solidFill>
+                <a:effectLst/>
+                <a:uFillTx/>
+                <a:latin typeface="TradeGothic"/>
+                <a:ea typeface="ＭＳ Ｐゴシック"/>
+              </a:rPr>
+              <a:t>di</a:t>
+            </a:r>
+            <a:r>
+              <a:rPr lang="en-US" sz="4400" b="0" u="none" strike="noStrike">
+                <a:solidFill>
+                  <a:schemeClr val="dk1"/>
+                </a:solidFill>
+                <a:effectLst/>
+                <a:uFillTx/>
+                <a:latin typeface="TradeGothic"/>
+                <a:ea typeface="ＭＳ Ｐゴシック"/>
+              </a:rPr>
+              <a:t>t </a:t>
+            </a:r>
+            <a:r>
+              <a:rPr lang="en-US" sz="4400" b="0" u="none" strike="noStrike">
+                <a:solidFill>
+                  <a:schemeClr val="dk1"/>
+                </a:solidFill>
+                <a:effectLst/>
+                <a:uFillTx/>
+                <a:latin typeface="TradeGothic"/>
+                <a:ea typeface="ＭＳ Ｐゴシック"/>
+              </a:rPr>
+              <a:t>M</a:t>
+            </a:r>
+            <a:r>
+              <a:rPr lang="en-US" sz="4400" b="0" u="none" strike="noStrike">
+                <a:solidFill>
+                  <a:schemeClr val="dk1"/>
+                </a:solidFill>
+                <a:effectLst/>
+                <a:uFillTx/>
+                <a:latin typeface="TradeGothic"/>
+                <a:ea typeface="ＭＳ Ｐゴシック"/>
+              </a:rPr>
+              <a:t>as</a:t>
+            </a:r>
+            <a:r>
+              <a:rPr lang="en-US" sz="4400" b="0" u="none" strike="noStrike">
+                <a:solidFill>
+                  <a:schemeClr val="dk1"/>
+                </a:solidFill>
+                <a:effectLst/>
+                <a:uFillTx/>
+                <a:latin typeface="TradeGothic"/>
+                <a:ea typeface="ＭＳ Ｐゴシック"/>
+              </a:rPr>
+              <a:t>te</a:t>
+            </a:r>
+            <a:r>
+              <a:rPr lang="en-US" sz="4400" b="0" u="none" strike="noStrike">
+                <a:solidFill>
+                  <a:schemeClr val="dk1"/>
+                </a:solidFill>
+                <a:effectLst/>
+                <a:uFillTx/>
+                <a:latin typeface="TradeGothic"/>
+                <a:ea typeface="ＭＳ Ｐゴシック"/>
+              </a:rPr>
+              <a:t>r </a:t>
+            </a:r>
+            <a:r>
+              <a:rPr lang="en-US" sz="4400" b="0" u="none" strike="noStrike">
+                <a:solidFill>
+                  <a:schemeClr val="dk1"/>
+                </a:solidFill>
+                <a:effectLst/>
+                <a:uFillTx/>
+                <a:latin typeface="TradeGothic"/>
+                <a:ea typeface="ＭＳ Ｐゴシック"/>
+              </a:rPr>
+              <a:t>tit</a:t>
+            </a:r>
+            <a:r>
+              <a:rPr lang="en-US" sz="4400" b="0" u="none" strike="noStrike">
+                <a:solidFill>
+                  <a:schemeClr val="dk1"/>
+                </a:solidFill>
+                <a:effectLst/>
+                <a:uFillTx/>
+                <a:latin typeface="TradeGothic"/>
+                <a:ea typeface="ＭＳ Ｐゴシック"/>
+              </a:rPr>
+              <a:t>le </a:t>
+            </a:r>
+            <a:r>
+              <a:rPr lang="en-US" sz="4400" b="0" u="none" strike="noStrike">
+                <a:solidFill>
+                  <a:schemeClr val="dk1"/>
+                </a:solidFill>
+                <a:effectLst/>
+                <a:uFillTx/>
+                <a:latin typeface="TradeGothic"/>
+                <a:ea typeface="ＭＳ Ｐゴシック"/>
+              </a:rPr>
+              <a:t>st</a:t>
+            </a:r>
+            <a:r>
+              <a:rPr lang="en-US" sz="4400" b="0" u="none" strike="noStrike">
+                <a:solidFill>
+                  <a:schemeClr val="dk1"/>
+                </a:solidFill>
+                <a:effectLst/>
+                <a:uFillTx/>
+                <a:latin typeface="TradeGothic"/>
+                <a:ea typeface="ＭＳ Ｐゴシック"/>
+              </a:rPr>
+              <a:t>yl</a:t>
+            </a:r>
+            <a:r>
+              <a:rPr lang="en-US" sz="4400" b="0" u="none" strike="noStrike">
+                <a:solidFill>
+                  <a:schemeClr val="dk1"/>
+                </a:solidFill>
+                <a:effectLst/>
+                <a:uFillTx/>
+                <a:latin typeface="TradeGothic"/>
+                <a:ea typeface="ＭＳ Ｐゴシック"/>
+              </a:rPr>
+              <a:t>e</a:t>
             </a:r>
             <a:endParaRPr lang="en-US" sz="4400" b="0" u="none" strike="noStrike">
               <a:solidFill>
@@ -1361,8 +1529,8 @@
         </p:nvSpPr>
         <p:spPr>
           <a:xfrm>
-            <a:off x="609480" y="1600200"/>
-            <a:ext cx="5383800" cy="4524840"/>
+            <a:off x="609480" y="274680"/>
+            <a:ext cx="8025120" cy="5850000"/>
           </a:xfrm>
           <a:prstGeom prst="rect">
             <a:avLst/>
@@ -1373,7 +1541,7 @@
           </a:ln>
         </p:spPr>
         <p:txBody>
-          <a:bodyPr numCol="1" spcCol="0" lIns="91440" tIns="45720" rIns="91440" bIns="45720" anchor="t">
+          <a:bodyPr numCol="1" spcCol="0" lIns="91440" tIns="45720" rIns="91440" bIns="45720" anchor="t" vert="eaVert">
             <a:noAutofit/>
           </a:bodyPr>
           <a:lstStyle>
@@ -1382,14 +1550,14 @@
                 <a:spcPct val="100000"/>
               </a:lnSpc>
               <a:spcBef>
-                <a:spcPts val="561"/>
+                <a:spcPts val="641"/>
               </a:spcBef>
               <a:buClr>
                 <a:srgbClr val="000000"/>
               </a:buClr>
               <a:buFont typeface="Arial"/>
               <a:buChar char="•"/>
-              <a:defRPr lang="en-US" sz="2800" b="0" u="none" strike="noStrike">
+              <a:defRPr lang="en-US" sz="3200" b="0" u="none" strike="noStrike">
                 <a:solidFill>
                   <a:schemeClr val="dk1"/>
                 </a:solidFill>
@@ -1404,14 +1572,14 @@
                 <a:spcPct val="100000"/>
               </a:lnSpc>
               <a:spcBef>
-                <a:spcPts val="479"/>
+                <a:spcPts val="561"/>
               </a:spcBef>
               <a:buClr>
                 <a:srgbClr val="000000"/>
               </a:buClr>
               <a:buFont typeface="Arial"/>
               <a:buChar char="–"/>
-              <a:defRPr lang="en-US" sz="2400" b="0" u="none" strike="noStrike">
+              <a:defRPr lang="en-US" sz="2800" b="0" u="none" strike="noStrike">
                 <a:solidFill>
                   <a:schemeClr val="dk1"/>
                 </a:solidFill>
@@ -1426,14 +1594,14 @@
                 <a:spcPct val="100000"/>
               </a:lnSpc>
               <a:spcBef>
-                <a:spcPts val="400"/>
+                <a:spcPts val="479"/>
               </a:spcBef>
               <a:buClr>
                 <a:srgbClr val="000000"/>
               </a:buClr>
               <a:buFont typeface="Arial"/>
               <a:buChar char="•"/>
-              <a:defRPr lang="en-US" sz="2000" b="0" u="none" strike="noStrike">
+              <a:defRPr lang="en-US" sz="2400" b="0" u="none" strike="noStrike">
                 <a:solidFill>
                   <a:schemeClr val="dk1"/>
                 </a:solidFill>
@@ -1448,14 +1616,14 @@
                 <a:spcPct val="100000"/>
               </a:lnSpc>
               <a:spcBef>
-                <a:spcPts val="360"/>
+                <a:spcPts val="400"/>
               </a:spcBef>
               <a:buClr>
                 <a:srgbClr val="000000"/>
               </a:buClr>
               <a:buFont typeface="Arial"/>
               <a:buChar char="–"/>
-              <a:defRPr lang="en-US" sz="1800" b="0" u="none" strike="noStrike">
+              <a:defRPr lang="en-US" sz="2000" b="0" u="none" strike="noStrike">
                 <a:solidFill>
                   <a:schemeClr val="dk1"/>
                 </a:solidFill>
@@ -1470,14 +1638,14 @@
                 <a:spcPct val="100000"/>
               </a:lnSpc>
               <a:spcBef>
-                <a:spcPts val="360"/>
+                <a:spcPts val="400"/>
               </a:spcBef>
               <a:buClr>
                 <a:srgbClr val="000000"/>
               </a:buClr>
               <a:buFont typeface="Arial"/>
               <a:buChar char="»"/>
-              <a:defRPr lang="en-US" sz="1800" b="0" u="none" strike="noStrike">
+              <a:defRPr lang="en-US" sz="2000" b="0" u="none" strike="noStrike">
                 <a:solidFill>
                   <a:schemeClr val="dk1"/>
                 </a:solidFill>
@@ -1494,7 +1662,7 @@
                 <a:spcPct val="100000"/>
               </a:lnSpc>
               <a:spcBef>
-                <a:spcPts val="561"/>
+                <a:spcPts val="641"/>
               </a:spcBef>
               <a:buClr>
                 <a:srgbClr val="000000"/>
@@ -1503,7 +1671,7 @@
               <a:buChar char="•"/>
             </a:pPr>
             <a:r>
-              <a:rPr lang="en-US" sz="2800" b="0" u="none" strike="noStrike">
+              <a:rPr lang="en-US" sz="3200" b="0" u="none" strike="noStrike">
                 <a:solidFill>
                   <a:schemeClr val="dk1"/>
                 </a:solidFill>
@@ -1514,7 +1682,7 @@
               </a:rPr>
               <a:t>Click to edit Master text styles</a:t>
             </a:r>
-            <a:endParaRPr lang="en-US" sz="2800" b="0" u="none" strike="noStrike">
+            <a:endParaRPr lang="en-US" sz="3200" b="0" u="none" strike="noStrike">
               <a:solidFill>
                 <a:schemeClr val="dk1"/>
               </a:solidFill>
@@ -1529,7 +1697,7 @@
                 <a:spcPct val="100000"/>
               </a:lnSpc>
               <a:spcBef>
-                <a:spcPts val="479"/>
+                <a:spcPts val="561"/>
               </a:spcBef>
               <a:buClr>
                 <a:srgbClr val="000000"/>
@@ -1538,7 +1706,7 @@
               <a:buChar char="–"/>
             </a:pPr>
             <a:r>
-              <a:rPr lang="en-US" sz="2400" b="0" u="none" strike="noStrike">
+              <a:rPr lang="en-US" sz="2800" b="0" u="none" strike="noStrike">
                 <a:solidFill>
                   <a:schemeClr val="dk1"/>
                 </a:solidFill>
@@ -1549,7 +1717,7 @@
               </a:rPr>
               <a:t>Second level</a:t>
             </a:r>
-            <a:endParaRPr lang="en-US" sz="2400" b="0" u="none" strike="noStrike">
+            <a:endParaRPr lang="en-US" sz="2800" b="0" u="none" strike="noStrike">
               <a:solidFill>
                 <a:schemeClr val="dk1"/>
               </a:solidFill>
@@ -1564,7 +1732,7 @@
                 <a:spcPct val="100000"/>
               </a:lnSpc>
               <a:spcBef>
-                <a:spcPts val="400"/>
+                <a:spcPts val="479"/>
               </a:spcBef>
               <a:buClr>
                 <a:srgbClr val="000000"/>
@@ -1573,7 +1741,7 @@
               <a:buChar char="•"/>
             </a:pPr>
             <a:r>
-              <a:rPr lang="en-US" sz="2000" b="0" u="none" strike="noStrike">
+              <a:rPr lang="en-US" sz="2400" b="0" u="none" strike="noStrike">
                 <a:solidFill>
                   <a:schemeClr val="dk1"/>
                 </a:solidFill>
@@ -1584,7 +1752,7 @@
               </a:rPr>
               <a:t>Third level</a:t>
             </a:r>
-            <a:endParaRPr lang="en-US" sz="2000" b="0" u="none" strike="noStrike">
+            <a:endParaRPr lang="en-US" sz="2400" b="0" u="none" strike="noStrike">
               <a:solidFill>
                 <a:schemeClr val="dk1"/>
               </a:solidFill>
@@ -1599,7 +1767,7 @@
                 <a:spcPct val="100000"/>
               </a:lnSpc>
               <a:spcBef>
-                <a:spcPts val="360"/>
+                <a:spcPts val="400"/>
               </a:spcBef>
               <a:buClr>
                 <a:srgbClr val="000000"/>
@@ -1608,7 +1776,7 @@
               <a:buChar char="–"/>
             </a:pPr>
             <a:r>
-              <a:rPr lang="en-US" sz="1800" b="0" u="none" strike="noStrike">
+              <a:rPr lang="en-US" sz="2000" b="0" u="none" strike="noStrike">
                 <a:solidFill>
                   <a:schemeClr val="dk1"/>
                 </a:solidFill>
@@ -1619,7 +1787,7 @@
               </a:rPr>
               <a:t>Fourth level</a:t>
             </a:r>
-            <a:endParaRPr lang="en-US" sz="1800" b="0" u="none" strike="noStrike">
+            <a:endParaRPr lang="en-US" sz="2000" b="0" u="none" strike="noStrike">
               <a:solidFill>
                 <a:schemeClr val="dk1"/>
               </a:solidFill>
@@ -1634,7 +1802,7 @@
                 <a:spcPct val="100000"/>
               </a:lnSpc>
               <a:spcBef>
-                <a:spcPts val="360"/>
+                <a:spcPts val="400"/>
               </a:spcBef>
               <a:buClr>
                 <a:srgbClr val="000000"/>
@@ -1643,7 +1811,7 @@
               <a:buChar char="»"/>
             </a:pPr>
             <a:r>
-              <a:rPr lang="en-US" sz="1800" b="0" u="none" strike="noStrike">
+              <a:rPr lang="en-US" sz="2000" b="0" u="none" strike="noStrike">
                 <a:solidFill>
                   <a:schemeClr val="dk1"/>
                 </a:solidFill>
@@ -1654,7 +1822,7 @@
               </a:rPr>
               <a:t>Fifth level</a:t>
             </a:r>
-            <a:endParaRPr lang="en-US" sz="1800" b="0" u="none" strike="noStrike">
+            <a:endParaRPr lang="en-US" sz="2000" b="0" u="none" strike="noStrike">
               <a:solidFill>
                 <a:schemeClr val="dk1"/>
               </a:solidFill>
@@ -1668,322 +1836,6 @@
       <p:sp>
         <p:nvSpPr>
           <p:cNvPr id="4" name="PlaceHolder 3"/>
-          <p:cNvSpPr>
-            <a:spLocks noGrp="1"/>
-          </p:cNvSpPr>
-          <p:nvPr>
-            <p:ph type="body"/>
-          </p:nvPr>
-        </p:nvSpPr>
-        <p:spPr>
-          <a:xfrm>
-            <a:off x="6197760" y="1600200"/>
-            <a:ext cx="5383800" cy="4524840"/>
-          </a:xfrm>
-          <a:prstGeom prst="rect">
-            <a:avLst/>
-          </a:prstGeom>
-          <a:noFill/>
-          <a:ln w="9360">
-            <a:noFill/>
-          </a:ln>
-        </p:spPr>
-        <p:txBody>
-          <a:bodyPr numCol="1" spcCol="0" lIns="91440" tIns="45720" rIns="91440" bIns="45720" anchor="t">
-            <a:noAutofit/>
-          </a:bodyPr>
-          <a:lstStyle>
-            <a:lvl1pPr algn="l" defTabSz="457200">
-              <a:lnSpc>
-                <a:spcPct val="100000"/>
-              </a:lnSpc>
-              <a:spcBef>
-                <a:spcPts val="561"/>
-              </a:spcBef>
-              <a:buClr>
-                <a:srgbClr val="000000"/>
-              </a:buClr>
-              <a:buFont typeface="Arial"/>
-              <a:buChar char="•"/>
-              <a:defRPr lang="en-US" sz="2800" b="0" u="none" strike="noStrike">
-                <a:solidFill>
-                  <a:schemeClr val="dk1"/>
-                </a:solidFill>
-                <a:effectLst/>
-                <a:uFillTx/>
-                <a:latin typeface="TradeGothic"/>
-                <a:ea typeface="ＭＳ Ｐゴシック"/>
-              </a:defRPr>
-            </a:lvl1pPr>
-            <a:lvl2pPr lvl="1" algn="l" defTabSz="457200">
-              <a:lnSpc>
-                <a:spcPct val="100000"/>
-              </a:lnSpc>
-              <a:spcBef>
-                <a:spcPts val="479"/>
-              </a:spcBef>
-              <a:buClr>
-                <a:srgbClr val="000000"/>
-              </a:buClr>
-              <a:buFont typeface="Arial"/>
-              <a:buChar char="–"/>
-              <a:defRPr lang="en-US" sz="2400" b="0" u="none" strike="noStrike">
-                <a:solidFill>
-                  <a:schemeClr val="dk1"/>
-                </a:solidFill>
-                <a:effectLst/>
-                <a:uFillTx/>
-                <a:latin typeface="TradeGothic"/>
-                <a:ea typeface="ＭＳ Ｐゴシック"/>
-              </a:defRPr>
-            </a:lvl2pPr>
-            <a:lvl3pPr lvl="2" algn="l" defTabSz="457200">
-              <a:lnSpc>
-                <a:spcPct val="100000"/>
-              </a:lnSpc>
-              <a:spcBef>
-                <a:spcPts val="400"/>
-              </a:spcBef>
-              <a:buClr>
-                <a:srgbClr val="000000"/>
-              </a:buClr>
-              <a:buFont typeface="Arial"/>
-              <a:buChar char="•"/>
-              <a:defRPr lang="en-US" sz="2000" b="0" u="none" strike="noStrike">
-                <a:solidFill>
-                  <a:schemeClr val="dk1"/>
-                </a:solidFill>
-                <a:effectLst/>
-                <a:uFillTx/>
-                <a:latin typeface="TradeGothic"/>
-                <a:ea typeface="ＭＳ Ｐゴシック"/>
-              </a:defRPr>
-            </a:lvl3pPr>
-            <a:lvl4pPr lvl="3" algn="l" defTabSz="457200">
-              <a:lnSpc>
-                <a:spcPct val="100000"/>
-              </a:lnSpc>
-              <a:spcBef>
-                <a:spcPts val="360"/>
-              </a:spcBef>
-              <a:buClr>
-                <a:srgbClr val="000000"/>
-              </a:buClr>
-              <a:buFont typeface="Arial"/>
-              <a:buChar char="–"/>
-              <a:defRPr lang="en-US" sz="1800" b="0" u="none" strike="noStrike">
-                <a:solidFill>
-                  <a:schemeClr val="dk1"/>
-                </a:solidFill>
-                <a:effectLst/>
-                <a:uFillTx/>
-                <a:latin typeface="TradeGothic"/>
-                <a:ea typeface="ＭＳ Ｐゴシック"/>
-              </a:defRPr>
-            </a:lvl4pPr>
-            <a:lvl5pPr lvl="4" algn="l" defTabSz="457200">
-              <a:lnSpc>
-                <a:spcPct val="100000"/>
-              </a:lnSpc>
-              <a:spcBef>
-                <a:spcPts val="360"/>
-              </a:spcBef>
-              <a:buClr>
-                <a:srgbClr val="000000"/>
-              </a:buClr>
-              <a:buFont typeface="Arial"/>
-              <a:buChar char="»"/>
-              <a:defRPr lang="en-US" sz="1800" b="0" u="none" strike="noStrike">
-                <a:solidFill>
-                  <a:schemeClr val="dk1"/>
-                </a:solidFill>
-                <a:effectLst/>
-                <a:uFillTx/>
-                <a:latin typeface="TradeGothic"/>
-                <a:ea typeface="ＭＳ Ｐゴシック"/>
-              </a:defRPr>
-            </a:lvl5pPr>
-          </a:lstStyle>
-          <a:p>
-            <a:pPr marL="343080" indent="-343080" algn="l" defTabSz="457200">
-              <a:lnSpc>
-                <a:spcPct val="100000"/>
-              </a:lnSpc>
-              <a:spcBef>
-                <a:spcPts val="561"/>
-              </a:spcBef>
-              <a:buClr>
-                <a:srgbClr val="000000"/>
-              </a:buClr>
-              <a:buFont typeface="Arial"/>
-              <a:buChar char="•"/>
-            </a:pPr>
-            <a:r>
-              <a:rPr lang="en-US" sz="2800" b="0" u="none" strike="noStrike">
-                <a:solidFill>
-                  <a:schemeClr val="dk1"/>
-                </a:solidFill>
-                <a:effectLst/>
-                <a:uFillTx/>
-                <a:latin typeface="TradeGothic"/>
-                <a:ea typeface="ＭＳ Ｐゴシック"/>
-              </a:rPr>
-              <a:t>Click to edit Master text styles</a:t>
-            </a:r>
-            <a:endParaRPr lang="en-US" sz="2800" b="0" u="none" strike="noStrike">
-              <a:solidFill>
-                <a:schemeClr val="dk1"/>
-              </a:solidFill>
-              <a:effectLst/>
-              <a:uFillTx/>
-              <a:latin typeface="TradeGothic"/>
-            </a:endParaRPr>
-          </a:p>
-          <a:p>
-            <a:pPr marL="743040" lvl="1" indent="-285840" algn="l" defTabSz="457200">
-              <a:lnSpc>
-                <a:spcPct val="100000"/>
-              </a:lnSpc>
-              <a:spcBef>
-                <a:spcPts val="479"/>
-              </a:spcBef>
-              <a:buClr>
-                <a:srgbClr val="000000"/>
-              </a:buClr>
-              <a:buFont typeface="Arial"/>
-              <a:buChar char="–"/>
-            </a:pPr>
-            <a:r>
-              <a:rPr lang="en-US" sz="2400" b="0" u="none" strike="noStrike">
-                <a:solidFill>
-                  <a:schemeClr val="dk1"/>
-                </a:solidFill>
-                <a:effectLst/>
-                <a:uFillTx/>
-                <a:latin typeface="TradeGothic"/>
-                <a:ea typeface="ＭＳ Ｐゴシック"/>
-              </a:rPr>
-              <a:t>Second level</a:t>
-            </a:r>
-            <a:endParaRPr lang="en-US" sz="2400" b="0" u="none" strike="noStrike">
-              <a:solidFill>
-                <a:schemeClr val="dk1"/>
-              </a:solidFill>
-              <a:effectLst/>
-              <a:uFillTx/>
-              <a:latin typeface="TradeGothic"/>
-            </a:endParaRPr>
-          </a:p>
-          <a:p>
-            <a:pPr marL="1143000" lvl="2" indent="-228600" algn="l" defTabSz="457200">
-              <a:lnSpc>
-                <a:spcPct val="100000"/>
-              </a:lnSpc>
-              <a:spcBef>
-                <a:spcPts val="400"/>
-              </a:spcBef>
-              <a:buClr>
-                <a:srgbClr val="000000"/>
-              </a:buClr>
-              <a:buFont typeface="Arial"/>
-              <a:buChar char="•"/>
-            </a:pPr>
-            <a:r>
-              <a:rPr lang="en-US" sz="2000" b="0" u="none" strike="noStrike">
-                <a:solidFill>
-                  <a:schemeClr val="dk1"/>
-                </a:solidFill>
-                <a:effectLst/>
-                <a:uFillTx/>
-                <a:latin typeface="TradeGothic"/>
-                <a:ea typeface="ＭＳ Ｐゴシック"/>
-              </a:rPr>
-              <a:t>Third level</a:t>
-            </a:r>
-            <a:endParaRPr lang="en-US" sz="2000" b="0" u="none" strike="noStrike">
-              <a:solidFill>
-                <a:schemeClr val="dk1"/>
-              </a:solidFill>
-              <a:effectLst/>
-              <a:uFillTx/>
-              <a:latin typeface="TradeGothic"/>
-            </a:endParaRPr>
-          </a:p>
-          <a:p>
-            <a:pPr marL="1600200" lvl="3" indent="-228600" algn="l" defTabSz="457200">
-              <a:lnSpc>
-                <a:spcPct val="100000"/>
-              </a:lnSpc>
-              <a:spcBef>
-                <a:spcPts val="360"/>
-              </a:spcBef>
-              <a:buClr>
-                <a:srgbClr val="000000"/>
-              </a:buClr>
-              <a:buFont typeface="Arial"/>
-              <a:buChar char="–"/>
-            </a:pPr>
-            <a:r>
-              <a:rPr lang="en-US" sz="1800" b="0" u="none" strike="noStrike">
-                <a:solidFill>
-                  <a:schemeClr val="dk1"/>
-                </a:solidFill>
-                <a:effectLst/>
-                <a:uFillTx/>
-                <a:latin typeface="TradeGothic"/>
-                <a:ea typeface="ＭＳ Ｐゴシック"/>
-              </a:rPr>
-              <a:t>Fourth level</a:t>
-            </a:r>
-            <a:endParaRPr lang="en-US" sz="1800" b="0" u="none" strike="noStrike">
-              <a:solidFill>
-                <a:schemeClr val="dk1"/>
-              </a:solidFill>
-              <a:effectLst/>
-              <a:uFillTx/>
-              <a:latin typeface="TradeGothic"/>
-            </a:endParaRPr>
-          </a:p>
-          <a:p>
-            <a:pPr marL="2057400" lvl="4" indent="-228600" algn="l" defTabSz="457200">
-              <a:lnSpc>
-                <a:spcPct val="100000"/>
-              </a:lnSpc>
-              <a:spcBef>
-                <a:spcPts val="360"/>
-              </a:spcBef>
-              <a:buClr>
-                <a:srgbClr val="000000"/>
-              </a:buClr>
-              <a:buFont typeface="Arial"/>
-              <a:buChar char="»"/>
-            </a:pPr>
-            <a:r>
-              <a:rPr lang="en-US" sz="1800" b="0" u="none" strike="noStrike">
-                <a:solidFill>
-                  <a:schemeClr val="dk1"/>
-                </a:solidFill>
-                <a:effectLst/>
-                <a:uFillTx/>
-                <a:latin typeface="TradeGothic"/>
-                <a:ea typeface="ＭＳ Ｐゴシック"/>
-              </a:rPr>
-              <a:t>Fifth level</a:t>
-            </a:r>
-            <a:endParaRPr lang="en-US" sz="1800" b="0" u="none" strike="noStrike">
-              <a:solidFill>
-                <a:schemeClr val="dk1"/>
-              </a:solidFill>
-              <a:effectLst/>
-              <a:uFillTx/>
-              <a:latin typeface="TradeGothic"/>
-            </a:endParaRPr>
-          </a:p>
-        </p:txBody>
-      </p:sp>
-      <p:sp>
-        <p:nvSpPr>
-          <p:cNvPr id="5" name="PlaceHolder 4"/>
           <p:cNvSpPr>
             <a:spLocks noGrp="1"/>
           </p:cNvSpPr>
@@ -1994,7 +1846,7 @@
         <p:spPr>
           <a:xfrm>
             <a:off x="609480" y="6356520"/>
-            <a:ext cx="2843640" cy="363960"/>
+            <a:ext cx="2843280" cy="363600"/>
           </a:xfrm>
           <a:prstGeom prst="rect">
             <a:avLst/>
@@ -2063,7 +1915,7 @@
       </p:sp>
       <p:sp>
         <p:nvSpPr>
-          <p:cNvPr id="6" name="PlaceHolder 5"/>
+          <p:cNvPr id="5" name="PlaceHolder 4"/>
           <p:cNvSpPr>
             <a:spLocks noGrp="1"/>
           </p:cNvSpPr>
@@ -2074,7 +1926,7 @@
         <p:spPr>
           <a:xfrm>
             <a:off x="4165560" y="6356520"/>
-            <a:ext cx="3859560" cy="363960"/>
+            <a:ext cx="3859200" cy="363600"/>
           </a:xfrm>
           <a:prstGeom prst="rect">
             <a:avLst/>
@@ -2145,7 +1997,7 @@
       </p:sp>
       <p:sp>
         <p:nvSpPr>
-          <p:cNvPr id="7" name="PlaceHolder 6"/>
+          <p:cNvPr id="6" name="PlaceHolder 5"/>
           <p:cNvSpPr>
             <a:spLocks noGrp="1"/>
           </p:cNvSpPr>
@@ -2156,7 +2008,7 @@
         <p:spPr>
           <a:xfrm>
             <a:off x="8737560" y="6356520"/>
-            <a:ext cx="2843640" cy="363960"/>
+            <a:ext cx="2843280" cy="363600"/>
           </a:xfrm>
           <a:prstGeom prst="rect">
             <a:avLst/>
@@ -2200,7 +2052,7 @@
                 <a:tab pos="0" algn="l"/>
               </a:tabLst>
             </a:pPr>
-            <a:fld id="{B740E4E3-A3F8-45BB-A7D6-49FEFAB3E37A}" type="slidenum">
+            <a:fld id="{DECEC293-5C39-46D3-8913-6504E5647B21}" type="slidenum">
               <a:rPr lang="en-US" sz="1200" b="0" u="none" strike="noStrike">
                 <a:solidFill>
                   <a:srgbClr val="898989"/>
@@ -2229,8 +2081,8 @@
 </file>
 
 <file path=ppt/slideLayouts/slideLayout10.xml><?xml version="1.0" encoding="utf-8"?>
-<p:sldLayout xmlns:a="http://schemas.openxmlformats.org/drawingml/2006/main" xmlns:p="http://schemas.openxmlformats.org/presentationml/2006/main" xmlns:r="http://schemas.openxmlformats.org/officeDocument/2006/relationships" xmlns:p14="http://schemas.microsoft.com/office/powerpoint/2010/main" xmlns:p15="http://schemas.microsoft.com/office/powerpoint/2012/main" xmlns:mc="http://schemas.openxmlformats.org/markup-compatibility/2006" type="obj" preserve="1">
-  <p:cSld name="Title and Content">
+<p:sldLayout xmlns:a="http://schemas.openxmlformats.org/drawingml/2006/main" xmlns:p="http://schemas.openxmlformats.org/presentationml/2006/main" xmlns:r="http://schemas.openxmlformats.org/officeDocument/2006/relationships" xmlns:p14="http://schemas.microsoft.com/office/powerpoint/2010/main" xmlns:p15="http://schemas.microsoft.com/office/powerpoint/2012/main" xmlns:mc="http://schemas.openxmlformats.org/markup-compatibility/2006" type="title" preserve="1">
+  <p:cSld name="Title Slide">
     <p:bg>
       <p:bgPr>
         <a:solidFill>
@@ -2264,8 +2116,8 @@
         </p:nvSpPr>
         <p:spPr>
           <a:xfrm>
-            <a:off x="609480" y="-47520"/>
-            <a:ext cx="10971720" cy="1141920"/>
+            <a:off x="914400" y="2130480"/>
+            <a:ext cx="10361880" cy="1468440"/>
           </a:xfrm>
           <a:prstGeom prst="rect">
             <a:avLst/>
@@ -2339,329 +2191,13 @@
             <a:spLocks noGrp="1"/>
           </p:cNvSpPr>
           <p:nvPr>
-            <p:ph type="body"/>
-          </p:nvPr>
-        </p:nvSpPr>
-        <p:spPr>
-          <a:xfrm>
-            <a:off x="609480" y="1095480"/>
-            <a:ext cx="10971720" cy="5029560"/>
-          </a:xfrm>
-          <a:prstGeom prst="rect">
-            <a:avLst/>
-          </a:prstGeom>
-          <a:noFill/>
-          <a:ln w="9360">
-            <a:noFill/>
-          </a:ln>
-        </p:spPr>
-        <p:txBody>
-          <a:bodyPr numCol="1" spcCol="0" lIns="91440" tIns="45720" rIns="91440" bIns="45720" anchor="t">
-            <a:noAutofit/>
-          </a:bodyPr>
-          <a:lstStyle>
-            <a:lvl1pPr algn="l" defTabSz="457200">
-              <a:lnSpc>
-                <a:spcPct val="100000"/>
-              </a:lnSpc>
-              <a:spcBef>
-                <a:spcPts val="641"/>
-              </a:spcBef>
-              <a:buClr>
-                <a:srgbClr val="000000"/>
-              </a:buClr>
-              <a:buFont typeface="Arial"/>
-              <a:buChar char="•"/>
-              <a:defRPr lang="en-US" sz="3200" b="0" u="none" strike="noStrike">
-                <a:solidFill>
-                  <a:schemeClr val="dk1"/>
-                </a:solidFill>
-                <a:effectLst/>
-                <a:uFillTx/>
-                <a:latin typeface="TradeGothic"/>
-                <a:ea typeface="ＭＳ Ｐゴシック"/>
-              </a:defRPr>
-            </a:lvl1pPr>
-            <a:lvl2pPr lvl="1" algn="l" defTabSz="457200">
-              <a:lnSpc>
-                <a:spcPct val="100000"/>
-              </a:lnSpc>
-              <a:spcBef>
-                <a:spcPts val="561"/>
-              </a:spcBef>
-              <a:buClr>
-                <a:srgbClr val="000000"/>
-              </a:buClr>
-              <a:buFont typeface="Arial"/>
-              <a:buChar char="–"/>
-              <a:defRPr lang="en-US" sz="2800" b="0" u="none" strike="noStrike">
-                <a:solidFill>
-                  <a:schemeClr val="dk1"/>
-                </a:solidFill>
-                <a:effectLst/>
-                <a:uFillTx/>
-                <a:latin typeface="TradeGothic"/>
-                <a:ea typeface="ＭＳ Ｐゴシック"/>
-              </a:defRPr>
-            </a:lvl2pPr>
-            <a:lvl3pPr lvl="2" algn="l" defTabSz="457200">
-              <a:lnSpc>
-                <a:spcPct val="100000"/>
-              </a:lnSpc>
-              <a:spcBef>
-                <a:spcPts val="479"/>
-              </a:spcBef>
-              <a:buClr>
-                <a:srgbClr val="000000"/>
-              </a:buClr>
-              <a:buFont typeface="Arial"/>
-              <a:buChar char="•"/>
-              <a:defRPr lang="en-US" sz="2400" b="0" u="none" strike="noStrike">
-                <a:solidFill>
-                  <a:schemeClr val="dk1"/>
-                </a:solidFill>
-                <a:effectLst/>
-                <a:uFillTx/>
-                <a:latin typeface="TradeGothic"/>
-                <a:ea typeface="ＭＳ Ｐゴシック"/>
-              </a:defRPr>
-            </a:lvl3pPr>
-            <a:lvl4pPr lvl="3" algn="l" defTabSz="457200">
-              <a:lnSpc>
-                <a:spcPct val="100000"/>
-              </a:lnSpc>
-              <a:spcBef>
-                <a:spcPts val="400"/>
-              </a:spcBef>
-              <a:buClr>
-                <a:srgbClr val="000000"/>
-              </a:buClr>
-              <a:buFont typeface="Arial"/>
-              <a:buChar char="–"/>
-              <a:defRPr lang="en-US" sz="2000" b="0" u="none" strike="noStrike">
-                <a:solidFill>
-                  <a:schemeClr val="dk1"/>
-                </a:solidFill>
-                <a:effectLst/>
-                <a:uFillTx/>
-                <a:latin typeface="TradeGothic"/>
-                <a:ea typeface="ＭＳ Ｐゴシック"/>
-              </a:defRPr>
-            </a:lvl4pPr>
-            <a:lvl5pPr lvl="4" algn="l" defTabSz="457200">
-              <a:lnSpc>
-                <a:spcPct val="100000"/>
-              </a:lnSpc>
-              <a:spcBef>
-                <a:spcPts val="400"/>
-              </a:spcBef>
-              <a:buClr>
-                <a:srgbClr val="000000"/>
-              </a:buClr>
-              <a:buFont typeface="Arial"/>
-              <a:buChar char="»"/>
-              <a:defRPr lang="en-US" sz="2000" b="0" u="none" strike="noStrike">
-                <a:solidFill>
-                  <a:schemeClr val="dk1"/>
-                </a:solidFill>
-                <a:effectLst/>
-                <a:uFillTx/>
-                <a:latin typeface="TradeGothic"/>
-                <a:ea typeface="ＭＳ Ｐゴシック"/>
-              </a:defRPr>
-            </a:lvl5pPr>
-          </a:lstStyle>
-          <a:p>
-            <a:pPr marL="343080" indent="-343080" algn="l" defTabSz="457200">
-              <a:lnSpc>
-                <a:spcPct val="100000"/>
-              </a:lnSpc>
-              <a:spcBef>
-                <a:spcPts val="641"/>
-              </a:spcBef>
-              <a:buClr>
-                <a:srgbClr val="000000"/>
-              </a:buClr>
-              <a:buFont typeface="Arial"/>
-              <a:buChar char="•"/>
-            </a:pPr>
-            <a:r>
-              <a:rPr lang="en-US" sz="3200" b="0" u="none" strike="noStrike">
-                <a:solidFill>
-                  <a:schemeClr val="dk1"/>
-                </a:solidFill>
-                <a:effectLst/>
-                <a:uFillTx/>
-                <a:latin typeface="TradeGothic"/>
-                <a:ea typeface="ＭＳ Ｐゴシック"/>
-              </a:rPr>
-              <a:t>Click to edit Master text styles</a:t>
-            </a:r>
-            <a:endParaRPr lang="en-US" sz="3200" b="0" u="none" strike="noStrike">
-              <a:solidFill>
-                <a:schemeClr val="dk1"/>
-              </a:solidFill>
-              <a:effectLst/>
-              <a:uFillTx/>
-              <a:latin typeface="TradeGothic"/>
-            </a:endParaRPr>
-          </a:p>
-          <a:p>
-            <a:pPr marL="743040" lvl="1" indent="-285840" algn="l" defTabSz="457200">
-              <a:lnSpc>
-                <a:spcPct val="100000"/>
-              </a:lnSpc>
-              <a:spcBef>
-                <a:spcPts val="561"/>
-              </a:spcBef>
-              <a:buClr>
-                <a:srgbClr val="000000"/>
-              </a:buClr>
-              <a:buFont typeface="Arial"/>
-              <a:buChar char="–"/>
-            </a:pPr>
-            <a:r>
-              <a:rPr lang="en-US" sz="2800" b="0" u="none" strike="noStrike">
-                <a:solidFill>
-                  <a:schemeClr val="dk1"/>
-                </a:solidFill>
-                <a:effectLst/>
-                <a:uFillTx/>
-                <a:latin typeface="TradeGothic"/>
-                <a:ea typeface="ＭＳ Ｐゴシック"/>
-              </a:rPr>
-              <a:t>Second level</a:t>
-            </a:r>
-            <a:endParaRPr lang="en-US" sz="2800" b="0" u="none" strike="noStrike">
-              <a:solidFill>
-                <a:schemeClr val="dk1"/>
-              </a:solidFill>
-              <a:effectLst/>
-              <a:uFillTx/>
-              <a:latin typeface="TradeGothic"/>
-            </a:endParaRPr>
-          </a:p>
-          <a:p>
-            <a:pPr marL="1143000" lvl="2" indent="-228600" algn="l" defTabSz="457200">
-              <a:lnSpc>
-                <a:spcPct val="100000"/>
-              </a:lnSpc>
-              <a:spcBef>
-                <a:spcPts val="479"/>
-              </a:spcBef>
-              <a:buClr>
-                <a:srgbClr val="000000"/>
-              </a:buClr>
-              <a:buFont typeface="Arial"/>
-              <a:buChar char="•"/>
-            </a:pPr>
-            <a:r>
-              <a:rPr lang="en-US" sz="2400" b="0" u="none" strike="noStrike">
-                <a:solidFill>
-                  <a:schemeClr val="dk1"/>
-                </a:solidFill>
-                <a:effectLst/>
-                <a:uFillTx/>
-                <a:latin typeface="TradeGothic"/>
-                <a:ea typeface="ＭＳ Ｐゴシック"/>
-              </a:rPr>
-              <a:t>Third level</a:t>
-            </a:r>
-            <a:endParaRPr lang="en-US" sz="2400" b="0" u="none" strike="noStrike">
-              <a:solidFill>
-                <a:schemeClr val="dk1"/>
-              </a:solidFill>
-              <a:effectLst/>
-              <a:uFillTx/>
-              <a:latin typeface="TradeGothic"/>
-            </a:endParaRPr>
-          </a:p>
-          <a:p>
-            <a:pPr marL="1600200" lvl="3" indent="-228600" algn="l" defTabSz="457200">
-              <a:lnSpc>
-                <a:spcPct val="100000"/>
-              </a:lnSpc>
-              <a:spcBef>
-                <a:spcPts val="400"/>
-              </a:spcBef>
-              <a:buClr>
-                <a:srgbClr val="000000"/>
-              </a:buClr>
-              <a:buFont typeface="Arial"/>
-              <a:buChar char="–"/>
-            </a:pPr>
-            <a:r>
-              <a:rPr lang="en-US" sz="2000" b="0" u="none" strike="noStrike">
-                <a:solidFill>
-                  <a:schemeClr val="dk1"/>
-                </a:solidFill>
-                <a:effectLst/>
-                <a:uFillTx/>
-                <a:latin typeface="TradeGothic"/>
-                <a:ea typeface="ＭＳ Ｐゴシック"/>
-              </a:rPr>
-              <a:t>Fourth level</a:t>
-            </a:r>
-            <a:endParaRPr lang="en-US" sz="2000" b="0" u="none" strike="noStrike">
-              <a:solidFill>
-                <a:schemeClr val="dk1"/>
-              </a:solidFill>
-              <a:effectLst/>
-              <a:uFillTx/>
-              <a:latin typeface="TradeGothic"/>
-            </a:endParaRPr>
-          </a:p>
-          <a:p>
-            <a:pPr marL="2057400" lvl="4" indent="-228600" algn="l" defTabSz="457200">
-              <a:lnSpc>
-                <a:spcPct val="100000"/>
-              </a:lnSpc>
-              <a:spcBef>
-                <a:spcPts val="400"/>
-              </a:spcBef>
-              <a:buClr>
-                <a:srgbClr val="000000"/>
-              </a:buClr>
-              <a:buFont typeface="Arial"/>
-              <a:buChar char="»"/>
-            </a:pPr>
-            <a:r>
-              <a:rPr lang="en-US" sz="2000" b="0" u="none" strike="noStrike">
-                <a:solidFill>
-                  <a:schemeClr val="dk1"/>
-                </a:solidFill>
-                <a:effectLst/>
-                <a:uFillTx/>
-                <a:latin typeface="TradeGothic"/>
-                <a:ea typeface="ＭＳ Ｐゴシック"/>
-              </a:rPr>
-              <a:t>Fifth level</a:t>
-            </a:r>
-            <a:endParaRPr lang="en-US" sz="2000" b="0" u="none" strike="noStrike">
-              <a:solidFill>
-                <a:schemeClr val="dk1"/>
-              </a:solidFill>
-              <a:effectLst/>
-              <a:uFillTx/>
-              <a:latin typeface="TradeGothic"/>
-            </a:endParaRPr>
-          </a:p>
-        </p:txBody>
-      </p:sp>
-      <p:sp>
-        <p:nvSpPr>
-          <p:cNvPr id="52" name="PlaceHolder 3"/>
-          <p:cNvSpPr>
-            <a:spLocks noGrp="1"/>
-          </p:cNvSpPr>
-          <p:nvPr>
             <p:ph type="dt" idx="28"/>
           </p:nvPr>
         </p:nvSpPr>
         <p:spPr>
           <a:xfrm>
             <a:off x="609480" y="6356520"/>
-            <a:ext cx="2843640" cy="363960"/>
+            <a:ext cx="2843280" cy="363600"/>
           </a:xfrm>
           <a:prstGeom prst="rect">
             <a:avLst/>
@@ -2730,7 +2266,7 @@
       </p:sp>
       <p:sp>
         <p:nvSpPr>
-          <p:cNvPr id="53" name="PlaceHolder 4"/>
+          <p:cNvPr id="52" name="PlaceHolder 3"/>
           <p:cNvSpPr>
             <a:spLocks noGrp="1"/>
           </p:cNvSpPr>
@@ -2741,7 +2277,7 @@
         <p:spPr>
           <a:xfrm>
             <a:off x="4165560" y="6356520"/>
-            <a:ext cx="3859560" cy="363960"/>
+            <a:ext cx="3859200" cy="363600"/>
           </a:xfrm>
           <a:prstGeom prst="rect">
             <a:avLst/>
@@ -2812,7 +2348,7 @@
       </p:sp>
       <p:sp>
         <p:nvSpPr>
-          <p:cNvPr id="54" name="PlaceHolder 5"/>
+          <p:cNvPr id="53" name="PlaceHolder 4"/>
           <p:cNvSpPr>
             <a:spLocks noGrp="1"/>
           </p:cNvSpPr>
@@ -2823,7 +2359,7 @@
         <p:spPr>
           <a:xfrm>
             <a:off x="8737560" y="6356520"/>
-            <a:ext cx="2843640" cy="363960"/>
+            <a:ext cx="2843280" cy="363600"/>
           </a:xfrm>
           <a:prstGeom prst="rect">
             <a:avLst/>
@@ -2867,7 +2403,7 @@
                 <a:tab pos="0" algn="l"/>
               </a:tabLst>
             </a:pPr>
-            <a:fld id="{D331DD8C-EDE9-4192-9B76-086D5C1D1270}" type="slidenum">
+            <a:fld id="{C753BA5C-0330-425E-9178-A24AA2AE5575}" type="slidenum">
               <a:rPr lang="en-US" sz="1200" b="0" u="none" strike="noStrike">
                 <a:solidFill>
                   <a:srgbClr val="898989"/>
@@ -2886,6 +2422,434 @@
               <a:effectLst/>
               <a:uFillTx/>
               <a:latin typeface="Times New Roman"/>
+            </a:endParaRPr>
+          </a:p>
+        </p:txBody>
+      </p:sp>
+      <p:sp>
+        <p:nvSpPr>
+          <p:cNvPr id="54" name="PlaceHolder 5"/>
+          <p:cNvSpPr>
+            <a:spLocks noGrp="1"/>
+          </p:cNvSpPr>
+          <p:nvPr>
+            <p:ph type="body"/>
+          </p:nvPr>
+        </p:nvSpPr>
+        <p:spPr>
+          <a:xfrm>
+            <a:off x="609480" y="1604520"/>
+            <a:ext cx="10971360" cy="3976200"/>
+          </a:xfrm>
+          <a:prstGeom prst="rect">
+            <a:avLst/>
+          </a:prstGeom>
+          <a:noFill/>
+          <a:ln w="0">
+            <a:noFill/>
+          </a:ln>
+        </p:spPr>
+        <p:txBody>
+          <a:bodyPr lIns="0" tIns="0" rIns="0" bIns="0" anchor="t">
+            <a:normAutofit/>
+          </a:bodyPr>
+          <a:lstStyle>
+            <a:lvl1pPr algn="l" defTabSz="457200">
+              <a:lnSpc>
+                <a:spcPct val="100000"/>
+              </a:lnSpc>
+              <a:spcBef>
+                <a:spcPts val="641"/>
+              </a:spcBef>
+              <a:buClr>
+                <a:srgbClr val="000000"/>
+              </a:buClr>
+              <a:buFont typeface="Arial"/>
+              <a:buChar char="•"/>
+              <a:defRPr lang="en-US" sz="3200" b="0" u="none" strike="noStrike">
+                <a:solidFill>
+                  <a:schemeClr val="dk1"/>
+                </a:solidFill>
+                <a:effectLst/>
+                <a:uFillTx/>
+                <a:latin typeface="TradeGothic"/>
+              </a:defRPr>
+            </a:lvl1pPr>
+            <a:lvl2pPr lvl="1" algn="l" defTabSz="457200">
+              <a:lnSpc>
+                <a:spcPct val="100000"/>
+              </a:lnSpc>
+              <a:spcBef>
+                <a:spcPts val="561"/>
+              </a:spcBef>
+              <a:buClr>
+                <a:srgbClr val="000000"/>
+              </a:buClr>
+              <a:buSzPct val="75000"/>
+              <a:buFont typeface="Symbol" charset="2"/>
+              <a:buChar char=""/>
+              <a:defRPr lang="en-US" sz="2800" b="0" u="none" strike="noStrike">
+                <a:solidFill>
+                  <a:schemeClr val="dk1"/>
+                </a:solidFill>
+                <a:effectLst/>
+                <a:uFillTx/>
+                <a:latin typeface="TradeGothic"/>
+              </a:defRPr>
+            </a:lvl2pPr>
+            <a:lvl3pPr lvl="2" algn="l" defTabSz="457200">
+              <a:lnSpc>
+                <a:spcPct val="100000"/>
+              </a:lnSpc>
+              <a:spcBef>
+                <a:spcPts val="479"/>
+              </a:spcBef>
+              <a:buClr>
+                <a:srgbClr val="000000"/>
+              </a:buClr>
+              <a:buSzPct val="45000"/>
+              <a:buFont typeface="Wingdings" charset="2"/>
+              <a:buChar char=""/>
+              <a:defRPr lang="en-US" sz="2400" b="0" u="none" strike="noStrike">
+                <a:solidFill>
+                  <a:schemeClr val="dk1"/>
+                </a:solidFill>
+                <a:effectLst/>
+                <a:uFillTx/>
+                <a:latin typeface="TradeGothic"/>
+              </a:defRPr>
+            </a:lvl3pPr>
+            <a:lvl4pPr lvl="3" algn="l" defTabSz="457200">
+              <a:lnSpc>
+                <a:spcPct val="100000"/>
+              </a:lnSpc>
+              <a:spcBef>
+                <a:spcPts val="400"/>
+              </a:spcBef>
+              <a:buClr>
+                <a:srgbClr val="000000"/>
+              </a:buClr>
+              <a:buSzPct val="75000"/>
+              <a:buFont typeface="Symbol" charset="2"/>
+              <a:buChar char=""/>
+              <a:defRPr lang="en-US" sz="2000" b="0" u="none" strike="noStrike">
+                <a:solidFill>
+                  <a:schemeClr val="dk1"/>
+                </a:solidFill>
+                <a:effectLst/>
+                <a:uFillTx/>
+                <a:latin typeface="TradeGothic"/>
+              </a:defRPr>
+            </a:lvl4pPr>
+            <a:lvl5pPr lvl="4" algn="l" defTabSz="457200">
+              <a:lnSpc>
+                <a:spcPct val="100000"/>
+              </a:lnSpc>
+              <a:spcBef>
+                <a:spcPts val="400"/>
+              </a:spcBef>
+              <a:buClr>
+                <a:srgbClr val="000000"/>
+              </a:buClr>
+              <a:buSzPct val="45000"/>
+              <a:buFont typeface="Wingdings" charset="2"/>
+              <a:buChar char=""/>
+              <a:defRPr lang="en-US" sz="2000" b="0" u="none" strike="noStrike">
+                <a:solidFill>
+                  <a:schemeClr val="dk1"/>
+                </a:solidFill>
+                <a:effectLst/>
+                <a:uFillTx/>
+                <a:latin typeface="TradeGothic"/>
+              </a:defRPr>
+            </a:lvl5pPr>
+            <a:lvl6pPr lvl="5" algn="l" defTabSz="457200">
+              <a:lnSpc>
+                <a:spcPct val="100000"/>
+              </a:lnSpc>
+              <a:spcBef>
+                <a:spcPts val="283"/>
+              </a:spcBef>
+              <a:buClr>
+                <a:srgbClr val="000000"/>
+              </a:buClr>
+              <a:buSzPct val="45000"/>
+              <a:buFont typeface="Wingdings" charset="2"/>
+              <a:buChar char=""/>
+              <a:defRPr lang="en-US" sz="2000" b="0" u="none" strike="noStrike">
+                <a:solidFill>
+                  <a:schemeClr val="dk1"/>
+                </a:solidFill>
+                <a:effectLst/>
+                <a:uFillTx/>
+                <a:latin typeface="TradeGothic"/>
+              </a:defRPr>
+            </a:lvl6pPr>
+            <a:lvl7pPr lvl="6" algn="l" defTabSz="457200">
+              <a:lnSpc>
+                <a:spcPct val="100000"/>
+              </a:lnSpc>
+              <a:spcBef>
+                <a:spcPts val="283"/>
+              </a:spcBef>
+              <a:buClr>
+                <a:srgbClr val="000000"/>
+              </a:buClr>
+              <a:buSzPct val="45000"/>
+              <a:buFont typeface="Wingdings" charset="2"/>
+              <a:buChar char=""/>
+              <a:defRPr lang="en-US" sz="2000" b="0" u="none" strike="noStrike">
+                <a:solidFill>
+                  <a:schemeClr val="dk1"/>
+                </a:solidFill>
+                <a:effectLst/>
+                <a:uFillTx/>
+                <a:latin typeface="TradeGothic"/>
+              </a:defRPr>
+            </a:lvl7pPr>
+          </a:lstStyle>
+          <a:p>
+            <a:pPr marL="343080" indent="-343080" algn="l" defTabSz="457200">
+              <a:lnSpc>
+                <a:spcPct val="100000"/>
+              </a:lnSpc>
+              <a:spcBef>
+                <a:spcPts val="641"/>
+              </a:spcBef>
+              <a:buClr>
+                <a:srgbClr val="000000"/>
+              </a:buClr>
+              <a:buFont typeface="Arial"/>
+              <a:buChar char="•"/>
+            </a:pPr>
+            <a:r>
+              <a:rPr lang="en-US" sz="3200" b="0" u="none" strike="noStrike">
+                <a:solidFill>
+                  <a:schemeClr val="dk1"/>
+                </a:solidFill>
+                <a:effectLst/>
+                <a:uFillTx/>
+                <a:latin typeface="TradeGothic"/>
+              </a:rPr>
+              <a:t>Click to edit the outline text format</a:t>
+            </a:r>
+            <a:endParaRPr lang="en-US" sz="3200" b="0" u="none" strike="noStrike">
+              <a:solidFill>
+                <a:schemeClr val="dk1"/>
+              </a:solidFill>
+              <a:effectLst/>
+              <a:uFillTx/>
+              <a:latin typeface="TradeGothic"/>
+            </a:endParaRPr>
+          </a:p>
+          <a:p>
+            <a:pPr marL="864000" lvl="1" indent="-324000" algn="l" defTabSz="457200">
+              <a:lnSpc>
+                <a:spcPct val="100000"/>
+              </a:lnSpc>
+              <a:spcBef>
+                <a:spcPts val="561"/>
+              </a:spcBef>
+              <a:buClr>
+                <a:srgbClr val="000000"/>
+              </a:buClr>
+              <a:buSzPct val="75000"/>
+              <a:buFont typeface="Symbol" charset="2"/>
+              <a:buChar char=""/>
+            </a:pPr>
+            <a:r>
+              <a:rPr lang="en-US" sz="2800" b="0" u="none" strike="noStrike">
+                <a:solidFill>
+                  <a:schemeClr val="dk1"/>
+                </a:solidFill>
+                <a:effectLst/>
+                <a:uFillTx/>
+                <a:latin typeface="TradeGothic"/>
+              </a:rPr>
+              <a:t>Second Outline Level</a:t>
+            </a:r>
+            <a:endParaRPr lang="en-US" sz="2800" b="0" u="none" strike="noStrike">
+              <a:solidFill>
+                <a:schemeClr val="dk1"/>
+              </a:solidFill>
+              <a:effectLst/>
+              <a:uFillTx/>
+              <a:latin typeface="TradeGothic"/>
+            </a:endParaRPr>
+          </a:p>
+          <a:p>
+            <a:pPr marL="1296000" lvl="2" indent="-288000" algn="l" defTabSz="457200">
+              <a:lnSpc>
+                <a:spcPct val="100000"/>
+              </a:lnSpc>
+              <a:spcBef>
+                <a:spcPts val="479"/>
+              </a:spcBef>
+              <a:buClr>
+                <a:srgbClr val="000000"/>
+              </a:buClr>
+              <a:buSzPct val="45000"/>
+              <a:buFont typeface="Wingdings" charset="2"/>
+              <a:buChar char=""/>
+            </a:pPr>
+            <a:r>
+              <a:rPr lang="en-US" sz="2400" b="0" u="none" strike="noStrike">
+                <a:solidFill>
+                  <a:schemeClr val="dk1"/>
+                </a:solidFill>
+                <a:effectLst/>
+                <a:uFillTx/>
+                <a:latin typeface="TradeGothic"/>
+              </a:rPr>
+              <a:t>Third Outline Level</a:t>
+            </a:r>
+            <a:endParaRPr lang="en-US" sz="2400" b="0" u="none" strike="noStrike">
+              <a:solidFill>
+                <a:schemeClr val="dk1"/>
+              </a:solidFill>
+              <a:effectLst/>
+              <a:uFillTx/>
+              <a:latin typeface="TradeGothic"/>
+            </a:endParaRPr>
+          </a:p>
+          <a:p>
+            <a:pPr marL="1728000" lvl="3" indent="-216000" algn="l" defTabSz="457200">
+              <a:lnSpc>
+                <a:spcPct val="100000"/>
+              </a:lnSpc>
+              <a:spcBef>
+                <a:spcPts val="400"/>
+              </a:spcBef>
+              <a:buClr>
+                <a:srgbClr val="000000"/>
+              </a:buClr>
+              <a:buSzPct val="75000"/>
+              <a:buFont typeface="Symbol" charset="2"/>
+              <a:buChar char=""/>
+            </a:pPr>
+            <a:r>
+              <a:rPr lang="en-US" sz="2000" b="0" u="none" strike="noStrike">
+                <a:solidFill>
+                  <a:schemeClr val="dk1"/>
+                </a:solidFill>
+                <a:effectLst/>
+                <a:uFillTx/>
+                <a:latin typeface="TradeGothic"/>
+              </a:rPr>
+              <a:t>Fourth Outline Level</a:t>
+            </a:r>
+            <a:endParaRPr lang="en-US" sz="2000" b="0" u="none" strike="noStrike">
+              <a:solidFill>
+                <a:schemeClr val="dk1"/>
+              </a:solidFill>
+              <a:effectLst/>
+              <a:uFillTx/>
+              <a:latin typeface="TradeGothic"/>
+            </a:endParaRPr>
+          </a:p>
+          <a:p>
+            <a:pPr marL="2160000" lvl="4" indent="-216000" algn="l" defTabSz="457200">
+              <a:lnSpc>
+                <a:spcPct val="100000"/>
+              </a:lnSpc>
+              <a:spcBef>
+                <a:spcPts val="400"/>
+              </a:spcBef>
+              <a:buClr>
+                <a:srgbClr val="000000"/>
+              </a:buClr>
+              <a:buSzPct val="45000"/>
+              <a:buFont typeface="Wingdings" charset="2"/>
+              <a:buChar char=""/>
+            </a:pPr>
+            <a:r>
+              <a:rPr lang="en-US" sz="2000" b="0" u="none" strike="noStrike">
+                <a:solidFill>
+                  <a:schemeClr val="dk1"/>
+                </a:solidFill>
+                <a:effectLst/>
+                <a:uFillTx/>
+                <a:latin typeface="TradeGothic"/>
+              </a:rPr>
+              <a:t>Fifth Outline Level</a:t>
+            </a:r>
+            <a:endParaRPr lang="en-US" sz="2000" b="0" u="none" strike="noStrike">
+              <a:solidFill>
+                <a:schemeClr val="dk1"/>
+              </a:solidFill>
+              <a:effectLst/>
+              <a:uFillTx/>
+              <a:latin typeface="TradeGothic"/>
+            </a:endParaRPr>
+          </a:p>
+          <a:p>
+            <a:pPr marL="2592000" lvl="5" indent="-216000" algn="l" defTabSz="457200">
+              <a:lnSpc>
+                <a:spcPct val="100000"/>
+              </a:lnSpc>
+              <a:spcBef>
+                <a:spcPts val="283"/>
+              </a:spcBef>
+              <a:buClr>
+                <a:srgbClr val="000000"/>
+              </a:buClr>
+              <a:buSzPct val="45000"/>
+              <a:buFont typeface="Wingdings" charset="2"/>
+              <a:buChar char=""/>
+            </a:pPr>
+            <a:r>
+              <a:rPr lang="en-US" sz="2000" b="0" u="none" strike="noStrike">
+                <a:solidFill>
+                  <a:schemeClr val="dk1"/>
+                </a:solidFill>
+                <a:effectLst/>
+                <a:uFillTx/>
+                <a:latin typeface="TradeGothic"/>
+              </a:rPr>
+              <a:t>Sixth Outline Level</a:t>
+            </a:r>
+            <a:endParaRPr lang="en-US" sz="2000" b="0" u="none" strike="noStrike">
+              <a:solidFill>
+                <a:schemeClr val="dk1"/>
+              </a:solidFill>
+              <a:effectLst/>
+              <a:uFillTx/>
+              <a:latin typeface="TradeGothic"/>
+            </a:endParaRPr>
+          </a:p>
+          <a:p>
+            <a:pPr marL="3024000" lvl="6" indent="-216000" algn="l" defTabSz="457200">
+              <a:lnSpc>
+                <a:spcPct val="100000"/>
+              </a:lnSpc>
+              <a:spcBef>
+                <a:spcPts val="283"/>
+              </a:spcBef>
+              <a:buClr>
+                <a:srgbClr val="000000"/>
+              </a:buClr>
+              <a:buSzPct val="45000"/>
+              <a:buFont typeface="Wingdings" charset="2"/>
+              <a:buChar char=""/>
+            </a:pPr>
+            <a:r>
+              <a:rPr lang="en-US" sz="2000" b="0" u="none" strike="noStrike">
+                <a:solidFill>
+                  <a:schemeClr val="dk1"/>
+                </a:solidFill>
+                <a:effectLst/>
+                <a:uFillTx/>
+                <a:latin typeface="TradeGothic"/>
+              </a:rPr>
+              <a:t>Seventh Outline Level</a:t>
+            </a:r>
+            <a:endParaRPr lang="en-US" sz="2000" b="0" u="none" strike="noStrike">
+              <a:solidFill>
+                <a:schemeClr val="dk1"/>
+              </a:solidFill>
+              <a:effectLst/>
+              <a:uFillTx/>
+              <a:latin typeface="TradeGothic"/>
             </a:endParaRPr>
           </a:p>
         </p:txBody>
@@ -2896,8 +2860,8 @@
 </file>
 
 <file path=ppt/slideLayouts/slideLayout11.xml><?xml version="1.0" encoding="utf-8"?>
-<p:sldLayout xmlns:a="http://schemas.openxmlformats.org/drawingml/2006/main" xmlns:p="http://schemas.openxmlformats.org/presentationml/2006/main" xmlns:r="http://schemas.openxmlformats.org/officeDocument/2006/relationships" xmlns:p14="http://schemas.microsoft.com/office/powerpoint/2010/main" xmlns:p15="http://schemas.microsoft.com/office/powerpoint/2012/main" xmlns:mc="http://schemas.openxmlformats.org/markup-compatibility/2006" type="blank" preserve="1">
-  <p:cSld name="Section Header">
+<p:sldLayout xmlns:a="http://schemas.openxmlformats.org/drawingml/2006/main" xmlns:p="http://schemas.openxmlformats.org/presentationml/2006/main" xmlns:r="http://schemas.openxmlformats.org/officeDocument/2006/relationships" xmlns:p14="http://schemas.microsoft.com/office/powerpoint/2010/main" xmlns:p15="http://schemas.microsoft.com/office/powerpoint/2012/main" xmlns:mc="http://schemas.openxmlformats.org/markup-compatibility/2006" type="vertTx" preserve="1">
+  <p:cSld name="Title and Vertical Text">
     <p:bg>
       <p:bgPr>
         <a:solidFill>
@@ -2931,8 +2895,8 @@
         </p:nvSpPr>
         <p:spPr>
           <a:xfrm>
-            <a:off x="963000" y="4406760"/>
-            <a:ext cx="10362240" cy="1361160"/>
+            <a:off x="609480" y="-47520"/>
+            <a:ext cx="10971360" cy="1141560"/>
           </a:xfrm>
           <a:prstGeom prst="rect">
             <a:avLst/>
@@ -2943,19 +2907,19 @@
           </a:ln>
         </p:spPr>
         <p:txBody>
-          <a:bodyPr numCol="1" spcCol="0" lIns="91440" tIns="45720" rIns="91440" bIns="45720" anchor="t">
+          <a:bodyPr numCol="1" spcCol="0" lIns="91440" tIns="45720" rIns="91440" bIns="45720" anchor="ctr">
             <a:noAutofit/>
           </a:bodyPr>
           <a:lstStyle>
-            <a:lvl1pPr indent="0" algn="l" defTabSz="457200">
-              <a:lnSpc>
-                <a:spcPct val="100000"/>
-              </a:lnSpc>
-              <a:buNone/>
-              <a:tabLst>
-                <a:tab pos="0" algn="l"/>
-              </a:tabLst>
-              <a:defRPr lang="en-US" sz="4000" b="1" u="none" strike="noStrike" cap="all">
+            <a:lvl1pPr indent="0" algn="ctr" defTabSz="457200">
+              <a:lnSpc>
+                <a:spcPct val="100000"/>
+              </a:lnSpc>
+              <a:buNone/>
+              <a:tabLst>
+                <a:tab pos="0" algn="l"/>
+              </a:tabLst>
+              <a:defRPr lang="en-US" sz="4400" b="0" u="none" strike="noStrike">
                 <a:solidFill>
                   <a:schemeClr val="dk1"/>
                 </a:solidFill>
@@ -2967,17 +2931,17 @@
             </a:lvl1pPr>
           </a:lstStyle>
           <a:p>
-            <a:pPr indent="0" algn="l" defTabSz="457200">
-              <a:lnSpc>
-                <a:spcPct val="100000"/>
-              </a:lnSpc>
-              <a:buNone/>
-              <a:tabLst>
-                <a:tab pos="0" algn="l"/>
-              </a:tabLst>
-            </a:pPr>
-            <a:r>
-              <a:rPr lang="en-US" sz="4000" b="1" u="none" strike="noStrike" cap="all">
+            <a:pPr indent="0" algn="ctr" defTabSz="457200">
+              <a:lnSpc>
+                <a:spcPct val="100000"/>
+              </a:lnSpc>
+              <a:buNone/>
+              <a:tabLst>
+                <a:tab pos="0" algn="l"/>
+              </a:tabLst>
+            </a:pPr>
+            <a:r>
+              <a:rPr lang="en-US" sz="4400" b="0" u="none" strike="noStrike">
                 <a:solidFill>
                   <a:schemeClr val="dk1"/>
                 </a:solidFill>
@@ -2988,7 +2952,7 @@
               </a:rPr>
               <a:t>Click to edit Master title style</a:t>
             </a:r>
-            <a:endParaRPr lang="en-US" sz="4000" b="1" u="none" strike="noStrike" cap="all">
+            <a:endParaRPr lang="en-US" sz="4400" b="0" u="none" strike="noStrike">
               <a:solidFill>
                 <a:schemeClr val="dk1"/>
               </a:solidFill>
@@ -3011,8 +2975,8 @@
         </p:nvSpPr>
         <p:spPr>
           <a:xfrm>
-            <a:off x="963000" y="2906640"/>
-            <a:ext cx="10362240" cy="1499040"/>
+            <a:off x="609480" y="1095480"/>
+            <a:ext cx="10971360" cy="5029200"/>
           </a:xfrm>
           <a:prstGeom prst="rect">
             <a:avLst/>
@@ -3023,26 +2987,25 @@
           </a:ln>
         </p:spPr>
         <p:txBody>
-          <a:bodyPr numCol="1" spcCol="0" lIns="91440" tIns="45720" rIns="91440" bIns="45720" anchor="b">
+          <a:bodyPr numCol="1" spcCol="0" lIns="91440" tIns="45720" rIns="91440" bIns="45720" anchor="t" vert="eaVert">
             <a:noAutofit/>
           </a:bodyPr>
           <a:lstStyle>
-            <a:lvl1pPr indent="0" algn="l" defTabSz="457200">
-              <a:lnSpc>
-                <a:spcPct val="100000"/>
-              </a:lnSpc>
-              <a:spcBef>
-                <a:spcPts val="400"/>
-              </a:spcBef>
-              <a:buNone/>
-              <a:tabLst>
-                <a:tab pos="0" algn="l"/>
-              </a:tabLst>
-              <a:defRPr lang="en-US" sz="2000" b="0" u="none" strike="noStrike">
-                <a:solidFill>
-                  <a:schemeClr val="dk1">
-                    <a:tint val="75000"/>
-                  </a:schemeClr>
+            <a:lvl1pPr algn="l" defTabSz="457200">
+              <a:lnSpc>
+                <a:spcPct val="100000"/>
+              </a:lnSpc>
+              <a:spcBef>
+                <a:spcPts val="641"/>
+              </a:spcBef>
+              <a:buClr>
+                <a:srgbClr val="000000"/>
+              </a:buClr>
+              <a:buFont typeface="Arial"/>
+              <a:buChar char="•"/>
+              <a:defRPr lang="en-US" sz="3200" b="0" u="none" strike="noStrike">
+                <a:solidFill>
+                  <a:schemeClr val="dk1"/>
                 </a:solidFill>
                 <a:effectLst/>
                 <a:uFillTx/>
@@ -3050,39 +3013,264 @@
                 <a:ea typeface="ＭＳ Ｐゴシック"/>
               </a:defRPr>
             </a:lvl1pPr>
+            <a:lvl2pPr lvl="1" algn="l" defTabSz="457200">
+              <a:lnSpc>
+                <a:spcPct val="100000"/>
+              </a:lnSpc>
+              <a:spcBef>
+                <a:spcPts val="561"/>
+              </a:spcBef>
+              <a:buClr>
+                <a:srgbClr val="000000"/>
+              </a:buClr>
+              <a:buFont typeface="Arial"/>
+              <a:buChar char="–"/>
+              <a:defRPr lang="en-US" sz="2800" b="0" u="none" strike="noStrike">
+                <a:solidFill>
+                  <a:schemeClr val="dk1"/>
+                </a:solidFill>
+                <a:effectLst/>
+                <a:uFillTx/>
+                <a:latin typeface="TradeGothic"/>
+                <a:ea typeface="ＭＳ Ｐゴシック"/>
+              </a:defRPr>
+            </a:lvl2pPr>
+            <a:lvl3pPr lvl="2" algn="l" defTabSz="457200">
+              <a:lnSpc>
+                <a:spcPct val="100000"/>
+              </a:lnSpc>
+              <a:spcBef>
+                <a:spcPts val="479"/>
+              </a:spcBef>
+              <a:buClr>
+                <a:srgbClr val="000000"/>
+              </a:buClr>
+              <a:buFont typeface="Arial"/>
+              <a:buChar char="•"/>
+              <a:defRPr lang="en-US" sz="2400" b="0" u="none" strike="noStrike">
+                <a:solidFill>
+                  <a:schemeClr val="dk1"/>
+                </a:solidFill>
+                <a:effectLst/>
+                <a:uFillTx/>
+                <a:latin typeface="TradeGothic"/>
+                <a:ea typeface="ＭＳ Ｐゴシック"/>
+              </a:defRPr>
+            </a:lvl3pPr>
+            <a:lvl4pPr lvl="3" algn="l" defTabSz="457200">
+              <a:lnSpc>
+                <a:spcPct val="100000"/>
+              </a:lnSpc>
+              <a:spcBef>
+                <a:spcPts val="400"/>
+              </a:spcBef>
+              <a:buClr>
+                <a:srgbClr val="000000"/>
+              </a:buClr>
+              <a:buFont typeface="Arial"/>
+              <a:buChar char="–"/>
+              <a:defRPr lang="en-US" sz="2000" b="0" u="none" strike="noStrike">
+                <a:solidFill>
+                  <a:schemeClr val="dk1"/>
+                </a:solidFill>
+                <a:effectLst/>
+                <a:uFillTx/>
+                <a:latin typeface="TradeGothic"/>
+                <a:ea typeface="ＭＳ Ｐゴシック"/>
+              </a:defRPr>
+            </a:lvl4pPr>
+            <a:lvl5pPr lvl="4" algn="l" defTabSz="457200">
+              <a:lnSpc>
+                <a:spcPct val="100000"/>
+              </a:lnSpc>
+              <a:spcBef>
+                <a:spcPts val="400"/>
+              </a:spcBef>
+              <a:buClr>
+                <a:srgbClr val="000000"/>
+              </a:buClr>
+              <a:buFont typeface="Arial"/>
+              <a:buChar char="»"/>
+              <a:defRPr lang="en-US" sz="2000" b="0" u="none" strike="noStrike">
+                <a:solidFill>
+                  <a:schemeClr val="dk1"/>
+                </a:solidFill>
+                <a:effectLst/>
+                <a:uFillTx/>
+                <a:latin typeface="TradeGothic"/>
+                <a:ea typeface="ＭＳ Ｐゴシック"/>
+              </a:defRPr>
+            </a:lvl5pPr>
           </a:lstStyle>
           <a:p>
-            <a:pPr indent="0" algn="l" defTabSz="457200">
+            <a:pPr marL="343080" indent="-343080" algn="l" defTabSz="457200">
+              <a:lnSpc>
+                <a:spcPct val="100000"/>
+              </a:lnSpc>
+              <a:spcBef>
+                <a:spcPts val="641"/>
+              </a:spcBef>
+              <a:buClr>
+                <a:srgbClr val="000000"/>
+              </a:buClr>
+              <a:buFont typeface="Arial"/>
+              <a:buChar char="•"/>
+            </a:pPr>
+            <a:r>
+              <a:rPr lang="en-US" sz="3200" b="0" u="none" strike="noStrike">
+                <a:solidFill>
+                  <a:schemeClr val="dk1"/>
+                </a:solidFill>
+                <a:effectLst/>
+                <a:uFillTx/>
+                <a:latin typeface="TradeGothic"/>
+                <a:ea typeface="ＭＳ Ｐゴシック"/>
+              </a:rPr>
+              <a:t>Click to edit Master text styles</a:t>
+            </a:r>
+            <a:endParaRPr lang="en-US" sz="3200" b="0" u="none" strike="noStrike">
+              <a:solidFill>
+                <a:schemeClr val="dk1"/>
+              </a:solidFill>
+              <a:effectLst/>
+              <a:uFillTx/>
+              <a:latin typeface="TradeGothic"/>
+            </a:endParaRPr>
+          </a:p>
+          <a:p>
+            <a:pPr marL="743040" lvl="1" indent="-285840" algn="l" defTabSz="457200">
+              <a:lnSpc>
+                <a:spcPct val="100000"/>
+              </a:lnSpc>
+              <a:spcBef>
+                <a:spcPts val="561"/>
+              </a:spcBef>
+              <a:buClr>
+                <a:srgbClr val="000000"/>
+              </a:buClr>
+              <a:buFont typeface="Arial"/>
+              <a:buChar char="–"/>
+            </a:pPr>
+            <a:r>
+              <a:rPr lang="en-US" sz="2800" b="0" u="none" strike="noStrike">
+                <a:solidFill>
+                  <a:schemeClr val="dk1"/>
+                </a:solidFill>
+                <a:effectLst/>
+                <a:uFillTx/>
+                <a:latin typeface="TradeGothic"/>
+                <a:ea typeface="ＭＳ Ｐゴシック"/>
+              </a:rPr>
+              <a:t>Second level</a:t>
+            </a:r>
+            <a:endParaRPr lang="en-US" sz="2800" b="0" u="none" strike="noStrike">
+              <a:solidFill>
+                <a:schemeClr val="dk1"/>
+              </a:solidFill>
+              <a:effectLst/>
+              <a:uFillTx/>
+              <a:latin typeface="TradeGothic"/>
+            </a:endParaRPr>
+          </a:p>
+          <a:p>
+            <a:pPr marL="1143000" lvl="2" indent="-228600" algn="l" defTabSz="457200">
+              <a:lnSpc>
+                <a:spcPct val="100000"/>
+              </a:lnSpc>
+              <a:spcBef>
+                <a:spcPts val="479"/>
+              </a:spcBef>
+              <a:buClr>
+                <a:srgbClr val="000000"/>
+              </a:buClr>
+              <a:buFont typeface="Arial"/>
+              <a:buChar char="•"/>
+            </a:pPr>
+            <a:r>
+              <a:rPr lang="en-US" sz="2400" b="0" u="none" strike="noStrike">
+                <a:solidFill>
+                  <a:schemeClr val="dk1"/>
+                </a:solidFill>
+                <a:effectLst/>
+                <a:uFillTx/>
+                <a:latin typeface="TradeGothic"/>
+                <a:ea typeface="ＭＳ Ｐゴシック"/>
+              </a:rPr>
+              <a:t>Third level</a:t>
+            </a:r>
+            <a:endParaRPr lang="en-US" sz="2400" b="0" u="none" strike="noStrike">
+              <a:solidFill>
+                <a:schemeClr val="dk1"/>
+              </a:solidFill>
+              <a:effectLst/>
+              <a:uFillTx/>
+              <a:latin typeface="TradeGothic"/>
+            </a:endParaRPr>
+          </a:p>
+          <a:p>
+            <a:pPr marL="1600200" lvl="3" indent="-228600" algn="l" defTabSz="457200">
               <a:lnSpc>
                 <a:spcPct val="100000"/>
               </a:lnSpc>
               <a:spcBef>
                 <a:spcPts val="400"/>
               </a:spcBef>
-              <a:buNone/>
-              <a:tabLst>
-                <a:tab pos="0" algn="l"/>
-              </a:tabLst>
+              <a:buClr>
+                <a:srgbClr val="000000"/>
+              </a:buClr>
+              <a:buFont typeface="Arial"/>
+              <a:buChar char="–"/>
             </a:pPr>
             <a:r>
               <a:rPr lang="en-US" sz="2000" b="0" u="none" strike="noStrike">
                 <a:solidFill>
-                  <a:schemeClr val="dk1">
-                    <a:tint val="75000"/>
-                  </a:schemeClr>
-                </a:solidFill>
-                <a:effectLst/>
-                <a:uFillTx/>
-                <a:latin typeface="TradeGothic"/>
-                <a:ea typeface="ＭＳ Ｐゴシック"/>
-              </a:rPr>
-              <a:t>Click to edit Master text styles</a:t>
+                  <a:schemeClr val="dk1"/>
+                </a:solidFill>
+                <a:effectLst/>
+                <a:uFillTx/>
+                <a:latin typeface="TradeGothic"/>
+                <a:ea typeface="ＭＳ Ｐゴシック"/>
+              </a:rPr>
+              <a:t>Fourth level</a:t>
             </a:r>
             <a:endParaRPr lang="en-US" sz="2000" b="0" u="none" strike="noStrike">
               <a:solidFill>
-                <a:schemeClr val="dk1">
-                  <a:tint val="75000"/>
-                </a:schemeClr>
+                <a:schemeClr val="dk1"/>
+              </a:solidFill>
+              <a:effectLst/>
+              <a:uFillTx/>
+              <a:latin typeface="TradeGothic"/>
+            </a:endParaRPr>
+          </a:p>
+          <a:p>
+            <a:pPr marL="2057400" lvl="4" indent="-228600" algn="l" defTabSz="457200">
+              <a:lnSpc>
+                <a:spcPct val="100000"/>
+              </a:lnSpc>
+              <a:spcBef>
+                <a:spcPts val="400"/>
+              </a:spcBef>
+              <a:buClr>
+                <a:srgbClr val="000000"/>
+              </a:buClr>
+              <a:buFont typeface="Arial"/>
+              <a:buChar char="»"/>
+            </a:pPr>
+            <a:r>
+              <a:rPr lang="en-US" sz="2000" b="0" u="none" strike="noStrike">
+                <a:solidFill>
+                  <a:schemeClr val="dk1"/>
+                </a:solidFill>
+                <a:effectLst/>
+                <a:uFillTx/>
+                <a:latin typeface="TradeGothic"/>
+                <a:ea typeface="ＭＳ Ｐゴシック"/>
+              </a:rPr>
+              <a:t>Fifth level</a:t>
+            </a:r>
+            <a:endParaRPr lang="en-US" sz="2000" b="0" u="none" strike="noStrike">
+              <a:solidFill>
+                <a:schemeClr val="dk1"/>
               </a:solidFill>
               <a:effectLst/>
               <a:uFillTx/>
@@ -3104,7 +3292,7 @@
         <p:spPr>
           <a:xfrm>
             <a:off x="609480" y="6356520"/>
-            <a:ext cx="2843640" cy="363960"/>
+            <a:ext cx="2843280" cy="363600"/>
           </a:xfrm>
           <a:prstGeom prst="rect">
             <a:avLst/>
@@ -3184,7 +3372,7 @@
         <p:spPr>
           <a:xfrm>
             <a:off x="4165560" y="6356520"/>
-            <a:ext cx="3859560" cy="363960"/>
+            <a:ext cx="3859200" cy="363600"/>
           </a:xfrm>
           <a:prstGeom prst="rect">
             <a:avLst/>
@@ -3266,7 +3454,7 @@
         <p:spPr>
           <a:xfrm>
             <a:off x="8737560" y="6356520"/>
-            <a:ext cx="2843640" cy="363960"/>
+            <a:ext cx="2843280" cy="363600"/>
           </a:xfrm>
           <a:prstGeom prst="rect">
             <a:avLst/>
@@ -3310,7 +3498,7 @@
                 <a:tab pos="0" algn="l"/>
               </a:tabLst>
             </a:pPr>
-            <a:fld id="{218B6465-B7D3-42C6-8791-88F9B3A26BE3}" type="slidenum">
+            <a:fld id="{11E7FA98-609D-4BCA-AD78-678C28BC6E00}" type="slidenum">
               <a:rPr lang="en-US" sz="1200" b="0" u="none" strike="noStrike">
                 <a:solidFill>
                   <a:srgbClr val="898989"/>
@@ -3339,8 +3527,8 @@
 </file>
 
 <file path=ppt/slideLayouts/slideLayout2.xml><?xml version="1.0" encoding="utf-8"?>
-<p:sldLayout xmlns:a="http://schemas.openxmlformats.org/drawingml/2006/main" xmlns:p="http://schemas.openxmlformats.org/presentationml/2006/main" xmlns:r="http://schemas.openxmlformats.org/officeDocument/2006/relationships" xmlns:p14="http://schemas.microsoft.com/office/powerpoint/2010/main" xmlns:p15="http://schemas.microsoft.com/office/powerpoint/2012/main" xmlns:mc="http://schemas.openxmlformats.org/markup-compatibility/2006" type="blank" preserve="1">
-  <p:cSld name="Comparison">
+<p:sldLayout xmlns:a="http://schemas.openxmlformats.org/drawingml/2006/main" xmlns:p="http://schemas.openxmlformats.org/presentationml/2006/main" xmlns:r="http://schemas.openxmlformats.org/officeDocument/2006/relationships" xmlns:p14="http://schemas.microsoft.com/office/powerpoint/2010/main" xmlns:p15="http://schemas.microsoft.com/office/powerpoint/2012/main" xmlns:mc="http://schemas.openxmlformats.org/markup-compatibility/2006" type="obj" preserve="1">
+  <p:cSld name="Title and Content">
     <p:bg>
       <p:bgPr>
         <a:solidFill>
@@ -3364,7 +3552,7 @@
       </p:grpSpPr>
       <p:sp>
         <p:nvSpPr>
-          <p:cNvPr id="8" name="PlaceHolder 1"/>
+          <p:cNvPr id="7" name="PlaceHolder 1"/>
           <p:cNvSpPr>
             <a:spLocks noGrp="1"/>
           </p:cNvSpPr>
@@ -3375,7 +3563,7 @@
         <p:spPr>
           <a:xfrm>
             <a:off x="609480" y="-47520"/>
-            <a:ext cx="10971720" cy="1141920"/>
+            <a:ext cx="10971360" cy="1141560"/>
           </a:xfrm>
           <a:prstGeom prst="rect">
             <a:avLst/>
@@ -3444,7 +3632,7 @@
       </p:sp>
       <p:sp>
         <p:nvSpPr>
-          <p:cNvPr id="9" name="PlaceHolder 2"/>
+          <p:cNvPr id="8" name="PlaceHolder 2"/>
           <p:cNvSpPr>
             <a:spLocks noGrp="1"/>
           </p:cNvSpPr>
@@ -3454,94 +3642,8 @@
         </p:nvSpPr>
         <p:spPr>
           <a:xfrm>
-            <a:off x="609480" y="1535040"/>
-            <a:ext cx="5385960" cy="638640"/>
-          </a:xfrm>
-          <a:prstGeom prst="rect">
-            <a:avLst/>
-          </a:prstGeom>
-          <a:noFill/>
-          <a:ln w="9360">
-            <a:noFill/>
-          </a:ln>
-        </p:spPr>
-        <p:txBody>
-          <a:bodyPr numCol="1" spcCol="0" lIns="91440" tIns="45720" rIns="91440" bIns="45720" anchor="b">
-            <a:noAutofit/>
-          </a:bodyPr>
-          <a:lstStyle>
-            <a:lvl1pPr indent="0" algn="l" defTabSz="457200">
-              <a:lnSpc>
-                <a:spcPct val="100000"/>
-              </a:lnSpc>
-              <a:spcBef>
-                <a:spcPts val="479"/>
-              </a:spcBef>
-              <a:buNone/>
-              <a:tabLst>
-                <a:tab pos="0" algn="l"/>
-              </a:tabLst>
-              <a:defRPr lang="en-US" sz="2400" b="1" u="none" strike="noStrike">
-                <a:solidFill>
-                  <a:schemeClr val="dk1"/>
-                </a:solidFill>
-                <a:effectLst/>
-                <a:uFillTx/>
-                <a:latin typeface="TradeGothic"/>
-                <a:ea typeface="ＭＳ Ｐゴシック"/>
-              </a:defRPr>
-            </a:lvl1pPr>
-          </a:lstStyle>
-          <a:p>
-            <a:pPr indent="0" algn="l" defTabSz="457200">
-              <a:lnSpc>
-                <a:spcPct val="100000"/>
-              </a:lnSpc>
-              <a:spcBef>
-                <a:spcPts val="479"/>
-              </a:spcBef>
-              <a:buNone/>
-              <a:tabLst>
-                <a:tab pos="0" algn="l"/>
-              </a:tabLst>
-            </a:pPr>
-            <a:r>
-              <a:rPr lang="en-US" sz="2400" b="1" u="none" strike="noStrike">
-                <a:solidFill>
-                  <a:schemeClr val="dk1"/>
-                </a:solidFill>
-                <a:effectLst/>
-                <a:uFillTx/>
-                <a:latin typeface="TradeGothic"/>
-                <a:ea typeface="ＭＳ Ｐゴシック"/>
-              </a:rPr>
-              <a:t>Click to edit Master text styles</a:t>
-            </a:r>
-            <a:endParaRPr lang="en-US" sz="2400" b="0" u="none" strike="noStrike">
-              <a:solidFill>
-                <a:schemeClr val="dk1"/>
-              </a:solidFill>
-              <a:effectLst/>
-              <a:uFillTx/>
-              <a:latin typeface="TradeGothic"/>
-            </a:endParaRPr>
-          </a:p>
-        </p:txBody>
-      </p:sp>
-      <p:sp>
-        <p:nvSpPr>
-          <p:cNvPr id="10" name="PlaceHolder 3"/>
-          <p:cNvSpPr>
-            <a:spLocks noGrp="1"/>
-          </p:cNvSpPr>
-          <p:nvPr>
-            <p:ph type="body"/>
-          </p:nvPr>
-        </p:nvSpPr>
-        <p:spPr>
-          <a:xfrm>
-            <a:off x="609480" y="2174760"/>
-            <a:ext cx="5385960" cy="3950280"/>
+            <a:off x="609480" y="1095480"/>
+            <a:ext cx="10971360" cy="5029200"/>
           </a:xfrm>
           <a:prstGeom prst="rect">
             <a:avLst/>
@@ -3561,17 +3663,14 @@
                 <a:spcPct val="100000"/>
               </a:lnSpc>
               <a:spcBef>
-                <a:spcPts val="479"/>
+                <a:spcPts val="641"/>
               </a:spcBef>
               <a:buClr>
                 <a:srgbClr val="000000"/>
               </a:buClr>
               <a:buFont typeface="Arial"/>
               <a:buChar char="•"/>
-              <a:tabLst>
-                <a:tab pos="0" algn="l"/>
-              </a:tabLst>
-              <a:defRPr lang="en-US" sz="2400" b="0" u="none" strike="noStrike">
+              <a:defRPr lang="en-US" sz="3200" b="0" u="none" strike="noStrike">
                 <a:solidFill>
                   <a:schemeClr val="dk1"/>
                 </a:solidFill>
@@ -3586,17 +3685,14 @@
                 <a:spcPct val="100000"/>
               </a:lnSpc>
               <a:spcBef>
-                <a:spcPts val="400"/>
+                <a:spcPts val="561"/>
               </a:spcBef>
               <a:buClr>
                 <a:srgbClr val="000000"/>
               </a:buClr>
               <a:buFont typeface="Arial"/>
               <a:buChar char="–"/>
-              <a:tabLst>
-                <a:tab pos="0" algn="l"/>
-              </a:tabLst>
-              <a:defRPr lang="en-US" sz="2000" b="0" u="none" strike="noStrike">
+              <a:defRPr lang="en-US" sz="2800" b="0" u="none" strike="noStrike">
                 <a:solidFill>
                   <a:schemeClr val="dk1"/>
                 </a:solidFill>
@@ -3611,17 +3707,14 @@
                 <a:spcPct val="100000"/>
               </a:lnSpc>
               <a:spcBef>
-                <a:spcPts val="360"/>
+                <a:spcPts val="479"/>
               </a:spcBef>
               <a:buClr>
                 <a:srgbClr val="000000"/>
               </a:buClr>
               <a:buFont typeface="Arial"/>
               <a:buChar char="•"/>
-              <a:tabLst>
-                <a:tab pos="0" algn="l"/>
-              </a:tabLst>
-              <a:defRPr lang="en-US" sz="1800" b="0" u="none" strike="noStrike">
+              <a:defRPr lang="en-US" sz="2400" b="0" u="none" strike="noStrike">
                 <a:solidFill>
                   <a:schemeClr val="dk1"/>
                 </a:solidFill>
@@ -3636,17 +3729,14 @@
                 <a:spcPct val="100000"/>
               </a:lnSpc>
               <a:spcBef>
-                <a:spcPts val="320"/>
+                <a:spcPts val="400"/>
               </a:spcBef>
               <a:buClr>
                 <a:srgbClr val="000000"/>
               </a:buClr>
               <a:buFont typeface="Arial"/>
               <a:buChar char="–"/>
-              <a:tabLst>
-                <a:tab pos="0" algn="l"/>
-              </a:tabLst>
-              <a:defRPr lang="en-US" sz="1600" b="0" u="none" strike="noStrike">
+              <a:defRPr lang="en-US" sz="2000" b="0" u="none" strike="noStrike">
                 <a:solidFill>
                   <a:schemeClr val="dk1"/>
                 </a:solidFill>
@@ -3661,17 +3751,14 @@
                 <a:spcPct val="100000"/>
               </a:lnSpc>
               <a:spcBef>
-                <a:spcPts val="320"/>
+                <a:spcPts val="400"/>
               </a:spcBef>
               <a:buClr>
                 <a:srgbClr val="000000"/>
               </a:buClr>
               <a:buFont typeface="Arial"/>
               <a:buChar char="»"/>
-              <a:tabLst>
-                <a:tab pos="0" algn="l"/>
-              </a:tabLst>
-              <a:defRPr lang="en-US" sz="1600" b="0" u="none" strike="noStrike">
+              <a:defRPr lang="en-US" sz="2000" b="0" u="none" strike="noStrike">
                 <a:solidFill>
                   <a:schemeClr val="dk1"/>
                 </a:solidFill>
@@ -3688,19 +3775,16 @@
                 <a:spcPct val="100000"/>
               </a:lnSpc>
               <a:spcBef>
-                <a:spcPts val="479"/>
+                <a:spcPts val="641"/>
               </a:spcBef>
               <a:buClr>
                 <a:srgbClr val="000000"/>
               </a:buClr>
               <a:buFont typeface="Arial"/>
               <a:buChar char="•"/>
-              <a:tabLst>
-                <a:tab pos="0" algn="l"/>
-              </a:tabLst>
-            </a:pPr>
-            <a:r>
-              <a:rPr lang="en-US" sz="2400" b="0" u="none" strike="noStrike">
+            </a:pPr>
+            <a:r>
+              <a:rPr lang="en-US" sz="3200" b="0" u="none" strike="noStrike">
                 <a:solidFill>
                   <a:schemeClr val="dk1"/>
                 </a:solidFill>
@@ -3711,7 +3795,7 @@
               </a:rPr>
               <a:t>Click to edit Master text styles</a:t>
             </a:r>
-            <a:endParaRPr lang="en-US" sz="2400" b="0" u="none" strike="noStrike">
+            <a:endParaRPr lang="en-US" sz="3200" b="0" u="none" strike="noStrike">
               <a:solidFill>
                 <a:schemeClr val="dk1"/>
               </a:solidFill>
@@ -3726,19 +3810,16 @@
                 <a:spcPct val="100000"/>
               </a:lnSpc>
               <a:spcBef>
-                <a:spcPts val="400"/>
+                <a:spcPts val="561"/>
               </a:spcBef>
               <a:buClr>
                 <a:srgbClr val="000000"/>
               </a:buClr>
               <a:buFont typeface="Arial"/>
               <a:buChar char="–"/>
-              <a:tabLst>
-                <a:tab pos="0" algn="l"/>
-              </a:tabLst>
-            </a:pPr>
-            <a:r>
-              <a:rPr lang="en-US" sz="2000" b="0" u="none" strike="noStrike">
+            </a:pPr>
+            <a:r>
+              <a:rPr lang="en-US" sz="2800" b="0" u="none" strike="noStrike">
                 <a:solidFill>
                   <a:schemeClr val="dk1"/>
                 </a:solidFill>
@@ -3749,7 +3830,7 @@
               </a:rPr>
               <a:t>Second level</a:t>
             </a:r>
-            <a:endParaRPr lang="en-US" sz="2000" b="0" u="none" strike="noStrike">
+            <a:endParaRPr lang="en-US" sz="2800" b="0" u="none" strike="noStrike">
               <a:solidFill>
                 <a:schemeClr val="dk1"/>
               </a:solidFill>
@@ -3764,19 +3845,16 @@
                 <a:spcPct val="100000"/>
               </a:lnSpc>
               <a:spcBef>
-                <a:spcPts val="360"/>
+                <a:spcPts val="479"/>
               </a:spcBef>
               <a:buClr>
                 <a:srgbClr val="000000"/>
               </a:buClr>
               <a:buFont typeface="Arial"/>
               <a:buChar char="•"/>
-              <a:tabLst>
-                <a:tab pos="0" algn="l"/>
-              </a:tabLst>
-            </a:pPr>
-            <a:r>
-              <a:rPr lang="en-US" sz="1800" b="0" u="none" strike="noStrike">
+            </a:pPr>
+            <a:r>
+              <a:rPr lang="en-US" sz="2400" b="0" u="none" strike="noStrike">
                 <a:solidFill>
                   <a:schemeClr val="dk1"/>
                 </a:solidFill>
@@ -3787,7 +3865,7 @@
               </a:rPr>
               <a:t>Third level</a:t>
             </a:r>
-            <a:endParaRPr lang="en-US" sz="1800" b="0" u="none" strike="noStrike">
+            <a:endParaRPr lang="en-US" sz="2400" b="0" u="none" strike="noStrike">
               <a:solidFill>
                 <a:schemeClr val="dk1"/>
               </a:solidFill>
@@ -3802,19 +3880,16 @@
                 <a:spcPct val="100000"/>
               </a:lnSpc>
               <a:spcBef>
-                <a:spcPts val="320"/>
+                <a:spcPts val="400"/>
               </a:spcBef>
               <a:buClr>
                 <a:srgbClr val="000000"/>
               </a:buClr>
               <a:buFont typeface="Arial"/>
               <a:buChar char="–"/>
-              <a:tabLst>
-                <a:tab pos="0" algn="l"/>
-              </a:tabLst>
-            </a:pPr>
-            <a:r>
-              <a:rPr lang="en-US" sz="1600" b="0" u="none" strike="noStrike">
+            </a:pPr>
+            <a:r>
+              <a:rPr lang="en-US" sz="2000" b="0" u="none" strike="noStrike">
                 <a:solidFill>
                   <a:schemeClr val="dk1"/>
                 </a:solidFill>
@@ -3825,7 +3900,7 @@
               </a:rPr>
               <a:t>Fourth level</a:t>
             </a:r>
-            <a:endParaRPr lang="en-US" sz="1600" b="0" u="none" strike="noStrike">
+            <a:endParaRPr lang="en-US" sz="2000" b="0" u="none" strike="noStrike">
               <a:solidFill>
                 <a:schemeClr val="dk1"/>
               </a:solidFill>
@@ -3840,19 +3915,16 @@
                 <a:spcPct val="100000"/>
               </a:lnSpc>
               <a:spcBef>
-                <a:spcPts val="320"/>
+                <a:spcPts val="400"/>
               </a:spcBef>
               <a:buClr>
                 <a:srgbClr val="000000"/>
               </a:buClr>
               <a:buFont typeface="Arial"/>
               <a:buChar char="»"/>
-              <a:tabLst>
-                <a:tab pos="0" algn="l"/>
-              </a:tabLst>
-            </a:pPr>
-            <a:r>
-              <a:rPr lang="en-US" sz="1600" b="0" u="none" strike="noStrike">
+            </a:pPr>
+            <a:r>
+              <a:rPr lang="en-US" sz="2000" b="0" u="none" strike="noStrike">
                 <a:solidFill>
                   <a:schemeClr val="dk1"/>
                 </a:solidFill>
@@ -3863,7 +3935,7 @@
               </a:rPr>
               <a:t>Fifth level</a:t>
             </a:r>
-            <a:endParaRPr lang="en-US" sz="1600" b="0" u="none" strike="noStrike">
+            <a:endParaRPr lang="en-US" sz="2000" b="0" u="none" strike="noStrike">
               <a:solidFill>
                 <a:schemeClr val="dk1"/>
               </a:solidFill>
@@ -3876,439 +3948,7 @@
       </p:sp>
       <p:sp>
         <p:nvSpPr>
-          <p:cNvPr id="11" name="PlaceHolder 4"/>
-          <p:cNvSpPr>
-            <a:spLocks noGrp="1"/>
-          </p:cNvSpPr>
-          <p:nvPr>
-            <p:ph type="body"/>
-          </p:nvPr>
-        </p:nvSpPr>
-        <p:spPr>
-          <a:xfrm>
-            <a:off x="6193440" y="1535040"/>
-            <a:ext cx="5388120" cy="638640"/>
-          </a:xfrm>
-          <a:prstGeom prst="rect">
-            <a:avLst/>
-          </a:prstGeom>
-          <a:noFill/>
-          <a:ln w="9360">
-            <a:noFill/>
-          </a:ln>
-        </p:spPr>
-        <p:txBody>
-          <a:bodyPr numCol="1" spcCol="0" lIns="91440" tIns="45720" rIns="91440" bIns="45720" anchor="b">
-            <a:noAutofit/>
-          </a:bodyPr>
-          <a:lstStyle>
-            <a:lvl1pPr indent="0" algn="l" defTabSz="457200">
-              <a:lnSpc>
-                <a:spcPct val="100000"/>
-              </a:lnSpc>
-              <a:spcBef>
-                <a:spcPts val="479"/>
-              </a:spcBef>
-              <a:buNone/>
-              <a:tabLst>
-                <a:tab pos="0" algn="l"/>
-              </a:tabLst>
-              <a:defRPr lang="en-US" sz="2400" b="1" u="none" strike="noStrike">
-                <a:solidFill>
-                  <a:schemeClr val="dk1"/>
-                </a:solidFill>
-                <a:effectLst/>
-                <a:uFillTx/>
-                <a:latin typeface="TradeGothic"/>
-                <a:ea typeface="ＭＳ Ｐゴシック"/>
-              </a:defRPr>
-            </a:lvl1pPr>
-          </a:lstStyle>
-          <a:p>
-            <a:pPr indent="0" algn="l" defTabSz="457200">
-              <a:lnSpc>
-                <a:spcPct val="100000"/>
-              </a:lnSpc>
-              <a:spcBef>
-                <a:spcPts val="479"/>
-              </a:spcBef>
-              <a:buNone/>
-              <a:tabLst>
-                <a:tab pos="0" algn="l"/>
-              </a:tabLst>
-            </a:pPr>
-            <a:r>
-              <a:rPr lang="en-US" sz="2400" b="1" u="none" strike="noStrike">
-                <a:solidFill>
-                  <a:schemeClr val="dk1"/>
-                </a:solidFill>
-                <a:effectLst/>
-                <a:uFillTx/>
-                <a:latin typeface="TradeGothic"/>
-                <a:ea typeface="ＭＳ Ｐゴシック"/>
-              </a:rPr>
-              <a:t>Click to edit Master text styles</a:t>
-            </a:r>
-            <a:endParaRPr lang="en-US" sz="2400" b="0" u="none" strike="noStrike">
-              <a:solidFill>
-                <a:schemeClr val="dk1"/>
-              </a:solidFill>
-              <a:effectLst/>
-              <a:uFillTx/>
-              <a:latin typeface="TradeGothic"/>
-            </a:endParaRPr>
-          </a:p>
-        </p:txBody>
-      </p:sp>
-      <p:sp>
-        <p:nvSpPr>
-          <p:cNvPr id="12" name="PlaceHolder 5"/>
-          <p:cNvSpPr>
-            <a:spLocks noGrp="1"/>
-          </p:cNvSpPr>
-          <p:nvPr>
-            <p:ph type="body"/>
-          </p:nvPr>
-        </p:nvSpPr>
-        <p:spPr>
-          <a:xfrm>
-            <a:off x="6193440" y="2174760"/>
-            <a:ext cx="5388120" cy="3950280"/>
-          </a:xfrm>
-          <a:prstGeom prst="rect">
-            <a:avLst/>
-          </a:prstGeom>
-          <a:noFill/>
-          <a:ln w="9360">
-            <a:noFill/>
-          </a:ln>
-        </p:spPr>
-        <p:txBody>
-          <a:bodyPr numCol="1" spcCol="0" lIns="91440" tIns="45720" rIns="91440" bIns="45720" anchor="t">
-            <a:noAutofit/>
-          </a:bodyPr>
-          <a:lstStyle>
-            <a:lvl1pPr algn="l" defTabSz="457200">
-              <a:lnSpc>
-                <a:spcPct val="100000"/>
-              </a:lnSpc>
-              <a:spcBef>
-                <a:spcPts val="479"/>
-              </a:spcBef>
-              <a:buClr>
-                <a:srgbClr val="000000"/>
-              </a:buClr>
-              <a:buFont typeface="Arial"/>
-              <a:buChar char="•"/>
-              <a:tabLst>
-                <a:tab pos="0" algn="l"/>
-              </a:tabLst>
-              <a:defRPr lang="en-US" sz="2400" b="0" u="none" strike="noStrike">
-                <a:solidFill>
-                  <a:schemeClr val="dk1"/>
-                </a:solidFill>
-                <a:effectLst/>
-                <a:uFillTx/>
-                <a:latin typeface="TradeGothic"/>
-                <a:ea typeface="ＭＳ Ｐゴシック"/>
-              </a:defRPr>
-            </a:lvl1pPr>
-            <a:lvl2pPr lvl="1" algn="l" defTabSz="457200">
-              <a:lnSpc>
-                <a:spcPct val="100000"/>
-              </a:lnSpc>
-              <a:spcBef>
-                <a:spcPts val="400"/>
-              </a:spcBef>
-              <a:buClr>
-                <a:srgbClr val="000000"/>
-              </a:buClr>
-              <a:buFont typeface="Arial"/>
-              <a:buChar char="–"/>
-              <a:tabLst>
-                <a:tab pos="0" algn="l"/>
-              </a:tabLst>
-              <a:defRPr lang="en-US" sz="2000" b="0" u="none" strike="noStrike">
-                <a:solidFill>
-                  <a:schemeClr val="dk1"/>
-                </a:solidFill>
-                <a:effectLst/>
-                <a:uFillTx/>
-                <a:latin typeface="TradeGothic"/>
-                <a:ea typeface="ＭＳ Ｐゴシック"/>
-              </a:defRPr>
-            </a:lvl2pPr>
-            <a:lvl3pPr lvl="2" algn="l" defTabSz="457200">
-              <a:lnSpc>
-                <a:spcPct val="100000"/>
-              </a:lnSpc>
-              <a:spcBef>
-                <a:spcPts val="360"/>
-              </a:spcBef>
-              <a:buClr>
-                <a:srgbClr val="000000"/>
-              </a:buClr>
-              <a:buFont typeface="Arial"/>
-              <a:buChar char="•"/>
-              <a:tabLst>
-                <a:tab pos="0" algn="l"/>
-              </a:tabLst>
-              <a:defRPr lang="en-US" sz="1800" b="0" u="none" strike="noStrike">
-                <a:solidFill>
-                  <a:schemeClr val="dk1"/>
-                </a:solidFill>
-                <a:effectLst/>
-                <a:uFillTx/>
-                <a:latin typeface="TradeGothic"/>
-                <a:ea typeface="ＭＳ Ｐゴシック"/>
-              </a:defRPr>
-            </a:lvl3pPr>
-            <a:lvl4pPr lvl="3" algn="l" defTabSz="457200">
-              <a:lnSpc>
-                <a:spcPct val="100000"/>
-              </a:lnSpc>
-              <a:spcBef>
-                <a:spcPts val="320"/>
-              </a:spcBef>
-              <a:buClr>
-                <a:srgbClr val="000000"/>
-              </a:buClr>
-              <a:buFont typeface="Arial"/>
-              <a:buChar char="–"/>
-              <a:tabLst>
-                <a:tab pos="0" algn="l"/>
-              </a:tabLst>
-              <a:defRPr lang="en-US" sz="1600" b="0" u="none" strike="noStrike">
-                <a:solidFill>
-                  <a:schemeClr val="dk1"/>
-                </a:solidFill>
-                <a:effectLst/>
-                <a:uFillTx/>
-                <a:latin typeface="TradeGothic"/>
-                <a:ea typeface="ＭＳ Ｐゴシック"/>
-              </a:defRPr>
-            </a:lvl4pPr>
-            <a:lvl5pPr lvl="4" algn="l" defTabSz="457200">
-              <a:lnSpc>
-                <a:spcPct val="100000"/>
-              </a:lnSpc>
-              <a:spcBef>
-                <a:spcPts val="320"/>
-              </a:spcBef>
-              <a:buClr>
-                <a:srgbClr val="000000"/>
-              </a:buClr>
-              <a:buFont typeface="Arial"/>
-              <a:buChar char="»"/>
-              <a:tabLst>
-                <a:tab pos="0" algn="l"/>
-              </a:tabLst>
-              <a:defRPr lang="en-US" sz="1600" b="0" u="none" strike="noStrike">
-                <a:solidFill>
-                  <a:schemeClr val="dk1"/>
-                </a:solidFill>
-                <a:effectLst/>
-                <a:uFillTx/>
-                <a:latin typeface="TradeGothic"/>
-                <a:ea typeface="ＭＳ Ｐゴシック"/>
-              </a:defRPr>
-            </a:lvl5pPr>
-          </a:lstStyle>
-          <a:p>
-            <a:pPr marL="343080" indent="-343080" algn="l" defTabSz="457200">
-              <a:lnSpc>
-                <a:spcPct val="100000"/>
-              </a:lnSpc>
-              <a:spcBef>
-                <a:spcPts val="479"/>
-              </a:spcBef>
-              <a:buClr>
-                <a:srgbClr val="000000"/>
-              </a:buClr>
-              <a:buFont typeface="Arial"/>
-              <a:buChar char="•"/>
-              <a:tabLst>
-                <a:tab pos="0" algn="l"/>
-              </a:tabLst>
-            </a:pPr>
-            <a:r>
-              <a:rPr lang="en-US" sz="2400" b="0" u="none" strike="noStrike">
-                <a:solidFill>
-                  <a:schemeClr val="dk1"/>
-                </a:solidFill>
-                <a:effectLst/>
-                <a:uFillTx/>
-                <a:latin typeface="TradeGothic"/>
-                <a:ea typeface="ＭＳ Ｐゴシック"/>
-              </a:rPr>
-              <a:t>Click to edit Master text styles</a:t>
-            </a:r>
-            <a:endParaRPr lang="en-US" sz="2400" b="0" u="none" strike="noStrike">
-              <a:solidFill>
-                <a:schemeClr val="dk1"/>
-              </a:solidFill>
-              <a:effectLst/>
-              <a:uFillTx/>
-              <a:latin typeface="TradeGothic"/>
-            </a:endParaRPr>
-          </a:p>
-          <a:p>
-            <a:pPr marL="743040" lvl="1" indent="-285840" algn="l" defTabSz="457200">
-              <a:lnSpc>
-                <a:spcPct val="100000"/>
-              </a:lnSpc>
-              <a:spcBef>
-                <a:spcPts val="400"/>
-              </a:spcBef>
-              <a:buClr>
-                <a:srgbClr val="000000"/>
-              </a:buClr>
-              <a:buFont typeface="Arial"/>
-              <a:buChar char="–"/>
-              <a:tabLst>
-                <a:tab pos="0" algn="l"/>
-              </a:tabLst>
-            </a:pPr>
-            <a:r>
-              <a:rPr lang="en-US" sz="2000" b="0" u="none" strike="noStrike">
-                <a:solidFill>
-                  <a:schemeClr val="dk1"/>
-                </a:solidFill>
-                <a:effectLst/>
-                <a:uFillTx/>
-                <a:latin typeface="TradeGothic"/>
-                <a:ea typeface="ＭＳ Ｐゴシック"/>
-              </a:rPr>
-              <a:t>Second level</a:t>
-            </a:r>
-            <a:endParaRPr lang="en-US" sz="2000" b="0" u="none" strike="noStrike">
-              <a:solidFill>
-                <a:schemeClr val="dk1"/>
-              </a:solidFill>
-              <a:effectLst/>
-              <a:uFillTx/>
-              <a:latin typeface="TradeGothic"/>
-            </a:endParaRPr>
-          </a:p>
-          <a:p>
-            <a:pPr marL="1143000" lvl="2" indent="-228600" algn="l" defTabSz="457200">
-              <a:lnSpc>
-                <a:spcPct val="100000"/>
-              </a:lnSpc>
-              <a:spcBef>
-                <a:spcPts val="360"/>
-              </a:spcBef>
-              <a:buClr>
-                <a:srgbClr val="000000"/>
-              </a:buClr>
-              <a:buFont typeface="Arial"/>
-              <a:buChar char="•"/>
-              <a:tabLst>
-                <a:tab pos="0" algn="l"/>
-              </a:tabLst>
-            </a:pPr>
-            <a:r>
-              <a:rPr lang="en-US" sz="1800" b="0" u="none" strike="noStrike">
-                <a:solidFill>
-                  <a:schemeClr val="dk1"/>
-                </a:solidFill>
-                <a:effectLst/>
-                <a:uFillTx/>
-                <a:latin typeface="TradeGothic"/>
-                <a:ea typeface="ＭＳ Ｐゴシック"/>
-              </a:rPr>
-              <a:t>Third level</a:t>
-            </a:r>
-            <a:endParaRPr lang="en-US" sz="1800" b="0" u="none" strike="noStrike">
-              <a:solidFill>
-                <a:schemeClr val="dk1"/>
-              </a:solidFill>
-              <a:effectLst/>
-              <a:uFillTx/>
-              <a:latin typeface="TradeGothic"/>
-            </a:endParaRPr>
-          </a:p>
-          <a:p>
-            <a:pPr marL="1600200" lvl="3" indent="-228600" algn="l" defTabSz="457200">
-              <a:lnSpc>
-                <a:spcPct val="100000"/>
-              </a:lnSpc>
-              <a:spcBef>
-                <a:spcPts val="320"/>
-              </a:spcBef>
-              <a:buClr>
-                <a:srgbClr val="000000"/>
-              </a:buClr>
-              <a:buFont typeface="Arial"/>
-              <a:buChar char="–"/>
-              <a:tabLst>
-                <a:tab pos="0" algn="l"/>
-              </a:tabLst>
-            </a:pPr>
-            <a:r>
-              <a:rPr lang="en-US" sz="1600" b="0" u="none" strike="noStrike">
-                <a:solidFill>
-                  <a:schemeClr val="dk1"/>
-                </a:solidFill>
-                <a:effectLst/>
-                <a:uFillTx/>
-                <a:latin typeface="TradeGothic"/>
-                <a:ea typeface="ＭＳ Ｐゴシック"/>
-              </a:rPr>
-              <a:t>Fourth level</a:t>
-            </a:r>
-            <a:endParaRPr lang="en-US" sz="1600" b="0" u="none" strike="noStrike">
-              <a:solidFill>
-                <a:schemeClr val="dk1"/>
-              </a:solidFill>
-              <a:effectLst/>
-              <a:uFillTx/>
-              <a:latin typeface="TradeGothic"/>
-            </a:endParaRPr>
-          </a:p>
-          <a:p>
-            <a:pPr marL="2057400" lvl="4" indent="-228600" algn="l" defTabSz="457200">
-              <a:lnSpc>
-                <a:spcPct val="100000"/>
-              </a:lnSpc>
-              <a:spcBef>
-                <a:spcPts val="320"/>
-              </a:spcBef>
-              <a:buClr>
-                <a:srgbClr val="000000"/>
-              </a:buClr>
-              <a:buFont typeface="Arial"/>
-              <a:buChar char="»"/>
-              <a:tabLst>
-                <a:tab pos="0" algn="l"/>
-              </a:tabLst>
-            </a:pPr>
-            <a:r>
-              <a:rPr lang="en-US" sz="1600" b="0" u="none" strike="noStrike">
-                <a:solidFill>
-                  <a:schemeClr val="dk1"/>
-                </a:solidFill>
-                <a:effectLst/>
-                <a:uFillTx/>
-                <a:latin typeface="TradeGothic"/>
-                <a:ea typeface="ＭＳ Ｐゴシック"/>
-              </a:rPr>
-              <a:t>Fifth level</a:t>
-            </a:r>
-            <a:endParaRPr lang="en-US" sz="1600" b="0" u="none" strike="noStrike">
-              <a:solidFill>
-                <a:schemeClr val="dk1"/>
-              </a:solidFill>
-              <a:effectLst/>
-              <a:uFillTx/>
-              <a:latin typeface="TradeGothic"/>
-            </a:endParaRPr>
-          </a:p>
-        </p:txBody>
-      </p:sp>
-      <p:sp>
-        <p:nvSpPr>
-          <p:cNvPr id="13" name="PlaceHolder 6"/>
+          <p:cNvPr id="9" name="PlaceHolder 3"/>
           <p:cNvSpPr>
             <a:spLocks noGrp="1"/>
           </p:cNvSpPr>
@@ -4319,7 +3959,7 @@
         <p:spPr>
           <a:xfrm>
             <a:off x="609480" y="6356520"/>
-            <a:ext cx="2843640" cy="363960"/>
+            <a:ext cx="2843280" cy="363600"/>
           </a:xfrm>
           <a:prstGeom prst="rect">
             <a:avLst/>
@@ -4388,7 +4028,7 @@
       </p:sp>
       <p:sp>
         <p:nvSpPr>
-          <p:cNvPr id="14" name="PlaceHolder 7"/>
+          <p:cNvPr id="10" name="PlaceHolder 4"/>
           <p:cNvSpPr>
             <a:spLocks noGrp="1"/>
           </p:cNvSpPr>
@@ -4399,7 +4039,7 @@
         <p:spPr>
           <a:xfrm>
             <a:off x="4165560" y="6356520"/>
-            <a:ext cx="3859560" cy="363960"/>
+            <a:ext cx="3859200" cy="363600"/>
           </a:xfrm>
           <a:prstGeom prst="rect">
             <a:avLst/>
@@ -4470,7 +4110,7 @@
       </p:sp>
       <p:sp>
         <p:nvSpPr>
-          <p:cNvPr id="15" name="PlaceHolder 8"/>
+          <p:cNvPr id="11" name="PlaceHolder 5"/>
           <p:cNvSpPr>
             <a:spLocks noGrp="1"/>
           </p:cNvSpPr>
@@ -4481,7 +4121,7 @@
         <p:spPr>
           <a:xfrm>
             <a:off x="8737560" y="6356520"/>
-            <a:ext cx="2843640" cy="363960"/>
+            <a:ext cx="2843280" cy="363600"/>
           </a:xfrm>
           <a:prstGeom prst="rect">
             <a:avLst/>
@@ -4525,7 +4165,7 @@
                 <a:tab pos="0" algn="l"/>
               </a:tabLst>
             </a:pPr>
-            <a:fld id="{D6086668-9119-4F20-BCD3-FB312215B04E}" type="slidenum">
+            <a:fld id="{1E095ADD-0FD5-4DB9-A063-933A8F115A40}" type="slidenum">
               <a:rPr lang="en-US" sz="1200" b="0" u="none" strike="noStrike">
                 <a:solidFill>
                   <a:srgbClr val="898989"/>
@@ -4554,8 +4194,8 @@
 </file>
 
 <file path=ppt/slideLayouts/slideLayout3.xml><?xml version="1.0" encoding="utf-8"?>
-<p:sldLayout xmlns:a="http://schemas.openxmlformats.org/drawingml/2006/main" xmlns:p="http://schemas.openxmlformats.org/presentationml/2006/main" xmlns:r="http://schemas.openxmlformats.org/officeDocument/2006/relationships" xmlns:p14="http://schemas.microsoft.com/office/powerpoint/2010/main" xmlns:p15="http://schemas.microsoft.com/office/powerpoint/2012/main" xmlns:mc="http://schemas.openxmlformats.org/markup-compatibility/2006" type="titleOnly" preserve="1">
-  <p:cSld name="Title Only">
+<p:sldLayout xmlns:a="http://schemas.openxmlformats.org/drawingml/2006/main" xmlns:p="http://schemas.openxmlformats.org/presentationml/2006/main" xmlns:r="http://schemas.openxmlformats.org/officeDocument/2006/relationships" xmlns:p14="http://schemas.microsoft.com/office/powerpoint/2010/main" xmlns:p15="http://schemas.microsoft.com/office/powerpoint/2012/main" xmlns:mc="http://schemas.openxmlformats.org/markup-compatibility/2006" type="blank" preserve="1">
+  <p:cSld name="Section Header">
     <p:bg>
       <p:bgPr>
         <a:solidFill>
@@ -4579,7 +4219,7 @@
       </p:grpSpPr>
       <p:sp>
         <p:nvSpPr>
-          <p:cNvPr id="16" name="PlaceHolder 1"/>
+          <p:cNvPr id="12" name="PlaceHolder 1"/>
           <p:cNvSpPr>
             <a:spLocks noGrp="1"/>
           </p:cNvSpPr>
@@ -4589,8 +4229,8 @@
         </p:nvSpPr>
         <p:spPr>
           <a:xfrm>
-            <a:off x="609480" y="-47520"/>
-            <a:ext cx="10971720" cy="1141920"/>
+            <a:off x="963000" y="4406760"/>
+            <a:ext cx="10361880" cy="1360800"/>
           </a:xfrm>
           <a:prstGeom prst="rect">
             <a:avLst/>
@@ -4601,19 +4241,19 @@
           </a:ln>
         </p:spPr>
         <p:txBody>
-          <a:bodyPr numCol="1" spcCol="0" lIns="91440" tIns="45720" rIns="91440" bIns="45720" anchor="ctr">
+          <a:bodyPr numCol="1" spcCol="0" lIns="91440" tIns="45720" rIns="91440" bIns="45720" anchor="t">
             <a:noAutofit/>
           </a:bodyPr>
           <a:lstStyle>
-            <a:lvl1pPr indent="0" algn="ctr" defTabSz="457200">
-              <a:lnSpc>
-                <a:spcPct val="100000"/>
-              </a:lnSpc>
-              <a:buNone/>
-              <a:tabLst>
-                <a:tab pos="0" algn="l"/>
-              </a:tabLst>
-              <a:defRPr lang="en-US" sz="4400" b="0" u="none" strike="noStrike">
+            <a:lvl1pPr indent="0" algn="l" defTabSz="457200">
+              <a:lnSpc>
+                <a:spcPct val="100000"/>
+              </a:lnSpc>
+              <a:buNone/>
+              <a:tabLst>
+                <a:tab pos="0" algn="l"/>
+              </a:tabLst>
+              <a:defRPr lang="en-US" sz="4000" b="1" u="none" strike="noStrike" cap="all">
                 <a:solidFill>
                   <a:schemeClr val="dk1"/>
                 </a:solidFill>
@@ -4625,17 +4265,17 @@
             </a:lvl1pPr>
           </a:lstStyle>
           <a:p>
-            <a:pPr indent="0" algn="ctr" defTabSz="457200">
-              <a:lnSpc>
-                <a:spcPct val="100000"/>
-              </a:lnSpc>
-              <a:buNone/>
-              <a:tabLst>
-                <a:tab pos="0" algn="l"/>
-              </a:tabLst>
-            </a:pPr>
-            <a:r>
-              <a:rPr lang="en-US" sz="4400" b="0" u="none" strike="noStrike">
+            <a:pPr indent="0" algn="l" defTabSz="457200">
+              <a:lnSpc>
+                <a:spcPct val="100000"/>
+              </a:lnSpc>
+              <a:buNone/>
+              <a:tabLst>
+                <a:tab pos="0" algn="l"/>
+              </a:tabLst>
+            </a:pPr>
+            <a:r>
+              <a:rPr lang="en-US" sz="4000" b="1" u="none" strike="noStrike" cap="all">
                 <a:solidFill>
                   <a:schemeClr val="dk1"/>
                 </a:solidFill>
@@ -4646,7 +4286,7 @@
               </a:rPr>
               <a:t>Click to edit Master title style</a:t>
             </a:r>
-            <a:endParaRPr lang="en-US" sz="4400" b="0" u="none" strike="noStrike">
+            <a:endParaRPr lang="en-US" sz="4000" b="1" u="none" strike="noStrike" cap="all">
               <a:solidFill>
                 <a:schemeClr val="dk1"/>
               </a:solidFill>
@@ -4659,7 +4299,99 @@
       </p:sp>
       <p:sp>
         <p:nvSpPr>
-          <p:cNvPr id="17" name="PlaceHolder 2"/>
+          <p:cNvPr id="13" name="PlaceHolder 2"/>
+          <p:cNvSpPr>
+            <a:spLocks noGrp="1"/>
+          </p:cNvSpPr>
+          <p:nvPr>
+            <p:ph type="body"/>
+          </p:nvPr>
+        </p:nvSpPr>
+        <p:spPr>
+          <a:xfrm>
+            <a:off x="963000" y="2906640"/>
+            <a:ext cx="10361880" cy="1498680"/>
+          </a:xfrm>
+          <a:prstGeom prst="rect">
+            <a:avLst/>
+          </a:prstGeom>
+          <a:noFill/>
+          <a:ln w="9360">
+            <a:noFill/>
+          </a:ln>
+        </p:spPr>
+        <p:txBody>
+          <a:bodyPr numCol="1" spcCol="0" lIns="91440" tIns="45720" rIns="91440" bIns="45720" anchor="b">
+            <a:noAutofit/>
+          </a:bodyPr>
+          <a:lstStyle>
+            <a:lvl1pPr indent="0" algn="l" defTabSz="457200">
+              <a:lnSpc>
+                <a:spcPct val="100000"/>
+              </a:lnSpc>
+              <a:spcBef>
+                <a:spcPts val="400"/>
+              </a:spcBef>
+              <a:buNone/>
+              <a:tabLst>
+                <a:tab pos="0" algn="l"/>
+              </a:tabLst>
+              <a:defRPr lang="en-US" sz="2000" b="0" u="none" strike="noStrike">
+                <a:solidFill>
+                  <a:schemeClr val="dk1">
+                    <a:tint val="75000"/>
+                  </a:schemeClr>
+                </a:solidFill>
+                <a:effectLst/>
+                <a:uFillTx/>
+                <a:latin typeface="TradeGothic"/>
+                <a:ea typeface="ＭＳ Ｐゴシック"/>
+              </a:defRPr>
+            </a:lvl1pPr>
+          </a:lstStyle>
+          <a:p>
+            <a:pPr indent="0" algn="l" defTabSz="457200">
+              <a:lnSpc>
+                <a:spcPct val="100000"/>
+              </a:lnSpc>
+              <a:spcBef>
+                <a:spcPts val="400"/>
+              </a:spcBef>
+              <a:buNone/>
+              <a:tabLst>
+                <a:tab pos="0" algn="l"/>
+              </a:tabLst>
+            </a:pPr>
+            <a:r>
+              <a:rPr lang="en-US" sz="2000" b="0" u="none" strike="noStrike">
+                <a:solidFill>
+                  <a:schemeClr val="dk1">
+                    <a:tint val="75000"/>
+                  </a:schemeClr>
+                </a:solidFill>
+                <a:effectLst/>
+                <a:uFillTx/>
+                <a:latin typeface="TradeGothic"/>
+                <a:ea typeface="ＭＳ Ｐゴシック"/>
+              </a:rPr>
+              <a:t>Click to edit Master text styles</a:t>
+            </a:r>
+            <a:endParaRPr lang="en-US" sz="2000" b="0" u="none" strike="noStrike">
+              <a:solidFill>
+                <a:schemeClr val="dk1">
+                  <a:tint val="75000"/>
+                </a:schemeClr>
+              </a:solidFill>
+              <a:effectLst/>
+              <a:uFillTx/>
+              <a:latin typeface="TradeGothic"/>
+            </a:endParaRPr>
+          </a:p>
+        </p:txBody>
+      </p:sp>
+      <p:sp>
+        <p:nvSpPr>
+          <p:cNvPr id="14" name="PlaceHolder 3"/>
           <p:cNvSpPr>
             <a:spLocks noGrp="1"/>
           </p:cNvSpPr>
@@ -4670,7 +4402,7 @@
         <p:spPr>
           <a:xfrm>
             <a:off x="609480" y="6356520"/>
-            <a:ext cx="2843640" cy="363960"/>
+            <a:ext cx="2843280" cy="363600"/>
           </a:xfrm>
           <a:prstGeom prst="rect">
             <a:avLst/>
@@ -4739,7 +4471,7 @@
       </p:sp>
       <p:sp>
         <p:nvSpPr>
-          <p:cNvPr id="18" name="PlaceHolder 3"/>
+          <p:cNvPr id="15" name="PlaceHolder 4"/>
           <p:cNvSpPr>
             <a:spLocks noGrp="1"/>
           </p:cNvSpPr>
@@ -4750,7 +4482,7 @@
         <p:spPr>
           <a:xfrm>
             <a:off x="4165560" y="6356520"/>
-            <a:ext cx="3859560" cy="363960"/>
+            <a:ext cx="3859200" cy="363600"/>
           </a:xfrm>
           <a:prstGeom prst="rect">
             <a:avLst/>
@@ -4821,7 +4553,7 @@
       </p:sp>
       <p:sp>
         <p:nvSpPr>
-          <p:cNvPr id="19" name="PlaceHolder 4"/>
+          <p:cNvPr id="16" name="PlaceHolder 5"/>
           <p:cNvSpPr>
             <a:spLocks noGrp="1"/>
           </p:cNvSpPr>
@@ -4832,7 +4564,7 @@
         <p:spPr>
           <a:xfrm>
             <a:off x="8737560" y="6356520"/>
-            <a:ext cx="2843640" cy="363960"/>
+            <a:ext cx="2843280" cy="363600"/>
           </a:xfrm>
           <a:prstGeom prst="rect">
             <a:avLst/>
@@ -4876,7 +4608,7 @@
                 <a:tab pos="0" algn="l"/>
               </a:tabLst>
             </a:pPr>
-            <a:fld id="{705D3326-696F-46CD-9F91-CB7621E894EC}" type="slidenum">
+            <a:fld id="{9F70C40E-5BB9-4047-B578-9A03677CE99B}" type="slidenum">
               <a:rPr lang="en-US" sz="1200" b="0" u="none" strike="noStrike">
                 <a:solidFill>
                   <a:srgbClr val="898989"/>
@@ -4905,8 +4637,8 @@
 </file>
 
 <file path=ppt/slideLayouts/slideLayout4.xml><?xml version="1.0" encoding="utf-8"?>
-<p:sldLayout xmlns:a="http://schemas.openxmlformats.org/drawingml/2006/main" xmlns:p="http://schemas.openxmlformats.org/presentationml/2006/main" xmlns:r="http://schemas.openxmlformats.org/officeDocument/2006/relationships" xmlns:p14="http://schemas.microsoft.com/office/powerpoint/2010/main" xmlns:p15="http://schemas.microsoft.com/office/powerpoint/2012/main" xmlns:mc="http://schemas.openxmlformats.org/markup-compatibility/2006" type="blank" preserve="1">
-  <p:cSld name="Blank">
+<p:sldLayout xmlns:a="http://schemas.openxmlformats.org/drawingml/2006/main" xmlns:p="http://schemas.openxmlformats.org/presentationml/2006/main" xmlns:r="http://schemas.openxmlformats.org/officeDocument/2006/relationships" xmlns:p14="http://schemas.microsoft.com/office/powerpoint/2010/main" xmlns:p15="http://schemas.microsoft.com/office/powerpoint/2012/main" xmlns:mc="http://schemas.openxmlformats.org/markup-compatibility/2006" type="twoObj" preserve="1">
+  <p:cSld name="Two Content">
     <p:bg>
       <p:bgPr>
         <a:solidFill>
@@ -4930,7 +4662,719 @@
       </p:grpSpPr>
       <p:sp>
         <p:nvSpPr>
-          <p:cNvPr id="20" name="PlaceHolder 1"/>
+          <p:cNvPr id="17" name="PlaceHolder 1"/>
+          <p:cNvSpPr>
+            <a:spLocks noGrp="1"/>
+          </p:cNvSpPr>
+          <p:nvPr>
+            <p:ph type="title"/>
+          </p:nvPr>
+        </p:nvSpPr>
+        <p:spPr>
+          <a:xfrm>
+            <a:off x="609480" y="-47520"/>
+            <a:ext cx="10971360" cy="1141560"/>
+          </a:xfrm>
+          <a:prstGeom prst="rect">
+            <a:avLst/>
+          </a:prstGeom>
+          <a:noFill/>
+          <a:ln w="9360">
+            <a:noFill/>
+          </a:ln>
+        </p:spPr>
+        <p:txBody>
+          <a:bodyPr numCol="1" spcCol="0" lIns="91440" tIns="45720" rIns="91440" bIns="45720" anchor="ctr">
+            <a:noAutofit/>
+          </a:bodyPr>
+          <a:lstStyle>
+            <a:lvl1pPr indent="0" algn="ctr" defTabSz="457200">
+              <a:lnSpc>
+                <a:spcPct val="100000"/>
+              </a:lnSpc>
+              <a:buNone/>
+              <a:tabLst>
+                <a:tab pos="0" algn="l"/>
+              </a:tabLst>
+              <a:defRPr lang="en-US" sz="4400" b="0" u="none" strike="noStrike">
+                <a:solidFill>
+                  <a:schemeClr val="dk1"/>
+                </a:solidFill>
+                <a:effectLst/>
+                <a:uFillTx/>
+                <a:latin typeface="TradeGothic"/>
+                <a:ea typeface="ＭＳ Ｐゴシック"/>
+              </a:defRPr>
+            </a:lvl1pPr>
+          </a:lstStyle>
+          <a:p>
+            <a:pPr indent="0" algn="ctr" defTabSz="457200">
+              <a:lnSpc>
+                <a:spcPct val="100000"/>
+              </a:lnSpc>
+              <a:buNone/>
+              <a:tabLst>
+                <a:tab pos="0" algn="l"/>
+              </a:tabLst>
+            </a:pPr>
+            <a:r>
+              <a:rPr lang="en-US" sz="4400" b="0" u="none" strike="noStrike">
+                <a:solidFill>
+                  <a:schemeClr val="dk1"/>
+                </a:solidFill>
+                <a:effectLst/>
+                <a:uFillTx/>
+                <a:latin typeface="TradeGothic"/>
+                <a:ea typeface="ＭＳ Ｐゴシック"/>
+              </a:rPr>
+              <a:t>Click to edit Master title style</a:t>
+            </a:r>
+            <a:endParaRPr lang="en-US" sz="4400" b="0" u="none" strike="noStrike">
+              <a:solidFill>
+                <a:schemeClr val="dk1"/>
+              </a:solidFill>
+              <a:effectLst/>
+              <a:uFillTx/>
+              <a:latin typeface="TradeGothic"/>
+            </a:endParaRPr>
+          </a:p>
+        </p:txBody>
+      </p:sp>
+      <p:sp>
+        <p:nvSpPr>
+          <p:cNvPr id="18" name="PlaceHolder 2"/>
+          <p:cNvSpPr>
+            <a:spLocks noGrp="1"/>
+          </p:cNvSpPr>
+          <p:nvPr>
+            <p:ph type="body"/>
+          </p:nvPr>
+        </p:nvSpPr>
+        <p:spPr>
+          <a:xfrm>
+            <a:off x="609480" y="1600200"/>
+            <a:ext cx="5383440" cy="4524480"/>
+          </a:xfrm>
+          <a:prstGeom prst="rect">
+            <a:avLst/>
+          </a:prstGeom>
+          <a:noFill/>
+          <a:ln w="9360">
+            <a:noFill/>
+          </a:ln>
+        </p:spPr>
+        <p:txBody>
+          <a:bodyPr numCol="1" spcCol="0" lIns="91440" tIns="45720" rIns="91440" bIns="45720" anchor="t">
+            <a:noAutofit/>
+          </a:bodyPr>
+          <a:lstStyle>
+            <a:lvl1pPr algn="l" defTabSz="457200">
+              <a:lnSpc>
+                <a:spcPct val="100000"/>
+              </a:lnSpc>
+              <a:spcBef>
+                <a:spcPts val="561"/>
+              </a:spcBef>
+              <a:buClr>
+                <a:srgbClr val="000000"/>
+              </a:buClr>
+              <a:buFont typeface="Arial"/>
+              <a:buChar char="•"/>
+              <a:defRPr lang="en-US" sz="2800" b="0" u="none" strike="noStrike">
+                <a:solidFill>
+                  <a:schemeClr val="dk1"/>
+                </a:solidFill>
+                <a:effectLst/>
+                <a:uFillTx/>
+                <a:latin typeface="TradeGothic"/>
+                <a:ea typeface="ＭＳ Ｐゴシック"/>
+              </a:defRPr>
+            </a:lvl1pPr>
+            <a:lvl2pPr lvl="1" algn="l" defTabSz="457200">
+              <a:lnSpc>
+                <a:spcPct val="100000"/>
+              </a:lnSpc>
+              <a:spcBef>
+                <a:spcPts val="479"/>
+              </a:spcBef>
+              <a:buClr>
+                <a:srgbClr val="000000"/>
+              </a:buClr>
+              <a:buFont typeface="Arial"/>
+              <a:buChar char="–"/>
+              <a:defRPr lang="en-US" sz="2400" b="0" u="none" strike="noStrike">
+                <a:solidFill>
+                  <a:schemeClr val="dk1"/>
+                </a:solidFill>
+                <a:effectLst/>
+                <a:uFillTx/>
+                <a:latin typeface="TradeGothic"/>
+                <a:ea typeface="ＭＳ Ｐゴシック"/>
+              </a:defRPr>
+            </a:lvl2pPr>
+            <a:lvl3pPr lvl="2" algn="l" defTabSz="457200">
+              <a:lnSpc>
+                <a:spcPct val="100000"/>
+              </a:lnSpc>
+              <a:spcBef>
+                <a:spcPts val="400"/>
+              </a:spcBef>
+              <a:buClr>
+                <a:srgbClr val="000000"/>
+              </a:buClr>
+              <a:buFont typeface="Arial"/>
+              <a:buChar char="•"/>
+              <a:defRPr lang="en-US" sz="2000" b="0" u="none" strike="noStrike">
+                <a:solidFill>
+                  <a:schemeClr val="dk1"/>
+                </a:solidFill>
+                <a:effectLst/>
+                <a:uFillTx/>
+                <a:latin typeface="TradeGothic"/>
+                <a:ea typeface="ＭＳ Ｐゴシック"/>
+              </a:defRPr>
+            </a:lvl3pPr>
+            <a:lvl4pPr lvl="3" algn="l" defTabSz="457200">
+              <a:lnSpc>
+                <a:spcPct val="100000"/>
+              </a:lnSpc>
+              <a:spcBef>
+                <a:spcPts val="360"/>
+              </a:spcBef>
+              <a:buClr>
+                <a:srgbClr val="000000"/>
+              </a:buClr>
+              <a:buFont typeface="Arial"/>
+              <a:buChar char="–"/>
+              <a:defRPr lang="en-US" sz="1800" b="0" u="none" strike="noStrike">
+                <a:solidFill>
+                  <a:schemeClr val="dk1"/>
+                </a:solidFill>
+                <a:effectLst/>
+                <a:uFillTx/>
+                <a:latin typeface="TradeGothic"/>
+                <a:ea typeface="ＭＳ Ｐゴシック"/>
+              </a:defRPr>
+            </a:lvl4pPr>
+            <a:lvl5pPr lvl="4" algn="l" defTabSz="457200">
+              <a:lnSpc>
+                <a:spcPct val="100000"/>
+              </a:lnSpc>
+              <a:spcBef>
+                <a:spcPts val="360"/>
+              </a:spcBef>
+              <a:buClr>
+                <a:srgbClr val="000000"/>
+              </a:buClr>
+              <a:buFont typeface="Arial"/>
+              <a:buChar char="»"/>
+              <a:defRPr lang="en-US" sz="1800" b="0" u="none" strike="noStrike">
+                <a:solidFill>
+                  <a:schemeClr val="dk1"/>
+                </a:solidFill>
+                <a:effectLst/>
+                <a:uFillTx/>
+                <a:latin typeface="TradeGothic"/>
+                <a:ea typeface="ＭＳ Ｐゴシック"/>
+              </a:defRPr>
+            </a:lvl5pPr>
+          </a:lstStyle>
+          <a:p>
+            <a:pPr marL="343080" indent="-343080" algn="l" defTabSz="457200">
+              <a:lnSpc>
+                <a:spcPct val="100000"/>
+              </a:lnSpc>
+              <a:spcBef>
+                <a:spcPts val="561"/>
+              </a:spcBef>
+              <a:buClr>
+                <a:srgbClr val="000000"/>
+              </a:buClr>
+              <a:buFont typeface="Arial"/>
+              <a:buChar char="•"/>
+            </a:pPr>
+            <a:r>
+              <a:rPr lang="en-US" sz="2800" b="0" u="none" strike="noStrike">
+                <a:solidFill>
+                  <a:schemeClr val="dk1"/>
+                </a:solidFill>
+                <a:effectLst/>
+                <a:uFillTx/>
+                <a:latin typeface="TradeGothic"/>
+                <a:ea typeface="ＭＳ Ｐゴシック"/>
+              </a:rPr>
+              <a:t>Click to edit Master text styles</a:t>
+            </a:r>
+            <a:endParaRPr lang="en-US" sz="2800" b="0" u="none" strike="noStrike">
+              <a:solidFill>
+                <a:schemeClr val="dk1"/>
+              </a:solidFill>
+              <a:effectLst/>
+              <a:uFillTx/>
+              <a:latin typeface="TradeGothic"/>
+            </a:endParaRPr>
+          </a:p>
+          <a:p>
+            <a:pPr marL="743040" lvl="1" indent="-285840" algn="l" defTabSz="457200">
+              <a:lnSpc>
+                <a:spcPct val="100000"/>
+              </a:lnSpc>
+              <a:spcBef>
+                <a:spcPts val="479"/>
+              </a:spcBef>
+              <a:buClr>
+                <a:srgbClr val="000000"/>
+              </a:buClr>
+              <a:buFont typeface="Arial"/>
+              <a:buChar char="–"/>
+            </a:pPr>
+            <a:r>
+              <a:rPr lang="en-US" sz="2400" b="0" u="none" strike="noStrike">
+                <a:solidFill>
+                  <a:schemeClr val="dk1"/>
+                </a:solidFill>
+                <a:effectLst/>
+                <a:uFillTx/>
+                <a:latin typeface="TradeGothic"/>
+                <a:ea typeface="ＭＳ Ｐゴシック"/>
+              </a:rPr>
+              <a:t>Second level</a:t>
+            </a:r>
+            <a:endParaRPr lang="en-US" sz="2400" b="0" u="none" strike="noStrike">
+              <a:solidFill>
+                <a:schemeClr val="dk1"/>
+              </a:solidFill>
+              <a:effectLst/>
+              <a:uFillTx/>
+              <a:latin typeface="TradeGothic"/>
+            </a:endParaRPr>
+          </a:p>
+          <a:p>
+            <a:pPr marL="1143000" lvl="2" indent="-228600" algn="l" defTabSz="457200">
+              <a:lnSpc>
+                <a:spcPct val="100000"/>
+              </a:lnSpc>
+              <a:spcBef>
+                <a:spcPts val="400"/>
+              </a:spcBef>
+              <a:buClr>
+                <a:srgbClr val="000000"/>
+              </a:buClr>
+              <a:buFont typeface="Arial"/>
+              <a:buChar char="•"/>
+            </a:pPr>
+            <a:r>
+              <a:rPr lang="en-US" sz="2000" b="0" u="none" strike="noStrike">
+                <a:solidFill>
+                  <a:schemeClr val="dk1"/>
+                </a:solidFill>
+                <a:effectLst/>
+                <a:uFillTx/>
+                <a:latin typeface="TradeGothic"/>
+                <a:ea typeface="ＭＳ Ｐゴシック"/>
+              </a:rPr>
+              <a:t>Third level</a:t>
+            </a:r>
+            <a:endParaRPr lang="en-US" sz="2000" b="0" u="none" strike="noStrike">
+              <a:solidFill>
+                <a:schemeClr val="dk1"/>
+              </a:solidFill>
+              <a:effectLst/>
+              <a:uFillTx/>
+              <a:latin typeface="TradeGothic"/>
+            </a:endParaRPr>
+          </a:p>
+          <a:p>
+            <a:pPr marL="1600200" lvl="3" indent="-228600" algn="l" defTabSz="457200">
+              <a:lnSpc>
+                <a:spcPct val="100000"/>
+              </a:lnSpc>
+              <a:spcBef>
+                <a:spcPts val="360"/>
+              </a:spcBef>
+              <a:buClr>
+                <a:srgbClr val="000000"/>
+              </a:buClr>
+              <a:buFont typeface="Arial"/>
+              <a:buChar char="–"/>
+            </a:pPr>
+            <a:r>
+              <a:rPr lang="en-US" sz="1800" b="0" u="none" strike="noStrike">
+                <a:solidFill>
+                  <a:schemeClr val="dk1"/>
+                </a:solidFill>
+                <a:effectLst/>
+                <a:uFillTx/>
+                <a:latin typeface="TradeGothic"/>
+                <a:ea typeface="ＭＳ Ｐゴシック"/>
+              </a:rPr>
+              <a:t>Fourth level</a:t>
+            </a:r>
+            <a:endParaRPr lang="en-US" sz="1800" b="0" u="none" strike="noStrike">
+              <a:solidFill>
+                <a:schemeClr val="dk1"/>
+              </a:solidFill>
+              <a:effectLst/>
+              <a:uFillTx/>
+              <a:latin typeface="TradeGothic"/>
+            </a:endParaRPr>
+          </a:p>
+          <a:p>
+            <a:pPr marL="2057400" lvl="4" indent="-228600" algn="l" defTabSz="457200">
+              <a:lnSpc>
+                <a:spcPct val="100000"/>
+              </a:lnSpc>
+              <a:spcBef>
+                <a:spcPts val="360"/>
+              </a:spcBef>
+              <a:buClr>
+                <a:srgbClr val="000000"/>
+              </a:buClr>
+              <a:buFont typeface="Arial"/>
+              <a:buChar char="»"/>
+            </a:pPr>
+            <a:r>
+              <a:rPr lang="en-US" sz="1800" b="0" u="none" strike="noStrike">
+                <a:solidFill>
+                  <a:schemeClr val="dk1"/>
+                </a:solidFill>
+                <a:effectLst/>
+                <a:uFillTx/>
+                <a:latin typeface="TradeGothic"/>
+                <a:ea typeface="ＭＳ Ｐゴシック"/>
+              </a:rPr>
+              <a:t>Fifth level</a:t>
+            </a:r>
+            <a:endParaRPr lang="en-US" sz="1800" b="0" u="none" strike="noStrike">
+              <a:solidFill>
+                <a:schemeClr val="dk1"/>
+              </a:solidFill>
+              <a:effectLst/>
+              <a:uFillTx/>
+              <a:latin typeface="TradeGothic"/>
+            </a:endParaRPr>
+          </a:p>
+        </p:txBody>
+      </p:sp>
+      <p:sp>
+        <p:nvSpPr>
+          <p:cNvPr id="19" name="PlaceHolder 3"/>
+          <p:cNvSpPr>
+            <a:spLocks noGrp="1"/>
+          </p:cNvSpPr>
+          <p:nvPr>
+            <p:ph type="body"/>
+          </p:nvPr>
+        </p:nvSpPr>
+        <p:spPr>
+          <a:xfrm>
+            <a:off x="6197760" y="1600200"/>
+            <a:ext cx="5383440" cy="4524480"/>
+          </a:xfrm>
+          <a:prstGeom prst="rect">
+            <a:avLst/>
+          </a:prstGeom>
+          <a:noFill/>
+          <a:ln w="9360">
+            <a:noFill/>
+          </a:ln>
+        </p:spPr>
+        <p:txBody>
+          <a:bodyPr numCol="1" spcCol="0" lIns="91440" tIns="45720" rIns="91440" bIns="45720" anchor="t">
+            <a:noAutofit/>
+          </a:bodyPr>
+          <a:lstStyle>
+            <a:lvl1pPr algn="l" defTabSz="457200">
+              <a:lnSpc>
+                <a:spcPct val="100000"/>
+              </a:lnSpc>
+              <a:spcBef>
+                <a:spcPts val="561"/>
+              </a:spcBef>
+              <a:buClr>
+                <a:srgbClr val="000000"/>
+              </a:buClr>
+              <a:buFont typeface="Arial"/>
+              <a:buChar char="•"/>
+              <a:defRPr lang="en-US" sz="2800" b="0" u="none" strike="noStrike">
+                <a:solidFill>
+                  <a:schemeClr val="dk1"/>
+                </a:solidFill>
+                <a:effectLst/>
+                <a:uFillTx/>
+                <a:latin typeface="TradeGothic"/>
+                <a:ea typeface="ＭＳ Ｐゴシック"/>
+              </a:defRPr>
+            </a:lvl1pPr>
+            <a:lvl2pPr lvl="1" algn="l" defTabSz="457200">
+              <a:lnSpc>
+                <a:spcPct val="100000"/>
+              </a:lnSpc>
+              <a:spcBef>
+                <a:spcPts val="479"/>
+              </a:spcBef>
+              <a:buClr>
+                <a:srgbClr val="000000"/>
+              </a:buClr>
+              <a:buFont typeface="Arial"/>
+              <a:buChar char="–"/>
+              <a:defRPr lang="en-US" sz="2400" b="0" u="none" strike="noStrike">
+                <a:solidFill>
+                  <a:schemeClr val="dk1"/>
+                </a:solidFill>
+                <a:effectLst/>
+                <a:uFillTx/>
+                <a:latin typeface="TradeGothic"/>
+                <a:ea typeface="ＭＳ Ｐゴシック"/>
+              </a:defRPr>
+            </a:lvl2pPr>
+            <a:lvl3pPr lvl="2" algn="l" defTabSz="457200">
+              <a:lnSpc>
+                <a:spcPct val="100000"/>
+              </a:lnSpc>
+              <a:spcBef>
+                <a:spcPts val="400"/>
+              </a:spcBef>
+              <a:buClr>
+                <a:srgbClr val="000000"/>
+              </a:buClr>
+              <a:buFont typeface="Arial"/>
+              <a:buChar char="•"/>
+              <a:defRPr lang="en-US" sz="2000" b="0" u="none" strike="noStrike">
+                <a:solidFill>
+                  <a:schemeClr val="dk1"/>
+                </a:solidFill>
+                <a:effectLst/>
+                <a:uFillTx/>
+                <a:latin typeface="TradeGothic"/>
+                <a:ea typeface="ＭＳ Ｐゴシック"/>
+              </a:defRPr>
+            </a:lvl3pPr>
+            <a:lvl4pPr lvl="3" algn="l" defTabSz="457200">
+              <a:lnSpc>
+                <a:spcPct val="100000"/>
+              </a:lnSpc>
+              <a:spcBef>
+                <a:spcPts val="360"/>
+              </a:spcBef>
+              <a:buClr>
+                <a:srgbClr val="000000"/>
+              </a:buClr>
+              <a:buFont typeface="Arial"/>
+              <a:buChar char="–"/>
+              <a:defRPr lang="en-US" sz="1800" b="0" u="none" strike="noStrike">
+                <a:solidFill>
+                  <a:schemeClr val="dk1"/>
+                </a:solidFill>
+                <a:effectLst/>
+                <a:uFillTx/>
+                <a:latin typeface="TradeGothic"/>
+                <a:ea typeface="ＭＳ Ｐゴシック"/>
+              </a:defRPr>
+            </a:lvl4pPr>
+            <a:lvl5pPr lvl="4" algn="l" defTabSz="457200">
+              <a:lnSpc>
+                <a:spcPct val="100000"/>
+              </a:lnSpc>
+              <a:spcBef>
+                <a:spcPts val="360"/>
+              </a:spcBef>
+              <a:buClr>
+                <a:srgbClr val="000000"/>
+              </a:buClr>
+              <a:buFont typeface="Arial"/>
+              <a:buChar char="»"/>
+              <a:defRPr lang="en-US" sz="1800" b="0" u="none" strike="noStrike">
+                <a:solidFill>
+                  <a:schemeClr val="dk1"/>
+                </a:solidFill>
+                <a:effectLst/>
+                <a:uFillTx/>
+                <a:latin typeface="TradeGothic"/>
+                <a:ea typeface="ＭＳ Ｐゴシック"/>
+              </a:defRPr>
+            </a:lvl5pPr>
+          </a:lstStyle>
+          <a:p>
+            <a:pPr marL="343080" indent="-343080" algn="l" defTabSz="457200">
+              <a:lnSpc>
+                <a:spcPct val="100000"/>
+              </a:lnSpc>
+              <a:spcBef>
+                <a:spcPts val="561"/>
+              </a:spcBef>
+              <a:buClr>
+                <a:srgbClr val="000000"/>
+              </a:buClr>
+              <a:buFont typeface="Arial"/>
+              <a:buChar char="•"/>
+            </a:pPr>
+            <a:r>
+              <a:rPr lang="en-US" sz="2800" b="0" u="none" strike="noStrike">
+                <a:solidFill>
+                  <a:schemeClr val="dk1"/>
+                </a:solidFill>
+                <a:effectLst/>
+                <a:uFillTx/>
+                <a:latin typeface="TradeGothic"/>
+                <a:ea typeface="ＭＳ Ｐゴシック"/>
+              </a:rPr>
+              <a:t>Click to edit Master text styles</a:t>
+            </a:r>
+            <a:endParaRPr lang="en-US" sz="2800" b="0" u="none" strike="noStrike">
+              <a:solidFill>
+                <a:schemeClr val="dk1"/>
+              </a:solidFill>
+              <a:effectLst/>
+              <a:uFillTx/>
+              <a:latin typeface="TradeGothic"/>
+            </a:endParaRPr>
+          </a:p>
+          <a:p>
+            <a:pPr marL="743040" lvl="1" indent="-285840" algn="l" defTabSz="457200">
+              <a:lnSpc>
+                <a:spcPct val="100000"/>
+              </a:lnSpc>
+              <a:spcBef>
+                <a:spcPts val="479"/>
+              </a:spcBef>
+              <a:buClr>
+                <a:srgbClr val="000000"/>
+              </a:buClr>
+              <a:buFont typeface="Arial"/>
+              <a:buChar char="–"/>
+            </a:pPr>
+            <a:r>
+              <a:rPr lang="en-US" sz="2400" b="0" u="none" strike="noStrike">
+                <a:solidFill>
+                  <a:schemeClr val="dk1"/>
+                </a:solidFill>
+                <a:effectLst/>
+                <a:uFillTx/>
+                <a:latin typeface="TradeGothic"/>
+                <a:ea typeface="ＭＳ Ｐゴシック"/>
+              </a:rPr>
+              <a:t>Second level</a:t>
+            </a:r>
+            <a:endParaRPr lang="en-US" sz="2400" b="0" u="none" strike="noStrike">
+              <a:solidFill>
+                <a:schemeClr val="dk1"/>
+              </a:solidFill>
+              <a:effectLst/>
+              <a:uFillTx/>
+              <a:latin typeface="TradeGothic"/>
+            </a:endParaRPr>
+          </a:p>
+          <a:p>
+            <a:pPr marL="1143000" lvl="2" indent="-228600" algn="l" defTabSz="457200">
+              <a:lnSpc>
+                <a:spcPct val="100000"/>
+              </a:lnSpc>
+              <a:spcBef>
+                <a:spcPts val="400"/>
+              </a:spcBef>
+              <a:buClr>
+                <a:srgbClr val="000000"/>
+              </a:buClr>
+              <a:buFont typeface="Arial"/>
+              <a:buChar char="•"/>
+            </a:pPr>
+            <a:r>
+              <a:rPr lang="en-US" sz="2000" b="0" u="none" strike="noStrike">
+                <a:solidFill>
+                  <a:schemeClr val="dk1"/>
+                </a:solidFill>
+                <a:effectLst/>
+                <a:uFillTx/>
+                <a:latin typeface="TradeGothic"/>
+                <a:ea typeface="ＭＳ Ｐゴシック"/>
+              </a:rPr>
+              <a:t>Third level</a:t>
+            </a:r>
+            <a:endParaRPr lang="en-US" sz="2000" b="0" u="none" strike="noStrike">
+              <a:solidFill>
+                <a:schemeClr val="dk1"/>
+              </a:solidFill>
+              <a:effectLst/>
+              <a:uFillTx/>
+              <a:latin typeface="TradeGothic"/>
+            </a:endParaRPr>
+          </a:p>
+          <a:p>
+            <a:pPr marL="1600200" lvl="3" indent="-228600" algn="l" defTabSz="457200">
+              <a:lnSpc>
+                <a:spcPct val="100000"/>
+              </a:lnSpc>
+              <a:spcBef>
+                <a:spcPts val="360"/>
+              </a:spcBef>
+              <a:buClr>
+                <a:srgbClr val="000000"/>
+              </a:buClr>
+              <a:buFont typeface="Arial"/>
+              <a:buChar char="–"/>
+            </a:pPr>
+            <a:r>
+              <a:rPr lang="en-US" sz="1800" b="0" u="none" strike="noStrike">
+                <a:solidFill>
+                  <a:schemeClr val="dk1"/>
+                </a:solidFill>
+                <a:effectLst/>
+                <a:uFillTx/>
+                <a:latin typeface="TradeGothic"/>
+                <a:ea typeface="ＭＳ Ｐゴシック"/>
+              </a:rPr>
+              <a:t>Fourth level</a:t>
+            </a:r>
+            <a:endParaRPr lang="en-US" sz="1800" b="0" u="none" strike="noStrike">
+              <a:solidFill>
+                <a:schemeClr val="dk1"/>
+              </a:solidFill>
+              <a:effectLst/>
+              <a:uFillTx/>
+              <a:latin typeface="TradeGothic"/>
+            </a:endParaRPr>
+          </a:p>
+          <a:p>
+            <a:pPr marL="2057400" lvl="4" indent="-228600" algn="l" defTabSz="457200">
+              <a:lnSpc>
+                <a:spcPct val="100000"/>
+              </a:lnSpc>
+              <a:spcBef>
+                <a:spcPts val="360"/>
+              </a:spcBef>
+              <a:buClr>
+                <a:srgbClr val="000000"/>
+              </a:buClr>
+              <a:buFont typeface="Arial"/>
+              <a:buChar char="»"/>
+            </a:pPr>
+            <a:r>
+              <a:rPr lang="en-US" sz="1800" b="0" u="none" strike="noStrike">
+                <a:solidFill>
+                  <a:schemeClr val="dk1"/>
+                </a:solidFill>
+                <a:effectLst/>
+                <a:uFillTx/>
+                <a:latin typeface="TradeGothic"/>
+                <a:ea typeface="ＭＳ Ｐゴシック"/>
+              </a:rPr>
+              <a:t>Fifth level</a:t>
+            </a:r>
+            <a:endParaRPr lang="en-US" sz="1800" b="0" u="none" strike="noStrike">
+              <a:solidFill>
+                <a:schemeClr val="dk1"/>
+              </a:solidFill>
+              <a:effectLst/>
+              <a:uFillTx/>
+              <a:latin typeface="TradeGothic"/>
+            </a:endParaRPr>
+          </a:p>
+        </p:txBody>
+      </p:sp>
+      <p:sp>
+        <p:nvSpPr>
+          <p:cNvPr id="20" name="PlaceHolder 4"/>
           <p:cNvSpPr>
             <a:spLocks noGrp="1"/>
           </p:cNvSpPr>
@@ -4941,7 +5385,7 @@
         <p:spPr>
           <a:xfrm>
             <a:off x="609480" y="6356520"/>
-            <a:ext cx="2843640" cy="363960"/>
+            <a:ext cx="2843280" cy="363600"/>
           </a:xfrm>
           <a:prstGeom prst="rect">
             <a:avLst/>
@@ -5010,7 +5454,7 @@
       </p:sp>
       <p:sp>
         <p:nvSpPr>
-          <p:cNvPr id="21" name="PlaceHolder 2"/>
+          <p:cNvPr id="21" name="PlaceHolder 5"/>
           <p:cNvSpPr>
             <a:spLocks noGrp="1"/>
           </p:cNvSpPr>
@@ -5021,7 +5465,7 @@
         <p:spPr>
           <a:xfrm>
             <a:off x="4165560" y="6356520"/>
-            <a:ext cx="3859560" cy="363960"/>
+            <a:ext cx="3859200" cy="363600"/>
           </a:xfrm>
           <a:prstGeom prst="rect">
             <a:avLst/>
@@ -5092,7 +5536,7 @@
       </p:sp>
       <p:sp>
         <p:nvSpPr>
-          <p:cNvPr id="22" name="PlaceHolder 3"/>
+          <p:cNvPr id="22" name="PlaceHolder 6"/>
           <p:cNvSpPr>
             <a:spLocks noGrp="1"/>
           </p:cNvSpPr>
@@ -5103,7 +5547,7 @@
         <p:spPr>
           <a:xfrm>
             <a:off x="8737560" y="6356520"/>
-            <a:ext cx="2843640" cy="363960"/>
+            <a:ext cx="2843280" cy="363600"/>
           </a:xfrm>
           <a:prstGeom prst="rect">
             <a:avLst/>
@@ -5147,7 +5591,7 @@
                 <a:tab pos="0" algn="l"/>
               </a:tabLst>
             </a:pPr>
-            <a:fld id="{E34FBC0E-6D17-4D6A-A2FB-4129583FF28B}" type="slidenum">
+            <a:fld id="{6CB68054-F6C8-44AD-8B60-19735A556E86}" type="slidenum">
               <a:rPr lang="en-US" sz="1200" b="0" u="none" strike="noStrike">
                 <a:solidFill>
                   <a:srgbClr val="898989"/>
@@ -5177,7 +5621,7 @@
 
 <file path=ppt/slideLayouts/slideLayout5.xml><?xml version="1.0" encoding="utf-8"?>
 <p:sldLayout xmlns:a="http://schemas.openxmlformats.org/drawingml/2006/main" xmlns:p="http://schemas.openxmlformats.org/presentationml/2006/main" xmlns:r="http://schemas.openxmlformats.org/officeDocument/2006/relationships" xmlns:p14="http://schemas.microsoft.com/office/powerpoint/2010/main" xmlns:p15="http://schemas.microsoft.com/office/powerpoint/2012/main" xmlns:mc="http://schemas.openxmlformats.org/markup-compatibility/2006" type="blank" preserve="1">
-  <p:cSld name="Content with Caption">
+  <p:cSld name="Comparison">
     <p:bg>
       <p:bgPr>
         <a:solidFill>
@@ -5211,8 +5655,88 @@
         </p:nvSpPr>
         <p:spPr>
           <a:xfrm>
-            <a:off x="609480" y="272880"/>
-            <a:ext cx="4010040" cy="1161000"/>
+            <a:off x="609480" y="-47520"/>
+            <a:ext cx="10971360" cy="1141560"/>
+          </a:xfrm>
+          <a:prstGeom prst="rect">
+            <a:avLst/>
+          </a:prstGeom>
+          <a:noFill/>
+          <a:ln w="9360">
+            <a:noFill/>
+          </a:ln>
+        </p:spPr>
+        <p:txBody>
+          <a:bodyPr numCol="1" spcCol="0" lIns="91440" tIns="45720" rIns="91440" bIns="45720" anchor="ctr">
+            <a:noAutofit/>
+          </a:bodyPr>
+          <a:lstStyle>
+            <a:lvl1pPr indent="0" algn="ctr" defTabSz="457200">
+              <a:lnSpc>
+                <a:spcPct val="100000"/>
+              </a:lnSpc>
+              <a:buNone/>
+              <a:tabLst>
+                <a:tab pos="0" algn="l"/>
+              </a:tabLst>
+              <a:defRPr lang="en-US" sz="4400" b="0" u="none" strike="noStrike">
+                <a:solidFill>
+                  <a:schemeClr val="dk1"/>
+                </a:solidFill>
+                <a:effectLst/>
+                <a:uFillTx/>
+                <a:latin typeface="TradeGothic"/>
+                <a:ea typeface="ＭＳ Ｐゴシック"/>
+              </a:defRPr>
+            </a:lvl1pPr>
+          </a:lstStyle>
+          <a:p>
+            <a:pPr indent="0" algn="ctr" defTabSz="457200">
+              <a:lnSpc>
+                <a:spcPct val="100000"/>
+              </a:lnSpc>
+              <a:buNone/>
+              <a:tabLst>
+                <a:tab pos="0" algn="l"/>
+              </a:tabLst>
+            </a:pPr>
+            <a:r>
+              <a:rPr lang="en-US" sz="4400" b="0" u="none" strike="noStrike">
+                <a:solidFill>
+                  <a:schemeClr val="dk1"/>
+                </a:solidFill>
+                <a:effectLst/>
+                <a:uFillTx/>
+                <a:latin typeface="TradeGothic"/>
+                <a:ea typeface="ＭＳ Ｐゴシック"/>
+              </a:rPr>
+              <a:t>Click to edit Master title style</a:t>
+            </a:r>
+            <a:endParaRPr lang="en-US" sz="4400" b="0" u="none" strike="noStrike">
+              <a:solidFill>
+                <a:schemeClr val="dk1"/>
+              </a:solidFill>
+              <a:effectLst/>
+              <a:uFillTx/>
+              <a:latin typeface="TradeGothic"/>
+            </a:endParaRPr>
+          </a:p>
+        </p:txBody>
+      </p:sp>
+      <p:sp>
+        <p:nvSpPr>
+          <p:cNvPr id="24" name="PlaceHolder 2"/>
+          <p:cNvSpPr>
+            <a:spLocks noGrp="1"/>
+          </p:cNvSpPr>
+          <p:nvPr>
+            <p:ph type="body"/>
+          </p:nvPr>
+        </p:nvSpPr>
+        <p:spPr>
+          <a:xfrm>
+            <a:off x="609480" y="1535040"/>
+            <a:ext cx="5385600" cy="638280"/>
           </a:xfrm>
           <a:prstGeom prst="rect">
             <a:avLst/>
@@ -5231,11 +5755,14 @@
               <a:lnSpc>
                 <a:spcPct val="100000"/>
               </a:lnSpc>
-              <a:buNone/>
-              <a:tabLst>
-                <a:tab pos="0" algn="l"/>
-              </a:tabLst>
-              <a:defRPr lang="en-US" sz="2000" b="1" u="none" strike="noStrike">
+              <a:spcBef>
+                <a:spcPts val="479"/>
+              </a:spcBef>
+              <a:buNone/>
+              <a:tabLst>
+                <a:tab pos="0" algn="l"/>
+              </a:tabLst>
+              <a:defRPr lang="en-US" sz="2400" b="1" u="none" strike="noStrike">
                 <a:solidFill>
                   <a:schemeClr val="dk1"/>
                 </a:solidFill>
@@ -5251,24 +5778,27 @@
               <a:lnSpc>
                 <a:spcPct val="100000"/>
               </a:lnSpc>
-              <a:buNone/>
-              <a:tabLst>
-                <a:tab pos="0" algn="l"/>
-              </a:tabLst>
-            </a:pPr>
-            <a:r>
-              <a:rPr lang="en-US" sz="2000" b="1" u="none" strike="noStrike">
-                <a:solidFill>
-                  <a:schemeClr val="dk1"/>
-                </a:solidFill>
-                <a:effectLst/>
-                <a:uFillTx/>
-                <a:latin typeface="TradeGothic"/>
-                <a:ea typeface="ＭＳ Ｐゴシック"/>
-              </a:rPr>
-              <a:t>Click to edit Master title style</a:t>
-            </a:r>
-            <a:endParaRPr lang="en-US" sz="2000" b="1" u="none" strike="noStrike">
+              <a:spcBef>
+                <a:spcPts val="479"/>
+              </a:spcBef>
+              <a:buNone/>
+              <a:tabLst>
+                <a:tab pos="0" algn="l"/>
+              </a:tabLst>
+            </a:pPr>
+            <a:r>
+              <a:rPr lang="en-US" sz="2400" b="1" u="none" strike="noStrike">
+                <a:solidFill>
+                  <a:schemeClr val="dk1"/>
+                </a:solidFill>
+                <a:effectLst/>
+                <a:uFillTx/>
+                <a:latin typeface="TradeGothic"/>
+                <a:ea typeface="ＭＳ Ｐゴシック"/>
+              </a:rPr>
+              <a:t>Click to edit Master text styles</a:t>
+            </a:r>
+            <a:endParaRPr lang="en-US" sz="2400" b="0" u="none" strike="noStrike">
               <a:solidFill>
                 <a:schemeClr val="dk1"/>
               </a:solidFill>
@@ -5281,7 +5811,7 @@
       </p:sp>
       <p:sp>
         <p:nvSpPr>
-          <p:cNvPr id="24" name="PlaceHolder 2"/>
+          <p:cNvPr id="25" name="PlaceHolder 3"/>
           <p:cNvSpPr>
             <a:spLocks noGrp="1"/>
           </p:cNvSpPr>
@@ -5291,8 +5821,8 @@
         </p:nvSpPr>
         <p:spPr>
           <a:xfrm>
-            <a:off x="4766760" y="272880"/>
-            <a:ext cx="6814440" cy="5852160"/>
+            <a:off x="609480" y="2174760"/>
+            <a:ext cx="5385600" cy="3949920"/>
           </a:xfrm>
           <a:prstGeom prst="rect">
             <a:avLst/>
@@ -5312,14 +5842,17 @@
                 <a:spcPct val="100000"/>
               </a:lnSpc>
               <a:spcBef>
-                <a:spcPts val="641"/>
+                <a:spcPts val="479"/>
               </a:spcBef>
               <a:buClr>
                 <a:srgbClr val="000000"/>
               </a:buClr>
               <a:buFont typeface="Arial"/>
               <a:buChar char="•"/>
-              <a:defRPr lang="en-US" sz="3200" b="0" u="none" strike="noStrike">
+              <a:tabLst>
+                <a:tab pos="0" algn="l"/>
+              </a:tabLst>
+              <a:defRPr lang="en-US" sz="2400" b="0" u="none" strike="noStrike">
                 <a:solidFill>
                   <a:schemeClr val="dk1"/>
                 </a:solidFill>
@@ -5334,14 +5867,17 @@
                 <a:spcPct val="100000"/>
               </a:lnSpc>
               <a:spcBef>
-                <a:spcPts val="561"/>
+                <a:spcPts val="400"/>
               </a:spcBef>
               <a:buClr>
                 <a:srgbClr val="000000"/>
               </a:buClr>
               <a:buFont typeface="Arial"/>
               <a:buChar char="–"/>
-              <a:defRPr lang="en-US" sz="2800" b="0" u="none" strike="noStrike">
+              <a:tabLst>
+                <a:tab pos="0" algn="l"/>
+              </a:tabLst>
+              <a:defRPr lang="en-US" sz="2000" b="0" u="none" strike="noStrike">
                 <a:solidFill>
                   <a:schemeClr val="dk1"/>
                 </a:solidFill>
@@ -5356,14 +5892,17 @@
                 <a:spcPct val="100000"/>
               </a:lnSpc>
               <a:spcBef>
-                <a:spcPts val="479"/>
+                <a:spcPts val="360"/>
               </a:spcBef>
               <a:buClr>
                 <a:srgbClr val="000000"/>
               </a:buClr>
               <a:buFont typeface="Arial"/>
               <a:buChar char="•"/>
-              <a:defRPr lang="en-US" sz="2400" b="0" u="none" strike="noStrike">
+              <a:tabLst>
+                <a:tab pos="0" algn="l"/>
+              </a:tabLst>
+              <a:defRPr lang="en-US" sz="1800" b="0" u="none" strike="noStrike">
                 <a:solidFill>
                   <a:schemeClr val="dk1"/>
                 </a:solidFill>
@@ -5378,14 +5917,17 @@
                 <a:spcPct val="100000"/>
               </a:lnSpc>
               <a:spcBef>
-                <a:spcPts val="400"/>
+                <a:spcPts val="320"/>
               </a:spcBef>
               <a:buClr>
                 <a:srgbClr val="000000"/>
               </a:buClr>
               <a:buFont typeface="Arial"/>
               <a:buChar char="–"/>
-              <a:defRPr lang="en-US" sz="2000" b="0" u="none" strike="noStrike">
+              <a:tabLst>
+                <a:tab pos="0" algn="l"/>
+              </a:tabLst>
+              <a:defRPr lang="en-US" sz="1600" b="0" u="none" strike="noStrike">
                 <a:solidFill>
                   <a:schemeClr val="dk1"/>
                 </a:solidFill>
@@ -5400,14 +5942,17 @@
                 <a:spcPct val="100000"/>
               </a:lnSpc>
               <a:spcBef>
-                <a:spcPts val="400"/>
+                <a:spcPts val="320"/>
               </a:spcBef>
               <a:buClr>
                 <a:srgbClr val="000000"/>
               </a:buClr>
               <a:buFont typeface="Arial"/>
               <a:buChar char="»"/>
-              <a:defRPr lang="en-US" sz="2000" b="0" u="none" strike="noStrike">
+              <a:tabLst>
+                <a:tab pos="0" algn="l"/>
+              </a:tabLst>
+              <a:defRPr lang="en-US" sz="1600" b="0" u="none" strike="noStrike">
                 <a:solidFill>
                   <a:schemeClr val="dk1"/>
                 </a:solidFill>
@@ -5424,16 +5969,19 @@
                 <a:spcPct val="100000"/>
               </a:lnSpc>
               <a:spcBef>
-                <a:spcPts val="641"/>
+                <a:spcPts val="479"/>
               </a:spcBef>
               <a:buClr>
                 <a:srgbClr val="000000"/>
               </a:buClr>
               <a:buFont typeface="Arial"/>
               <a:buChar char="•"/>
-            </a:pPr>
-            <a:r>
-              <a:rPr lang="en-US" sz="3200" b="0" u="none" strike="noStrike">
+              <a:tabLst>
+                <a:tab pos="0" algn="l"/>
+              </a:tabLst>
+            </a:pPr>
+            <a:r>
+              <a:rPr lang="en-US" sz="2400" b="0" u="none" strike="noStrike">
                 <a:solidFill>
                   <a:schemeClr val="dk1"/>
                 </a:solidFill>
@@ -5444,7 +5992,7 @@
               </a:rPr>
               <a:t>Click to edit Master text styles</a:t>
             </a:r>
-            <a:endParaRPr lang="en-US" sz="3200" b="0" u="none" strike="noStrike">
+            <a:endParaRPr lang="en-US" sz="2400" b="0" u="none" strike="noStrike">
               <a:solidFill>
                 <a:schemeClr val="dk1"/>
               </a:solidFill>
@@ -5459,16 +6007,19 @@
                 <a:spcPct val="100000"/>
               </a:lnSpc>
               <a:spcBef>
-                <a:spcPts val="561"/>
+                <a:spcPts val="400"/>
               </a:spcBef>
               <a:buClr>
                 <a:srgbClr val="000000"/>
               </a:buClr>
               <a:buFont typeface="Arial"/>
               <a:buChar char="–"/>
-            </a:pPr>
-            <a:r>
-              <a:rPr lang="en-US" sz="2800" b="0" u="none" strike="noStrike">
+              <a:tabLst>
+                <a:tab pos="0" algn="l"/>
+              </a:tabLst>
+            </a:pPr>
+            <a:r>
+              <a:rPr lang="en-US" sz="2000" b="0" u="none" strike="noStrike">
                 <a:solidFill>
                   <a:schemeClr val="dk1"/>
                 </a:solidFill>
@@ -5479,7 +6030,7 @@
               </a:rPr>
               <a:t>Second level</a:t>
             </a:r>
-            <a:endParaRPr lang="en-US" sz="2800" b="0" u="none" strike="noStrike">
+            <a:endParaRPr lang="en-US" sz="2000" b="0" u="none" strike="noStrike">
               <a:solidFill>
                 <a:schemeClr val="dk1"/>
               </a:solidFill>
@@ -5494,16 +6045,19 @@
                 <a:spcPct val="100000"/>
               </a:lnSpc>
               <a:spcBef>
-                <a:spcPts val="479"/>
+                <a:spcPts val="360"/>
               </a:spcBef>
               <a:buClr>
                 <a:srgbClr val="000000"/>
               </a:buClr>
               <a:buFont typeface="Arial"/>
               <a:buChar char="•"/>
-            </a:pPr>
-            <a:r>
-              <a:rPr lang="en-US" sz="2400" b="0" u="none" strike="noStrike">
+              <a:tabLst>
+                <a:tab pos="0" algn="l"/>
+              </a:tabLst>
+            </a:pPr>
+            <a:r>
+              <a:rPr lang="en-US" sz="1800" b="0" u="none" strike="noStrike">
                 <a:solidFill>
                   <a:schemeClr val="dk1"/>
                 </a:solidFill>
@@ -5514,7 +6068,7 @@
               </a:rPr>
               <a:t>Third level</a:t>
             </a:r>
-            <a:endParaRPr lang="en-US" sz="2400" b="0" u="none" strike="noStrike">
+            <a:endParaRPr lang="en-US" sz="1800" b="0" u="none" strike="noStrike">
               <a:solidFill>
                 <a:schemeClr val="dk1"/>
               </a:solidFill>
@@ -5529,16 +6083,19 @@
                 <a:spcPct val="100000"/>
               </a:lnSpc>
               <a:spcBef>
-                <a:spcPts val="400"/>
+                <a:spcPts val="320"/>
               </a:spcBef>
               <a:buClr>
                 <a:srgbClr val="000000"/>
               </a:buClr>
               <a:buFont typeface="Arial"/>
               <a:buChar char="–"/>
-            </a:pPr>
-            <a:r>
-              <a:rPr lang="en-US" sz="2000" b="0" u="none" strike="noStrike">
+              <a:tabLst>
+                <a:tab pos="0" algn="l"/>
+              </a:tabLst>
+            </a:pPr>
+            <a:r>
+              <a:rPr lang="en-US" sz="1600" b="0" u="none" strike="noStrike">
                 <a:solidFill>
                   <a:schemeClr val="dk1"/>
                 </a:solidFill>
@@ -5549,7 +6106,7 @@
               </a:rPr>
               <a:t>Fourth level</a:t>
             </a:r>
-            <a:endParaRPr lang="en-US" sz="2000" b="0" u="none" strike="noStrike">
+            <a:endParaRPr lang="en-US" sz="1600" b="0" u="none" strike="noStrike">
               <a:solidFill>
                 <a:schemeClr val="dk1"/>
               </a:solidFill>
@@ -5564,16 +6121,19 @@
                 <a:spcPct val="100000"/>
               </a:lnSpc>
               <a:spcBef>
-                <a:spcPts val="400"/>
+                <a:spcPts val="320"/>
               </a:spcBef>
               <a:buClr>
                 <a:srgbClr val="000000"/>
               </a:buClr>
               <a:buFont typeface="Arial"/>
               <a:buChar char="»"/>
-            </a:pPr>
-            <a:r>
-              <a:rPr lang="en-US" sz="2000" b="0" u="none" strike="noStrike">
+              <a:tabLst>
+                <a:tab pos="0" algn="l"/>
+              </a:tabLst>
+            </a:pPr>
+            <a:r>
+              <a:rPr lang="en-US" sz="1600" b="0" u="none" strike="noStrike">
                 <a:solidFill>
                   <a:schemeClr val="dk1"/>
                 </a:solidFill>
@@ -5584,7 +6144,7 @@
               </a:rPr>
               <a:t>Fifth level</a:t>
             </a:r>
-            <a:endParaRPr lang="en-US" sz="2000" b="0" u="none" strike="noStrike">
+            <a:endParaRPr lang="en-US" sz="1600" b="0" u="none" strike="noStrike">
               <a:solidFill>
                 <a:schemeClr val="dk1"/>
               </a:solidFill>
@@ -5597,7 +6157,7 @@
       </p:sp>
       <p:sp>
         <p:nvSpPr>
-          <p:cNvPr id="25" name="PlaceHolder 3"/>
+          <p:cNvPr id="26" name="PlaceHolder 4"/>
           <p:cNvSpPr>
             <a:spLocks noGrp="1"/>
           </p:cNvSpPr>
@@ -5607,8 +6167,94 @@
         </p:nvSpPr>
         <p:spPr>
           <a:xfrm>
-            <a:off x="609480" y="1434960"/>
-            <a:ext cx="4010040" cy="4690080"/>
+            <a:off x="6193440" y="1535040"/>
+            <a:ext cx="5387760" cy="638280"/>
+          </a:xfrm>
+          <a:prstGeom prst="rect">
+            <a:avLst/>
+          </a:prstGeom>
+          <a:noFill/>
+          <a:ln w="9360">
+            <a:noFill/>
+          </a:ln>
+        </p:spPr>
+        <p:txBody>
+          <a:bodyPr numCol="1" spcCol="0" lIns="91440" tIns="45720" rIns="91440" bIns="45720" anchor="b">
+            <a:noAutofit/>
+          </a:bodyPr>
+          <a:lstStyle>
+            <a:lvl1pPr indent="0" algn="l" defTabSz="457200">
+              <a:lnSpc>
+                <a:spcPct val="100000"/>
+              </a:lnSpc>
+              <a:spcBef>
+                <a:spcPts val="479"/>
+              </a:spcBef>
+              <a:buNone/>
+              <a:tabLst>
+                <a:tab pos="0" algn="l"/>
+              </a:tabLst>
+              <a:defRPr lang="en-US" sz="2400" b="1" u="none" strike="noStrike">
+                <a:solidFill>
+                  <a:schemeClr val="dk1"/>
+                </a:solidFill>
+                <a:effectLst/>
+                <a:uFillTx/>
+                <a:latin typeface="TradeGothic"/>
+                <a:ea typeface="ＭＳ Ｐゴシック"/>
+              </a:defRPr>
+            </a:lvl1pPr>
+          </a:lstStyle>
+          <a:p>
+            <a:pPr indent="0" algn="l" defTabSz="457200">
+              <a:lnSpc>
+                <a:spcPct val="100000"/>
+              </a:lnSpc>
+              <a:spcBef>
+                <a:spcPts val="479"/>
+              </a:spcBef>
+              <a:buNone/>
+              <a:tabLst>
+                <a:tab pos="0" algn="l"/>
+              </a:tabLst>
+            </a:pPr>
+            <a:r>
+              <a:rPr lang="en-US" sz="2400" b="1" u="none" strike="noStrike">
+                <a:solidFill>
+                  <a:schemeClr val="dk1"/>
+                </a:solidFill>
+                <a:effectLst/>
+                <a:uFillTx/>
+                <a:latin typeface="TradeGothic"/>
+                <a:ea typeface="ＭＳ Ｐゴシック"/>
+              </a:rPr>
+              <a:t>Click to edit Master text styles</a:t>
+            </a:r>
+            <a:endParaRPr lang="en-US" sz="2400" b="0" u="none" strike="noStrike">
+              <a:solidFill>
+                <a:schemeClr val="dk1"/>
+              </a:solidFill>
+              <a:effectLst/>
+              <a:uFillTx/>
+              <a:latin typeface="TradeGothic"/>
+            </a:endParaRPr>
+          </a:p>
+        </p:txBody>
+      </p:sp>
+      <p:sp>
+        <p:nvSpPr>
+          <p:cNvPr id="27" name="PlaceHolder 5"/>
+          <p:cNvSpPr>
+            <a:spLocks noGrp="1"/>
+          </p:cNvSpPr>
+          <p:nvPr>
+            <p:ph type="body"/>
+          </p:nvPr>
+        </p:nvSpPr>
+        <p:spPr>
+          <a:xfrm>
+            <a:off x="6193440" y="2174760"/>
+            <a:ext cx="5387760" cy="3949920"/>
           </a:xfrm>
           <a:prstGeom prst="rect">
             <a:avLst/>
@@ -5623,18 +6269,22 @@
             <a:noAutofit/>
           </a:bodyPr>
           <a:lstStyle>
-            <a:lvl1pPr indent="0" algn="l" defTabSz="457200">
-              <a:lnSpc>
-                <a:spcPct val="100000"/>
-              </a:lnSpc>
-              <a:spcBef>
-                <a:spcPts val="281"/>
-              </a:spcBef>
-              <a:buNone/>
-              <a:tabLst>
-                <a:tab pos="0" algn="l"/>
-              </a:tabLst>
-              <a:defRPr lang="en-US" sz="1400" b="0" u="none" strike="noStrike">
+            <a:lvl1pPr algn="l" defTabSz="457200">
+              <a:lnSpc>
+                <a:spcPct val="100000"/>
+              </a:lnSpc>
+              <a:spcBef>
+                <a:spcPts val="479"/>
+              </a:spcBef>
+              <a:buClr>
+                <a:srgbClr val="000000"/>
+              </a:buClr>
+              <a:buFont typeface="Arial"/>
+              <a:buChar char="•"/>
+              <a:tabLst>
+                <a:tab pos="0" algn="l"/>
+              </a:tabLst>
+              <a:defRPr lang="en-US" sz="2400" b="0" u="none" strike="noStrike">
                 <a:solidFill>
                   <a:schemeClr val="dk1"/>
                 </a:solidFill>
@@ -5644,22 +6294,126 @@
                 <a:ea typeface="ＭＳ Ｐゴシック"/>
               </a:defRPr>
             </a:lvl1pPr>
+            <a:lvl2pPr lvl="1" algn="l" defTabSz="457200">
+              <a:lnSpc>
+                <a:spcPct val="100000"/>
+              </a:lnSpc>
+              <a:spcBef>
+                <a:spcPts val="400"/>
+              </a:spcBef>
+              <a:buClr>
+                <a:srgbClr val="000000"/>
+              </a:buClr>
+              <a:buFont typeface="Arial"/>
+              <a:buChar char="–"/>
+              <a:tabLst>
+                <a:tab pos="0" algn="l"/>
+              </a:tabLst>
+              <a:defRPr lang="en-US" sz="2000" b="0" u="none" strike="noStrike">
+                <a:solidFill>
+                  <a:schemeClr val="dk1"/>
+                </a:solidFill>
+                <a:effectLst/>
+                <a:uFillTx/>
+                <a:latin typeface="TradeGothic"/>
+                <a:ea typeface="ＭＳ Ｐゴシック"/>
+              </a:defRPr>
+            </a:lvl2pPr>
+            <a:lvl3pPr lvl="2" algn="l" defTabSz="457200">
+              <a:lnSpc>
+                <a:spcPct val="100000"/>
+              </a:lnSpc>
+              <a:spcBef>
+                <a:spcPts val="360"/>
+              </a:spcBef>
+              <a:buClr>
+                <a:srgbClr val="000000"/>
+              </a:buClr>
+              <a:buFont typeface="Arial"/>
+              <a:buChar char="•"/>
+              <a:tabLst>
+                <a:tab pos="0" algn="l"/>
+              </a:tabLst>
+              <a:defRPr lang="en-US" sz="1800" b="0" u="none" strike="noStrike">
+                <a:solidFill>
+                  <a:schemeClr val="dk1"/>
+                </a:solidFill>
+                <a:effectLst/>
+                <a:uFillTx/>
+                <a:latin typeface="TradeGothic"/>
+                <a:ea typeface="ＭＳ Ｐゴシック"/>
+              </a:defRPr>
+            </a:lvl3pPr>
+            <a:lvl4pPr lvl="3" algn="l" defTabSz="457200">
+              <a:lnSpc>
+                <a:spcPct val="100000"/>
+              </a:lnSpc>
+              <a:spcBef>
+                <a:spcPts val="320"/>
+              </a:spcBef>
+              <a:buClr>
+                <a:srgbClr val="000000"/>
+              </a:buClr>
+              <a:buFont typeface="Arial"/>
+              <a:buChar char="–"/>
+              <a:tabLst>
+                <a:tab pos="0" algn="l"/>
+              </a:tabLst>
+              <a:defRPr lang="en-US" sz="1600" b="0" u="none" strike="noStrike">
+                <a:solidFill>
+                  <a:schemeClr val="dk1"/>
+                </a:solidFill>
+                <a:effectLst/>
+                <a:uFillTx/>
+                <a:latin typeface="TradeGothic"/>
+                <a:ea typeface="ＭＳ Ｐゴシック"/>
+              </a:defRPr>
+            </a:lvl4pPr>
+            <a:lvl5pPr lvl="4" algn="l" defTabSz="457200">
+              <a:lnSpc>
+                <a:spcPct val="100000"/>
+              </a:lnSpc>
+              <a:spcBef>
+                <a:spcPts val="320"/>
+              </a:spcBef>
+              <a:buClr>
+                <a:srgbClr val="000000"/>
+              </a:buClr>
+              <a:buFont typeface="Arial"/>
+              <a:buChar char="»"/>
+              <a:tabLst>
+                <a:tab pos="0" algn="l"/>
+              </a:tabLst>
+              <a:defRPr lang="en-US" sz="1600" b="0" u="none" strike="noStrike">
+                <a:solidFill>
+                  <a:schemeClr val="dk1"/>
+                </a:solidFill>
+                <a:effectLst/>
+                <a:uFillTx/>
+                <a:latin typeface="TradeGothic"/>
+                <a:ea typeface="ＭＳ Ｐゴシック"/>
+              </a:defRPr>
+            </a:lvl5pPr>
           </a:lstStyle>
           <a:p>
-            <a:pPr indent="0" algn="l" defTabSz="457200">
-              <a:lnSpc>
-                <a:spcPct val="100000"/>
-              </a:lnSpc>
-              <a:spcBef>
-                <a:spcPts val="281"/>
-              </a:spcBef>
-              <a:buNone/>
-              <a:tabLst>
-                <a:tab pos="0" algn="l"/>
-              </a:tabLst>
-            </a:pPr>
-            <a:r>
-              <a:rPr lang="en-US" sz="1400" b="0" u="none" strike="noStrike">
+            <a:pPr marL="343080" indent="-343080" algn="l" defTabSz="457200">
+              <a:lnSpc>
+                <a:spcPct val="100000"/>
+              </a:lnSpc>
+              <a:spcBef>
+                <a:spcPts val="479"/>
+              </a:spcBef>
+              <a:buClr>
+                <a:srgbClr val="000000"/>
+              </a:buClr>
+              <a:buFont typeface="Arial"/>
+              <a:buChar char="•"/>
+              <a:tabLst>
+                <a:tab pos="0" algn="l"/>
+              </a:tabLst>
+            </a:pPr>
+            <a:r>
+              <a:rPr lang="en-US" sz="2400" b="0" u="none" strike="noStrike">
                 <a:solidFill>
                   <a:schemeClr val="dk1"/>
                 </a:solidFill>
@@ -5670,7 +6424,159 @@
               </a:rPr>
               <a:t>Click to edit Master text styles</a:t>
             </a:r>
-            <a:endParaRPr lang="en-US" sz="1400" b="0" u="none" strike="noStrike">
+            <a:endParaRPr lang="en-US" sz="2400" b="0" u="none" strike="noStrike">
+              <a:solidFill>
+                <a:schemeClr val="dk1"/>
+              </a:solidFill>
+              <a:effectLst/>
+              <a:uFillTx/>
+              <a:latin typeface="TradeGothic"/>
+            </a:endParaRPr>
+          </a:p>
+          <a:p>
+            <a:pPr marL="743040" lvl="1" indent="-285840" algn="l" defTabSz="457200">
+              <a:lnSpc>
+                <a:spcPct val="100000"/>
+              </a:lnSpc>
+              <a:spcBef>
+                <a:spcPts val="400"/>
+              </a:spcBef>
+              <a:buClr>
+                <a:srgbClr val="000000"/>
+              </a:buClr>
+              <a:buFont typeface="Arial"/>
+              <a:buChar char="–"/>
+              <a:tabLst>
+                <a:tab pos="0" algn="l"/>
+              </a:tabLst>
+            </a:pPr>
+            <a:r>
+              <a:rPr lang="en-US" sz="2000" b="0" u="none" strike="noStrike">
+                <a:solidFill>
+                  <a:schemeClr val="dk1"/>
+                </a:solidFill>
+                <a:effectLst/>
+                <a:uFillTx/>
+                <a:latin typeface="TradeGothic"/>
+                <a:ea typeface="ＭＳ Ｐゴシック"/>
+              </a:rPr>
+              <a:t>Second level</a:t>
+            </a:r>
+            <a:endParaRPr lang="en-US" sz="2000" b="0" u="none" strike="noStrike">
+              <a:solidFill>
+                <a:schemeClr val="dk1"/>
+              </a:solidFill>
+              <a:effectLst/>
+              <a:uFillTx/>
+              <a:latin typeface="TradeGothic"/>
+            </a:endParaRPr>
+          </a:p>
+          <a:p>
+            <a:pPr marL="1143000" lvl="2" indent="-228600" algn="l" defTabSz="457200">
+              <a:lnSpc>
+                <a:spcPct val="100000"/>
+              </a:lnSpc>
+              <a:spcBef>
+                <a:spcPts val="360"/>
+              </a:spcBef>
+              <a:buClr>
+                <a:srgbClr val="000000"/>
+              </a:buClr>
+              <a:buFont typeface="Arial"/>
+              <a:buChar char="•"/>
+              <a:tabLst>
+                <a:tab pos="0" algn="l"/>
+              </a:tabLst>
+            </a:pPr>
+            <a:r>
+              <a:rPr lang="en-US" sz="1800" b="0" u="none" strike="noStrike">
+                <a:solidFill>
+                  <a:schemeClr val="dk1"/>
+                </a:solidFill>
+                <a:effectLst/>
+                <a:uFillTx/>
+                <a:latin typeface="TradeGothic"/>
+                <a:ea typeface="ＭＳ Ｐゴシック"/>
+              </a:rPr>
+              <a:t>Third level</a:t>
+            </a:r>
+            <a:endParaRPr lang="en-US" sz="1800" b="0" u="none" strike="noStrike">
+              <a:solidFill>
+                <a:schemeClr val="dk1"/>
+              </a:solidFill>
+              <a:effectLst/>
+              <a:uFillTx/>
+              <a:latin typeface="TradeGothic"/>
+            </a:endParaRPr>
+          </a:p>
+          <a:p>
+            <a:pPr marL="1600200" lvl="3" indent="-228600" algn="l" defTabSz="457200">
+              <a:lnSpc>
+                <a:spcPct val="100000"/>
+              </a:lnSpc>
+              <a:spcBef>
+                <a:spcPts val="320"/>
+              </a:spcBef>
+              <a:buClr>
+                <a:srgbClr val="000000"/>
+              </a:buClr>
+              <a:buFont typeface="Arial"/>
+              <a:buChar char="–"/>
+              <a:tabLst>
+                <a:tab pos="0" algn="l"/>
+              </a:tabLst>
+            </a:pPr>
+            <a:r>
+              <a:rPr lang="en-US" sz="1600" b="0" u="none" strike="noStrike">
+                <a:solidFill>
+                  <a:schemeClr val="dk1"/>
+                </a:solidFill>
+                <a:effectLst/>
+                <a:uFillTx/>
+                <a:latin typeface="TradeGothic"/>
+                <a:ea typeface="ＭＳ Ｐゴシック"/>
+              </a:rPr>
+              <a:t>Fourth level</a:t>
+            </a:r>
+            <a:endParaRPr lang="en-US" sz="1600" b="0" u="none" strike="noStrike">
+              <a:solidFill>
+                <a:schemeClr val="dk1"/>
+              </a:solidFill>
+              <a:effectLst/>
+              <a:uFillTx/>
+              <a:latin typeface="TradeGothic"/>
+            </a:endParaRPr>
+          </a:p>
+          <a:p>
+            <a:pPr marL="2057400" lvl="4" indent="-228600" algn="l" defTabSz="457200">
+              <a:lnSpc>
+                <a:spcPct val="100000"/>
+              </a:lnSpc>
+              <a:spcBef>
+                <a:spcPts val="320"/>
+              </a:spcBef>
+              <a:buClr>
+                <a:srgbClr val="000000"/>
+              </a:buClr>
+              <a:buFont typeface="Arial"/>
+              <a:buChar char="»"/>
+              <a:tabLst>
+                <a:tab pos="0" algn="l"/>
+              </a:tabLst>
+            </a:pPr>
+            <a:r>
+              <a:rPr lang="en-US" sz="1600" b="0" u="none" strike="noStrike">
+                <a:solidFill>
+                  <a:schemeClr val="dk1"/>
+                </a:solidFill>
+                <a:effectLst/>
+                <a:uFillTx/>
+                <a:latin typeface="TradeGothic"/>
+                <a:ea typeface="ＭＳ Ｐゴシック"/>
+              </a:rPr>
+              <a:t>Fifth level</a:t>
+            </a:r>
+            <a:endParaRPr lang="en-US" sz="1600" b="0" u="none" strike="noStrike">
               <a:solidFill>
                 <a:schemeClr val="dk1"/>
               </a:solidFill>
@@ -5683,7 +6589,7 @@
       </p:sp>
       <p:sp>
         <p:nvSpPr>
-          <p:cNvPr id="26" name="PlaceHolder 4"/>
+          <p:cNvPr id="28" name="PlaceHolder 6"/>
           <p:cNvSpPr>
             <a:spLocks noGrp="1"/>
           </p:cNvSpPr>
@@ -5694,7 +6600,7 @@
         <p:spPr>
           <a:xfrm>
             <a:off x="609480" y="6356520"/>
-            <a:ext cx="2843640" cy="363960"/>
+            <a:ext cx="2843280" cy="363600"/>
           </a:xfrm>
           <a:prstGeom prst="rect">
             <a:avLst/>
@@ -5763,7 +6669,7 @@
       </p:sp>
       <p:sp>
         <p:nvSpPr>
-          <p:cNvPr id="27" name="PlaceHolder 5"/>
+          <p:cNvPr id="29" name="PlaceHolder 7"/>
           <p:cNvSpPr>
             <a:spLocks noGrp="1"/>
           </p:cNvSpPr>
@@ -5774,7 +6680,7 @@
         <p:spPr>
           <a:xfrm>
             <a:off x="4165560" y="6356520"/>
-            <a:ext cx="3859560" cy="363960"/>
+            <a:ext cx="3859200" cy="363600"/>
           </a:xfrm>
           <a:prstGeom prst="rect">
             <a:avLst/>
@@ -5845,7 +6751,7 @@
       </p:sp>
       <p:sp>
         <p:nvSpPr>
-          <p:cNvPr id="28" name="PlaceHolder 6"/>
+          <p:cNvPr id="30" name="PlaceHolder 8"/>
           <p:cNvSpPr>
             <a:spLocks noGrp="1"/>
           </p:cNvSpPr>
@@ -5856,7 +6762,7 @@
         <p:spPr>
           <a:xfrm>
             <a:off x="8737560" y="6356520"/>
-            <a:ext cx="2843640" cy="363960"/>
+            <a:ext cx="2843280" cy="363600"/>
           </a:xfrm>
           <a:prstGeom prst="rect">
             <a:avLst/>
@@ -5900,7 +6806,7 @@
                 <a:tab pos="0" algn="l"/>
               </a:tabLst>
             </a:pPr>
-            <a:fld id="{AD970F8C-C7EB-44CA-8811-202C5CE4ED09}" type="slidenum">
+            <a:fld id="{CB998159-735B-4A00-8E59-5D56CF91C406}" type="slidenum">
               <a:rPr lang="en-US" sz="1200" b="0" u="none" strike="noStrike">
                 <a:solidFill>
                   <a:srgbClr val="898989"/>
@@ -5929,8 +6835,8 @@
 </file>
 
 <file path=ppt/slideLayouts/slideLayout6.xml><?xml version="1.0" encoding="utf-8"?>
-<p:sldLayout xmlns:a="http://schemas.openxmlformats.org/drawingml/2006/main" xmlns:p="http://schemas.openxmlformats.org/presentationml/2006/main" xmlns:r="http://schemas.openxmlformats.org/officeDocument/2006/relationships" xmlns:p14="http://schemas.microsoft.com/office/powerpoint/2010/main" xmlns:p15="http://schemas.microsoft.com/office/powerpoint/2012/main" xmlns:mc="http://schemas.openxmlformats.org/markup-compatibility/2006" type="blank" preserve="1">
-  <p:cSld name="Picture with Caption">
+<p:sldLayout xmlns:a="http://schemas.openxmlformats.org/drawingml/2006/main" xmlns:p="http://schemas.openxmlformats.org/presentationml/2006/main" xmlns:r="http://schemas.openxmlformats.org/officeDocument/2006/relationships" xmlns:p14="http://schemas.microsoft.com/office/powerpoint/2010/main" xmlns:p15="http://schemas.microsoft.com/office/powerpoint/2012/main" xmlns:mc="http://schemas.openxmlformats.org/markup-compatibility/2006" type="titleOnly" preserve="1">
+  <p:cSld name="Title Only">
     <p:bg>
       <p:bgPr>
         <a:solidFill>
@@ -5954,7 +6860,7 @@
       </p:grpSpPr>
       <p:sp>
         <p:nvSpPr>
-          <p:cNvPr id="29" name="PlaceHolder 1"/>
+          <p:cNvPr id="31" name="PlaceHolder 1"/>
           <p:cNvSpPr>
             <a:spLocks noGrp="1"/>
           </p:cNvSpPr>
@@ -5964,8 +6870,8 @@
         </p:nvSpPr>
         <p:spPr>
           <a:xfrm>
-            <a:off x="2389680" y="4800600"/>
-            <a:ext cx="7314120" cy="565560"/>
+            <a:off x="609480" y="-47520"/>
+            <a:ext cx="10971360" cy="1141560"/>
           </a:xfrm>
           <a:prstGeom prst="rect">
             <a:avLst/>
@@ -5976,19 +6882,19 @@
           </a:ln>
         </p:spPr>
         <p:txBody>
-          <a:bodyPr numCol="1" spcCol="0" lIns="91440" tIns="45720" rIns="91440" bIns="45720" anchor="b">
+          <a:bodyPr numCol="1" spcCol="0" lIns="91440" tIns="45720" rIns="91440" bIns="45720" anchor="ctr">
             <a:noAutofit/>
           </a:bodyPr>
           <a:lstStyle>
-            <a:lvl1pPr indent="0" algn="l" defTabSz="457200">
-              <a:lnSpc>
-                <a:spcPct val="100000"/>
-              </a:lnSpc>
-              <a:buNone/>
-              <a:tabLst>
-                <a:tab pos="0" algn="l"/>
-              </a:tabLst>
-              <a:defRPr lang="en-US" sz="2000" b="1" u="none" strike="noStrike">
+            <a:lvl1pPr indent="0" algn="ctr" defTabSz="457200">
+              <a:lnSpc>
+                <a:spcPct val="100000"/>
+              </a:lnSpc>
+              <a:buNone/>
+              <a:tabLst>
+                <a:tab pos="0" algn="l"/>
+              </a:tabLst>
+              <a:defRPr lang="en-US" sz="4400" b="0" u="none" strike="noStrike">
                 <a:solidFill>
                   <a:schemeClr val="dk1"/>
                 </a:solidFill>
@@ -6000,17 +6906,17 @@
             </a:lvl1pPr>
           </a:lstStyle>
           <a:p>
-            <a:pPr indent="0" algn="l" defTabSz="457200">
-              <a:lnSpc>
-                <a:spcPct val="100000"/>
-              </a:lnSpc>
-              <a:buNone/>
-              <a:tabLst>
-                <a:tab pos="0" algn="l"/>
-              </a:tabLst>
-            </a:pPr>
-            <a:r>
-              <a:rPr lang="en-US" sz="2000" b="1" u="none" strike="noStrike">
+            <a:pPr indent="0" algn="ctr" defTabSz="457200">
+              <a:lnSpc>
+                <a:spcPct val="100000"/>
+              </a:lnSpc>
+              <a:buNone/>
+              <a:tabLst>
+                <a:tab pos="0" algn="l"/>
+              </a:tabLst>
+            </a:pPr>
+            <a:r>
+              <a:rPr lang="en-US" sz="4400" b="0" u="none" strike="noStrike">
                 <a:solidFill>
                   <a:schemeClr val="dk1"/>
                 </a:solidFill>
@@ -6021,7 +6927,7 @@
               </a:rPr>
               <a:t>Click to edit Master title style</a:t>
             </a:r>
-            <a:endParaRPr lang="en-US" sz="2000" b="1" u="none" strike="noStrike">
+            <a:endParaRPr lang="en-US" sz="4400" b="0" u="none" strike="noStrike">
               <a:solidFill>
                 <a:schemeClr val="dk1"/>
               </a:solidFill>
@@ -6034,563 +6940,7 @@
       </p:sp>
       <p:sp>
         <p:nvSpPr>
-          <p:cNvPr id="30" name="PlaceHolder 2"/>
-          <p:cNvSpPr>
-            <a:spLocks noGrp="1"/>
-          </p:cNvSpPr>
-          <p:nvPr>
-            <p:ph type="body"/>
-          </p:nvPr>
-        </p:nvSpPr>
-        <p:spPr>
-          <a:xfrm>
-            <a:off x="2389680" y="612720"/>
-            <a:ext cx="7314120" cy="4113720"/>
-          </a:xfrm>
-          <a:prstGeom prst="rect">
-            <a:avLst/>
-          </a:prstGeom>
-          <a:noFill/>
-          <a:ln w="0">
-            <a:noFill/>
-          </a:ln>
-        </p:spPr>
-        <p:txBody>
-          <a:bodyPr lIns="90000" tIns="45000" rIns="90000" bIns="45000" anchor="t">
-            <a:normAutofit/>
-          </a:bodyPr>
-          <a:lstStyle>
-            <a:lvl1pPr algn="l" defTabSz="457200">
-              <a:lnSpc>
-                <a:spcPct val="100000"/>
-              </a:lnSpc>
-              <a:spcBef>
-                <a:spcPts val="281"/>
-              </a:spcBef>
-              <a:buClr>
-                <a:srgbClr val="000000"/>
-              </a:buClr>
-              <a:buFont typeface="Arial"/>
-              <a:buChar char="•"/>
-              <a:tabLst>
-                <a:tab pos="0" algn="l"/>
-              </a:tabLst>
-              <a:defRPr lang="en-US" sz="3200" b="0" u="none" strike="noStrike">
-                <a:solidFill>
-                  <a:schemeClr val="dk1"/>
-                </a:solidFill>
-                <a:effectLst/>
-                <a:uFillTx/>
-                <a:latin typeface="TradeGothic"/>
-              </a:defRPr>
-            </a:lvl1pPr>
-            <a:lvl2pPr lvl="1" algn="l" defTabSz="457200">
-              <a:lnSpc>
-                <a:spcPct val="100000"/>
-              </a:lnSpc>
-              <a:spcBef>
-                <a:spcPts val="561"/>
-              </a:spcBef>
-              <a:buClr>
-                <a:srgbClr val="000000"/>
-              </a:buClr>
-              <a:buSzPct val="75000"/>
-              <a:buFont typeface="Symbol" charset="2"/>
-              <a:buChar char=""/>
-              <a:tabLst>
-                <a:tab pos="0" algn="l"/>
-              </a:tabLst>
-              <a:defRPr lang="en-US" sz="3200" b="0" u="none" strike="noStrike">
-                <a:solidFill>
-                  <a:schemeClr val="dk1"/>
-                </a:solidFill>
-                <a:effectLst/>
-                <a:uFillTx/>
-                <a:latin typeface="TradeGothic"/>
-              </a:defRPr>
-            </a:lvl2pPr>
-            <a:lvl3pPr lvl="2" algn="l" defTabSz="457200">
-              <a:lnSpc>
-                <a:spcPct val="100000"/>
-              </a:lnSpc>
-              <a:spcBef>
-                <a:spcPts val="479"/>
-              </a:spcBef>
-              <a:buClr>
-                <a:srgbClr val="000000"/>
-              </a:buClr>
-              <a:buSzPct val="45000"/>
-              <a:buFont typeface="Wingdings" charset="2"/>
-              <a:buChar char=""/>
-              <a:tabLst>
-                <a:tab pos="0" algn="l"/>
-              </a:tabLst>
-              <a:defRPr lang="en-US" sz="3200" b="0" u="none" strike="noStrike">
-                <a:solidFill>
-                  <a:schemeClr val="dk1"/>
-                </a:solidFill>
-                <a:effectLst/>
-                <a:uFillTx/>
-                <a:latin typeface="TradeGothic"/>
-              </a:defRPr>
-            </a:lvl3pPr>
-            <a:lvl4pPr lvl="3" algn="l" defTabSz="457200">
-              <a:lnSpc>
-                <a:spcPct val="100000"/>
-              </a:lnSpc>
-              <a:spcBef>
-                <a:spcPts val="400"/>
-              </a:spcBef>
-              <a:buClr>
-                <a:srgbClr val="000000"/>
-              </a:buClr>
-              <a:buSzPct val="75000"/>
-              <a:buFont typeface="Symbol" charset="2"/>
-              <a:buChar char=""/>
-              <a:tabLst>
-                <a:tab pos="0" algn="l"/>
-              </a:tabLst>
-              <a:defRPr lang="en-US" sz="3200" b="0" u="none" strike="noStrike">
-                <a:solidFill>
-                  <a:schemeClr val="dk1"/>
-                </a:solidFill>
-                <a:effectLst/>
-                <a:uFillTx/>
-                <a:latin typeface="TradeGothic"/>
-              </a:defRPr>
-            </a:lvl4pPr>
-            <a:lvl5pPr lvl="4" algn="l" defTabSz="457200">
-              <a:lnSpc>
-                <a:spcPct val="100000"/>
-              </a:lnSpc>
-              <a:spcBef>
-                <a:spcPts val="400"/>
-              </a:spcBef>
-              <a:buClr>
-                <a:srgbClr val="000000"/>
-              </a:buClr>
-              <a:buSzPct val="45000"/>
-              <a:buFont typeface="Wingdings" charset="2"/>
-              <a:buChar char=""/>
-              <a:tabLst>
-                <a:tab pos="0" algn="l"/>
-              </a:tabLst>
-              <a:defRPr lang="en-US" sz="3200" b="0" u="none" strike="noStrike">
-                <a:solidFill>
-                  <a:schemeClr val="dk1"/>
-                </a:solidFill>
-                <a:effectLst/>
-                <a:uFillTx/>
-                <a:latin typeface="TradeGothic"/>
-              </a:defRPr>
-            </a:lvl5pPr>
-            <a:lvl6pPr lvl="5" algn="l" defTabSz="457200">
-              <a:lnSpc>
-                <a:spcPct val="100000"/>
-              </a:lnSpc>
-              <a:spcBef>
-                <a:spcPts val="283"/>
-              </a:spcBef>
-              <a:buClr>
-                <a:srgbClr val="000000"/>
-              </a:buClr>
-              <a:buSzPct val="45000"/>
-              <a:buFont typeface="Wingdings" charset="2"/>
-              <a:buChar char=""/>
-              <a:tabLst>
-                <a:tab pos="0" algn="l"/>
-              </a:tabLst>
-              <a:defRPr lang="en-US" sz="3200" b="0" u="none" strike="noStrike">
-                <a:solidFill>
-                  <a:schemeClr val="dk1"/>
-                </a:solidFill>
-                <a:effectLst/>
-                <a:uFillTx/>
-                <a:latin typeface="TradeGothic"/>
-              </a:defRPr>
-            </a:lvl6pPr>
-            <a:lvl7pPr lvl="6" algn="l" defTabSz="457200">
-              <a:lnSpc>
-                <a:spcPct val="100000"/>
-              </a:lnSpc>
-              <a:spcBef>
-                <a:spcPts val="283"/>
-              </a:spcBef>
-              <a:buClr>
-                <a:srgbClr val="000000"/>
-              </a:buClr>
-              <a:buSzPct val="45000"/>
-              <a:buFont typeface="Wingdings" charset="2"/>
-              <a:buChar char=""/>
-              <a:tabLst>
-                <a:tab pos="0" algn="l"/>
-              </a:tabLst>
-              <a:defRPr lang="en-US" sz="3200" b="0" u="none" strike="noStrike">
-                <a:solidFill>
-                  <a:schemeClr val="dk1"/>
-                </a:solidFill>
-                <a:effectLst/>
-                <a:uFillTx/>
-                <a:latin typeface="TradeGothic"/>
-              </a:defRPr>
-            </a:lvl7pPr>
-          </a:lstStyle>
-          <a:p>
-            <a:pPr marL="432000" indent="-324000" algn="l" defTabSz="457200">
-              <a:lnSpc>
-                <a:spcPct val="100000"/>
-              </a:lnSpc>
-              <a:spcBef>
-                <a:spcPts val="281"/>
-              </a:spcBef>
-              <a:buClr>
-                <a:srgbClr val="000000"/>
-              </a:buClr>
-              <a:buFont typeface="Arial"/>
-              <a:buChar char="•"/>
-              <a:tabLst>
-                <a:tab pos="0" algn="l"/>
-              </a:tabLst>
-            </a:pPr>
-            <a:r>
-              <a:rPr lang="en-US" sz="3200" b="0" u="none" strike="noStrike">
-                <a:solidFill>
-                  <a:schemeClr val="dk1"/>
-                </a:solidFill>
-                <a:effectLst/>
-                <a:uFillTx/>
-                <a:latin typeface="TradeGothic"/>
-              </a:rPr>
-              <a:t>Click to edit the outline text format</a:t>
-            </a:r>
-            <a:endParaRPr lang="en-US" sz="3200" b="0" u="none" strike="noStrike">
-              <a:solidFill>
-                <a:schemeClr val="dk1"/>
-              </a:solidFill>
-              <a:effectLst/>
-              <a:uFillTx/>
-              <a:latin typeface="TradeGothic"/>
-            </a:endParaRPr>
-          </a:p>
-          <a:p>
-            <a:pPr marL="457200" lvl="1" indent="-324000" algn="l" defTabSz="457200">
-              <a:lnSpc>
-                <a:spcPct val="100000"/>
-              </a:lnSpc>
-              <a:spcBef>
-                <a:spcPts val="561"/>
-              </a:spcBef>
-              <a:buClr>
-                <a:srgbClr val="000000"/>
-              </a:buClr>
-              <a:buSzPct val="75000"/>
-              <a:buFont typeface="Symbol" charset="2"/>
-              <a:buChar char=""/>
-              <a:tabLst>
-                <a:tab pos="0" algn="l"/>
-              </a:tabLst>
-            </a:pPr>
-            <a:r>
-              <a:rPr lang="en-US" sz="3200" b="0" u="none" strike="noStrike">
-                <a:solidFill>
-                  <a:schemeClr val="dk1"/>
-                </a:solidFill>
-                <a:effectLst/>
-                <a:uFillTx/>
-                <a:latin typeface="TradeGothic"/>
-              </a:rPr>
-              <a:t>Second Outline Level</a:t>
-            </a:r>
-            <a:endParaRPr lang="en-US" sz="3200" b="0" u="none" strike="noStrike">
-              <a:solidFill>
-                <a:schemeClr val="dk1"/>
-              </a:solidFill>
-              <a:effectLst/>
-              <a:uFillTx/>
-              <a:latin typeface="TradeGothic"/>
-            </a:endParaRPr>
-          </a:p>
-          <a:p>
-            <a:pPr marL="914400" lvl="2" indent="-288000" algn="l" defTabSz="457200">
-              <a:lnSpc>
-                <a:spcPct val="100000"/>
-              </a:lnSpc>
-              <a:spcBef>
-                <a:spcPts val="479"/>
-              </a:spcBef>
-              <a:buClr>
-                <a:srgbClr val="000000"/>
-              </a:buClr>
-              <a:buSzPct val="45000"/>
-              <a:buFont typeface="Wingdings" charset="2"/>
-              <a:buChar char=""/>
-              <a:tabLst>
-                <a:tab pos="0" algn="l"/>
-              </a:tabLst>
-            </a:pPr>
-            <a:r>
-              <a:rPr lang="en-US" sz="3200" b="0" u="none" strike="noStrike">
-                <a:solidFill>
-                  <a:schemeClr val="dk1"/>
-                </a:solidFill>
-                <a:effectLst/>
-                <a:uFillTx/>
-                <a:latin typeface="TradeGothic"/>
-              </a:rPr>
-              <a:t>Third Outline Level</a:t>
-            </a:r>
-            <a:endParaRPr lang="en-US" sz="3200" b="0" u="none" strike="noStrike">
-              <a:solidFill>
-                <a:schemeClr val="dk1"/>
-              </a:solidFill>
-              <a:effectLst/>
-              <a:uFillTx/>
-              <a:latin typeface="TradeGothic"/>
-            </a:endParaRPr>
-          </a:p>
-          <a:p>
-            <a:pPr marL="1371600" lvl="3" indent="-216000" algn="l" defTabSz="457200">
-              <a:lnSpc>
-                <a:spcPct val="100000"/>
-              </a:lnSpc>
-              <a:spcBef>
-                <a:spcPts val="400"/>
-              </a:spcBef>
-              <a:buClr>
-                <a:srgbClr val="000000"/>
-              </a:buClr>
-              <a:buSzPct val="75000"/>
-              <a:buFont typeface="Symbol" charset="2"/>
-              <a:buChar char=""/>
-              <a:tabLst>
-                <a:tab pos="0" algn="l"/>
-              </a:tabLst>
-            </a:pPr>
-            <a:r>
-              <a:rPr lang="en-US" sz="3200" b="0" u="none" strike="noStrike">
-                <a:solidFill>
-                  <a:schemeClr val="dk1"/>
-                </a:solidFill>
-                <a:effectLst/>
-                <a:uFillTx/>
-                <a:latin typeface="TradeGothic"/>
-              </a:rPr>
-              <a:t>Fourth Outline Level</a:t>
-            </a:r>
-            <a:endParaRPr lang="en-US" sz="3200" b="0" u="none" strike="noStrike">
-              <a:solidFill>
-                <a:schemeClr val="dk1"/>
-              </a:solidFill>
-              <a:effectLst/>
-              <a:uFillTx/>
-              <a:latin typeface="TradeGothic"/>
-            </a:endParaRPr>
-          </a:p>
-          <a:p>
-            <a:pPr marL="1828800" lvl="4" indent="-216000" algn="l" defTabSz="457200">
-              <a:lnSpc>
-                <a:spcPct val="100000"/>
-              </a:lnSpc>
-              <a:spcBef>
-                <a:spcPts val="400"/>
-              </a:spcBef>
-              <a:buClr>
-                <a:srgbClr val="000000"/>
-              </a:buClr>
-              <a:buSzPct val="45000"/>
-              <a:buFont typeface="Wingdings" charset="2"/>
-              <a:buChar char=""/>
-              <a:tabLst>
-                <a:tab pos="0" algn="l"/>
-              </a:tabLst>
-            </a:pPr>
-            <a:r>
-              <a:rPr lang="en-US" sz="3200" b="0" u="none" strike="noStrike">
-                <a:solidFill>
-                  <a:schemeClr val="dk1"/>
-                </a:solidFill>
-                <a:effectLst/>
-                <a:uFillTx/>
-                <a:latin typeface="TradeGothic"/>
-              </a:rPr>
-              <a:t>Fifth Outline Level</a:t>
-            </a:r>
-            <a:endParaRPr lang="en-US" sz="3200" b="0" u="none" strike="noStrike">
-              <a:solidFill>
-                <a:schemeClr val="dk1"/>
-              </a:solidFill>
-              <a:effectLst/>
-              <a:uFillTx/>
-              <a:latin typeface="TradeGothic"/>
-            </a:endParaRPr>
-          </a:p>
-          <a:p>
-            <a:pPr marL="2286000" lvl="5" indent="-216000" algn="l" defTabSz="457200">
-              <a:lnSpc>
-                <a:spcPct val="100000"/>
-              </a:lnSpc>
-              <a:spcBef>
-                <a:spcPts val="283"/>
-              </a:spcBef>
-              <a:buClr>
-                <a:srgbClr val="000000"/>
-              </a:buClr>
-              <a:buSzPct val="45000"/>
-              <a:buFont typeface="Wingdings" charset="2"/>
-              <a:buChar char=""/>
-              <a:tabLst>
-                <a:tab pos="0" algn="l"/>
-              </a:tabLst>
-            </a:pPr>
-            <a:r>
-              <a:rPr lang="en-US" sz="3200" b="0" u="none" strike="noStrike">
-                <a:solidFill>
-                  <a:schemeClr val="dk1"/>
-                </a:solidFill>
-                <a:effectLst/>
-                <a:uFillTx/>
-                <a:latin typeface="TradeGothic"/>
-              </a:rPr>
-              <a:t>Sixth Outline Level</a:t>
-            </a:r>
-            <a:endParaRPr lang="en-US" sz="3200" b="0" u="none" strike="noStrike">
-              <a:solidFill>
-                <a:schemeClr val="dk1"/>
-              </a:solidFill>
-              <a:effectLst/>
-              <a:uFillTx/>
-              <a:latin typeface="TradeGothic"/>
-            </a:endParaRPr>
-          </a:p>
-          <a:p>
-            <a:pPr marL="2743200" lvl="6" indent="-216000" algn="l" defTabSz="457200">
-              <a:lnSpc>
-                <a:spcPct val="100000"/>
-              </a:lnSpc>
-              <a:spcBef>
-                <a:spcPts val="283"/>
-              </a:spcBef>
-              <a:buClr>
-                <a:srgbClr val="000000"/>
-              </a:buClr>
-              <a:buSzPct val="45000"/>
-              <a:buFont typeface="Wingdings" charset="2"/>
-              <a:buChar char=""/>
-              <a:tabLst>
-                <a:tab pos="0" algn="l"/>
-              </a:tabLst>
-            </a:pPr>
-            <a:r>
-              <a:rPr lang="en-US" sz="3200" b="0" u="none" strike="noStrike">
-                <a:solidFill>
-                  <a:schemeClr val="dk1"/>
-                </a:solidFill>
-                <a:effectLst/>
-                <a:uFillTx/>
-                <a:latin typeface="TradeGothic"/>
-              </a:rPr>
-              <a:t>Seventh Outline Level</a:t>
-            </a:r>
-            <a:endParaRPr lang="en-US" sz="3200" b="0" u="none" strike="noStrike">
-              <a:solidFill>
-                <a:schemeClr val="dk1"/>
-              </a:solidFill>
-              <a:effectLst/>
-              <a:uFillTx/>
-              <a:latin typeface="TradeGothic"/>
-            </a:endParaRPr>
-          </a:p>
-        </p:txBody>
-      </p:sp>
-      <p:sp>
-        <p:nvSpPr>
-          <p:cNvPr id="31" name="PlaceHolder 3"/>
-          <p:cNvSpPr>
-            <a:spLocks noGrp="1"/>
-          </p:cNvSpPr>
-          <p:nvPr>
-            <p:ph type="body"/>
-          </p:nvPr>
-        </p:nvSpPr>
-        <p:spPr>
-          <a:xfrm>
-            <a:off x="2389680" y="5367240"/>
-            <a:ext cx="7314120" cy="803880"/>
-          </a:xfrm>
-          <a:prstGeom prst="rect">
-            <a:avLst/>
-          </a:prstGeom>
-          <a:noFill/>
-          <a:ln w="9360">
-            <a:noFill/>
-          </a:ln>
-        </p:spPr>
-        <p:txBody>
-          <a:bodyPr numCol="1" spcCol="0" lIns="91440" tIns="45720" rIns="91440" bIns="45720" anchor="t">
-            <a:noAutofit/>
-          </a:bodyPr>
-          <a:lstStyle>
-            <a:lvl1pPr indent="0" algn="l" defTabSz="457200">
-              <a:lnSpc>
-                <a:spcPct val="100000"/>
-              </a:lnSpc>
-              <a:spcBef>
-                <a:spcPts val="281"/>
-              </a:spcBef>
-              <a:buNone/>
-              <a:tabLst>
-                <a:tab pos="0" algn="l"/>
-              </a:tabLst>
-              <a:defRPr lang="en-US" sz="1400" b="0" u="none" strike="noStrike">
-                <a:solidFill>
-                  <a:schemeClr val="dk1"/>
-                </a:solidFill>
-                <a:effectLst/>
-                <a:uFillTx/>
-                <a:latin typeface="TradeGothic"/>
-                <a:ea typeface="ＭＳ Ｐゴシック"/>
-              </a:defRPr>
-            </a:lvl1pPr>
-          </a:lstStyle>
-          <a:p>
-            <a:pPr indent="0" algn="l" defTabSz="457200">
-              <a:lnSpc>
-                <a:spcPct val="100000"/>
-              </a:lnSpc>
-              <a:spcBef>
-                <a:spcPts val="281"/>
-              </a:spcBef>
-              <a:buNone/>
-              <a:tabLst>
-                <a:tab pos="0" algn="l"/>
-              </a:tabLst>
-            </a:pPr>
-            <a:r>
-              <a:rPr lang="en-US" sz="1400" b="0" u="none" strike="noStrike">
-                <a:solidFill>
-                  <a:schemeClr val="dk1"/>
-                </a:solidFill>
-                <a:effectLst/>
-                <a:uFillTx/>
-                <a:latin typeface="TradeGothic"/>
-                <a:ea typeface="ＭＳ Ｐゴシック"/>
-              </a:rPr>
-              <a:t>Click to edit Master text styles</a:t>
-            </a:r>
-            <a:endParaRPr lang="en-US" sz="1400" b="0" u="none" strike="noStrike">
-              <a:solidFill>
-                <a:schemeClr val="dk1"/>
-              </a:solidFill>
-              <a:effectLst/>
-              <a:uFillTx/>
-              <a:latin typeface="TradeGothic"/>
-            </a:endParaRPr>
-          </a:p>
-        </p:txBody>
-      </p:sp>
-      <p:sp>
-        <p:nvSpPr>
-          <p:cNvPr id="32" name="PlaceHolder 4"/>
+          <p:cNvPr id="32" name="PlaceHolder 2"/>
           <p:cNvSpPr>
             <a:spLocks noGrp="1"/>
           </p:cNvSpPr>
@@ -6601,7 +6951,7 @@
         <p:spPr>
           <a:xfrm>
             <a:off x="609480" y="6356520"/>
-            <a:ext cx="2843640" cy="363960"/>
+            <a:ext cx="2843280" cy="363600"/>
           </a:xfrm>
           <a:prstGeom prst="rect">
             <a:avLst/>
@@ -6670,7 +7020,7 @@
       </p:sp>
       <p:sp>
         <p:nvSpPr>
-          <p:cNvPr id="33" name="PlaceHolder 5"/>
+          <p:cNvPr id="33" name="PlaceHolder 3"/>
           <p:cNvSpPr>
             <a:spLocks noGrp="1"/>
           </p:cNvSpPr>
@@ -6681,7 +7031,7 @@
         <p:spPr>
           <a:xfrm>
             <a:off x="4165560" y="6356520"/>
-            <a:ext cx="3859560" cy="363960"/>
+            <a:ext cx="3859200" cy="363600"/>
           </a:xfrm>
           <a:prstGeom prst="rect">
             <a:avLst/>
@@ -6752,7 +7102,7 @@
       </p:sp>
       <p:sp>
         <p:nvSpPr>
-          <p:cNvPr id="34" name="PlaceHolder 6"/>
+          <p:cNvPr id="34" name="PlaceHolder 4"/>
           <p:cNvSpPr>
             <a:spLocks noGrp="1"/>
           </p:cNvSpPr>
@@ -6763,7 +7113,7 @@
         <p:spPr>
           <a:xfrm>
             <a:off x="8737560" y="6356520"/>
-            <a:ext cx="2843640" cy="363960"/>
+            <a:ext cx="2843280" cy="363600"/>
           </a:xfrm>
           <a:prstGeom prst="rect">
             <a:avLst/>
@@ -6807,7 +7157,7 @@
                 <a:tab pos="0" algn="l"/>
               </a:tabLst>
             </a:pPr>
-            <a:fld id="{4EC3C901-FC2E-4EF5-9DBC-3104093DBEEE}" type="slidenum">
+            <a:fld id="{23CBD088-06AA-424B-A25A-4BB810200D66}" type="slidenum">
               <a:rPr lang="en-US" sz="1200" b="0" u="none" strike="noStrike">
                 <a:solidFill>
                   <a:srgbClr val="898989"/>
@@ -6836,8 +7186,8 @@
 </file>
 
 <file path=ppt/slideLayouts/slideLayout7.xml><?xml version="1.0" encoding="utf-8"?>
-<p:sldLayout xmlns:a="http://schemas.openxmlformats.org/drawingml/2006/main" xmlns:p="http://schemas.openxmlformats.org/presentationml/2006/main" xmlns:r="http://schemas.openxmlformats.org/officeDocument/2006/relationships" xmlns:p14="http://schemas.microsoft.com/office/powerpoint/2010/main" xmlns:p15="http://schemas.microsoft.com/office/powerpoint/2012/main" xmlns:mc="http://schemas.openxmlformats.org/markup-compatibility/2006" type="title" preserve="1">
-  <p:cSld name="Title Slide">
+<p:sldLayout xmlns:a="http://schemas.openxmlformats.org/drawingml/2006/main" xmlns:p="http://schemas.openxmlformats.org/presentationml/2006/main" xmlns:r="http://schemas.openxmlformats.org/officeDocument/2006/relationships" xmlns:p14="http://schemas.microsoft.com/office/powerpoint/2010/main" xmlns:p15="http://schemas.microsoft.com/office/powerpoint/2012/main" xmlns:mc="http://schemas.openxmlformats.org/markup-compatibility/2006" type="blank" preserve="1">
+  <p:cSld name="Blank">
     <p:bg>
       <p:bgPr>
         <a:solidFill>
@@ -6866,93 +7216,13 @@
             <a:spLocks noGrp="1"/>
           </p:cNvSpPr>
           <p:nvPr>
-            <p:ph type="title"/>
-          </p:nvPr>
-        </p:nvSpPr>
-        <p:spPr>
-          <a:xfrm>
-            <a:off x="914400" y="2130480"/>
-            <a:ext cx="10362240" cy="1468800"/>
-          </a:xfrm>
-          <a:prstGeom prst="rect">
-            <a:avLst/>
-          </a:prstGeom>
-          <a:noFill/>
-          <a:ln w="9360">
-            <a:noFill/>
-          </a:ln>
-        </p:spPr>
-        <p:txBody>
-          <a:bodyPr numCol="1" spcCol="0" lIns="91440" tIns="45720" rIns="91440" bIns="45720" anchor="ctr">
-            <a:noAutofit/>
-          </a:bodyPr>
-          <a:lstStyle>
-            <a:lvl1pPr indent="0" algn="ctr" defTabSz="457200">
-              <a:lnSpc>
-                <a:spcPct val="100000"/>
-              </a:lnSpc>
-              <a:buNone/>
-              <a:tabLst>
-                <a:tab pos="0" algn="l"/>
-              </a:tabLst>
-              <a:defRPr lang="en-US" sz="4400" b="0" u="none" strike="noStrike">
-                <a:solidFill>
-                  <a:schemeClr val="dk1"/>
-                </a:solidFill>
-                <a:effectLst/>
-                <a:uFillTx/>
-                <a:latin typeface="TradeGothic"/>
-                <a:ea typeface="ＭＳ Ｐゴシック"/>
-              </a:defRPr>
-            </a:lvl1pPr>
-          </a:lstStyle>
-          <a:p>
-            <a:pPr indent="0" algn="ctr" defTabSz="457200">
-              <a:lnSpc>
-                <a:spcPct val="100000"/>
-              </a:lnSpc>
-              <a:buNone/>
-              <a:tabLst>
-                <a:tab pos="0" algn="l"/>
-              </a:tabLst>
-            </a:pPr>
-            <a:r>
-              <a:rPr lang="en-US" sz="4400" b="0" u="none" strike="noStrike">
-                <a:solidFill>
-                  <a:schemeClr val="dk1"/>
-                </a:solidFill>
-                <a:effectLst/>
-                <a:uFillTx/>
-                <a:latin typeface="TradeGothic"/>
-                <a:ea typeface="ＭＳ Ｐゴシック"/>
-              </a:rPr>
-              <a:t>Click to edit Master title style</a:t>
-            </a:r>
-            <a:endParaRPr lang="en-US" sz="4400" b="0" u="none" strike="noStrike">
-              <a:solidFill>
-                <a:schemeClr val="dk1"/>
-              </a:solidFill>
-              <a:effectLst/>
-              <a:uFillTx/>
-              <a:latin typeface="TradeGothic"/>
-            </a:endParaRPr>
-          </a:p>
-        </p:txBody>
-      </p:sp>
-      <p:sp>
-        <p:nvSpPr>
-          <p:cNvPr id="36" name="PlaceHolder 2"/>
-          <p:cNvSpPr>
-            <a:spLocks noGrp="1"/>
-          </p:cNvSpPr>
-          <p:nvPr>
             <p:ph type="dt" idx="19"/>
           </p:nvPr>
         </p:nvSpPr>
         <p:spPr>
           <a:xfrm>
             <a:off x="609480" y="6356520"/>
-            <a:ext cx="2843640" cy="363960"/>
+            <a:ext cx="2843280" cy="363600"/>
           </a:xfrm>
           <a:prstGeom prst="rect">
             <a:avLst/>
@@ -7021,7 +7291,7 @@
       </p:sp>
       <p:sp>
         <p:nvSpPr>
-          <p:cNvPr id="37" name="PlaceHolder 3"/>
+          <p:cNvPr id="36" name="PlaceHolder 2"/>
           <p:cNvSpPr>
             <a:spLocks noGrp="1"/>
           </p:cNvSpPr>
@@ -7032,7 +7302,7 @@
         <p:spPr>
           <a:xfrm>
             <a:off x="4165560" y="6356520"/>
-            <a:ext cx="3859560" cy="363960"/>
+            <a:ext cx="3859200" cy="363600"/>
           </a:xfrm>
           <a:prstGeom prst="rect">
             <a:avLst/>
@@ -7103,7 +7373,7 @@
       </p:sp>
       <p:sp>
         <p:nvSpPr>
-          <p:cNvPr id="38" name="PlaceHolder 4"/>
+          <p:cNvPr id="37" name="PlaceHolder 3"/>
           <p:cNvSpPr>
             <a:spLocks noGrp="1"/>
           </p:cNvSpPr>
@@ -7114,7 +7384,7 @@
         <p:spPr>
           <a:xfrm>
             <a:off x="8737560" y="6356520"/>
-            <a:ext cx="2843640" cy="363960"/>
+            <a:ext cx="2843280" cy="363600"/>
           </a:xfrm>
           <a:prstGeom prst="rect">
             <a:avLst/>
@@ -7158,7 +7428,7 @@
                 <a:tab pos="0" algn="l"/>
               </a:tabLst>
             </a:pPr>
-            <a:fld id="{1D730DC8-EA17-4B4B-BF8C-FB3B50EFAE5F}" type="slidenum">
+            <a:fld id="{9E4A77E8-8F05-4C03-B596-CDCEE278992A}" type="slidenum">
               <a:rPr lang="en-US" sz="1200" b="0" u="none" strike="noStrike">
                 <a:solidFill>
                   <a:srgbClr val="898989"/>
@@ -7177,434 +7447,6 @@
               <a:effectLst/>
               <a:uFillTx/>
               <a:latin typeface="Times New Roman"/>
-            </a:endParaRPr>
-          </a:p>
-        </p:txBody>
-      </p:sp>
-      <p:sp>
-        <p:nvSpPr>
-          <p:cNvPr id="39" name="PlaceHolder 5"/>
-          <p:cNvSpPr>
-            <a:spLocks noGrp="1"/>
-          </p:cNvSpPr>
-          <p:nvPr>
-            <p:ph type="body"/>
-          </p:nvPr>
-        </p:nvSpPr>
-        <p:spPr>
-          <a:xfrm>
-            <a:off x="609480" y="1604520"/>
-            <a:ext cx="10971720" cy="3976560"/>
-          </a:xfrm>
-          <a:prstGeom prst="rect">
-            <a:avLst/>
-          </a:prstGeom>
-          <a:noFill/>
-          <a:ln w="0">
-            <a:noFill/>
-          </a:ln>
-        </p:spPr>
-        <p:txBody>
-          <a:bodyPr lIns="0" tIns="0" rIns="0" bIns="0" anchor="t">
-            <a:normAutofit/>
-          </a:bodyPr>
-          <a:lstStyle>
-            <a:lvl1pPr algn="l" defTabSz="457200">
-              <a:lnSpc>
-                <a:spcPct val="100000"/>
-              </a:lnSpc>
-              <a:spcBef>
-                <a:spcPts val="641"/>
-              </a:spcBef>
-              <a:buClr>
-                <a:srgbClr val="000000"/>
-              </a:buClr>
-              <a:buFont typeface="Arial"/>
-              <a:buChar char="•"/>
-              <a:defRPr lang="en-US" sz="3200" b="0" u="none" strike="noStrike">
-                <a:solidFill>
-                  <a:schemeClr val="dk1"/>
-                </a:solidFill>
-                <a:effectLst/>
-                <a:uFillTx/>
-                <a:latin typeface="TradeGothic"/>
-              </a:defRPr>
-            </a:lvl1pPr>
-            <a:lvl2pPr lvl="1" algn="l" defTabSz="457200">
-              <a:lnSpc>
-                <a:spcPct val="100000"/>
-              </a:lnSpc>
-              <a:spcBef>
-                <a:spcPts val="561"/>
-              </a:spcBef>
-              <a:buClr>
-                <a:srgbClr val="000000"/>
-              </a:buClr>
-              <a:buSzPct val="75000"/>
-              <a:buFont typeface="Symbol" charset="2"/>
-              <a:buChar char=""/>
-              <a:defRPr lang="en-US" sz="2800" b="0" u="none" strike="noStrike">
-                <a:solidFill>
-                  <a:schemeClr val="dk1"/>
-                </a:solidFill>
-                <a:effectLst/>
-                <a:uFillTx/>
-                <a:latin typeface="TradeGothic"/>
-              </a:defRPr>
-            </a:lvl2pPr>
-            <a:lvl3pPr lvl="2" algn="l" defTabSz="457200">
-              <a:lnSpc>
-                <a:spcPct val="100000"/>
-              </a:lnSpc>
-              <a:spcBef>
-                <a:spcPts val="479"/>
-              </a:spcBef>
-              <a:buClr>
-                <a:srgbClr val="000000"/>
-              </a:buClr>
-              <a:buSzPct val="45000"/>
-              <a:buFont typeface="Wingdings" charset="2"/>
-              <a:buChar char=""/>
-              <a:defRPr lang="en-US" sz="2400" b="0" u="none" strike="noStrike">
-                <a:solidFill>
-                  <a:schemeClr val="dk1"/>
-                </a:solidFill>
-                <a:effectLst/>
-                <a:uFillTx/>
-                <a:latin typeface="TradeGothic"/>
-              </a:defRPr>
-            </a:lvl3pPr>
-            <a:lvl4pPr lvl="3" algn="l" defTabSz="457200">
-              <a:lnSpc>
-                <a:spcPct val="100000"/>
-              </a:lnSpc>
-              <a:spcBef>
-                <a:spcPts val="400"/>
-              </a:spcBef>
-              <a:buClr>
-                <a:srgbClr val="000000"/>
-              </a:buClr>
-              <a:buSzPct val="75000"/>
-              <a:buFont typeface="Symbol" charset="2"/>
-              <a:buChar char=""/>
-              <a:defRPr lang="en-US" sz="2000" b="0" u="none" strike="noStrike">
-                <a:solidFill>
-                  <a:schemeClr val="dk1"/>
-                </a:solidFill>
-                <a:effectLst/>
-                <a:uFillTx/>
-                <a:latin typeface="TradeGothic"/>
-              </a:defRPr>
-            </a:lvl4pPr>
-            <a:lvl5pPr lvl="4" algn="l" defTabSz="457200">
-              <a:lnSpc>
-                <a:spcPct val="100000"/>
-              </a:lnSpc>
-              <a:spcBef>
-                <a:spcPts val="400"/>
-              </a:spcBef>
-              <a:buClr>
-                <a:srgbClr val="000000"/>
-              </a:buClr>
-              <a:buSzPct val="45000"/>
-              <a:buFont typeface="Wingdings" charset="2"/>
-              <a:buChar char=""/>
-              <a:defRPr lang="en-US" sz="2000" b="0" u="none" strike="noStrike">
-                <a:solidFill>
-                  <a:schemeClr val="dk1"/>
-                </a:solidFill>
-                <a:effectLst/>
-                <a:uFillTx/>
-                <a:latin typeface="TradeGothic"/>
-              </a:defRPr>
-            </a:lvl5pPr>
-            <a:lvl6pPr lvl="5" algn="l" defTabSz="457200">
-              <a:lnSpc>
-                <a:spcPct val="100000"/>
-              </a:lnSpc>
-              <a:spcBef>
-                <a:spcPts val="283"/>
-              </a:spcBef>
-              <a:buClr>
-                <a:srgbClr val="000000"/>
-              </a:buClr>
-              <a:buSzPct val="45000"/>
-              <a:buFont typeface="Wingdings" charset="2"/>
-              <a:buChar char=""/>
-              <a:defRPr lang="en-US" sz="2000" b="0" u="none" strike="noStrike">
-                <a:solidFill>
-                  <a:schemeClr val="dk1"/>
-                </a:solidFill>
-                <a:effectLst/>
-                <a:uFillTx/>
-                <a:latin typeface="TradeGothic"/>
-              </a:defRPr>
-            </a:lvl6pPr>
-            <a:lvl7pPr lvl="6" algn="l" defTabSz="457200">
-              <a:lnSpc>
-                <a:spcPct val="100000"/>
-              </a:lnSpc>
-              <a:spcBef>
-                <a:spcPts val="283"/>
-              </a:spcBef>
-              <a:buClr>
-                <a:srgbClr val="000000"/>
-              </a:buClr>
-              <a:buSzPct val="45000"/>
-              <a:buFont typeface="Wingdings" charset="2"/>
-              <a:buChar char=""/>
-              <a:defRPr lang="en-US" sz="2000" b="0" u="none" strike="noStrike">
-                <a:solidFill>
-                  <a:schemeClr val="dk1"/>
-                </a:solidFill>
-                <a:effectLst/>
-                <a:uFillTx/>
-                <a:latin typeface="TradeGothic"/>
-              </a:defRPr>
-            </a:lvl7pPr>
-          </a:lstStyle>
-          <a:p>
-            <a:pPr marL="343080" indent="-343080" algn="l" defTabSz="457200">
-              <a:lnSpc>
-                <a:spcPct val="100000"/>
-              </a:lnSpc>
-              <a:spcBef>
-                <a:spcPts val="641"/>
-              </a:spcBef>
-              <a:buClr>
-                <a:srgbClr val="000000"/>
-              </a:buClr>
-              <a:buFont typeface="Arial"/>
-              <a:buChar char="•"/>
-            </a:pPr>
-            <a:r>
-              <a:rPr lang="en-US" sz="3200" b="0" u="none" strike="noStrike">
-                <a:solidFill>
-                  <a:schemeClr val="dk1"/>
-                </a:solidFill>
-                <a:effectLst/>
-                <a:uFillTx/>
-                <a:latin typeface="TradeGothic"/>
-              </a:rPr>
-              <a:t>Click to edit the outline text format</a:t>
-            </a:r>
-            <a:endParaRPr lang="en-US" sz="3200" b="0" u="none" strike="noStrike">
-              <a:solidFill>
-                <a:schemeClr val="dk1"/>
-              </a:solidFill>
-              <a:effectLst/>
-              <a:uFillTx/>
-              <a:latin typeface="TradeGothic"/>
-            </a:endParaRPr>
-          </a:p>
-          <a:p>
-            <a:pPr marL="864000" lvl="1" indent="-324000" algn="l" defTabSz="457200">
-              <a:lnSpc>
-                <a:spcPct val="100000"/>
-              </a:lnSpc>
-              <a:spcBef>
-                <a:spcPts val="561"/>
-              </a:spcBef>
-              <a:buClr>
-                <a:srgbClr val="000000"/>
-              </a:buClr>
-              <a:buSzPct val="75000"/>
-              <a:buFont typeface="Symbol" charset="2"/>
-              <a:buChar char=""/>
-            </a:pPr>
-            <a:r>
-              <a:rPr lang="en-US" sz="2800" b="0" u="none" strike="noStrike">
-                <a:solidFill>
-                  <a:schemeClr val="dk1"/>
-                </a:solidFill>
-                <a:effectLst/>
-                <a:uFillTx/>
-                <a:latin typeface="TradeGothic"/>
-              </a:rPr>
-              <a:t>Second Outline Level</a:t>
-            </a:r>
-            <a:endParaRPr lang="en-US" sz="2800" b="0" u="none" strike="noStrike">
-              <a:solidFill>
-                <a:schemeClr val="dk1"/>
-              </a:solidFill>
-              <a:effectLst/>
-              <a:uFillTx/>
-              <a:latin typeface="TradeGothic"/>
-            </a:endParaRPr>
-          </a:p>
-          <a:p>
-            <a:pPr marL="1296000" lvl="2" indent="-288000" algn="l" defTabSz="457200">
-              <a:lnSpc>
-                <a:spcPct val="100000"/>
-              </a:lnSpc>
-              <a:spcBef>
-                <a:spcPts val="479"/>
-              </a:spcBef>
-              <a:buClr>
-                <a:srgbClr val="000000"/>
-              </a:buClr>
-              <a:buSzPct val="45000"/>
-              <a:buFont typeface="Wingdings" charset="2"/>
-              <a:buChar char=""/>
-            </a:pPr>
-            <a:r>
-              <a:rPr lang="en-US" sz="2400" b="0" u="none" strike="noStrike">
-                <a:solidFill>
-                  <a:schemeClr val="dk1"/>
-                </a:solidFill>
-                <a:effectLst/>
-                <a:uFillTx/>
-                <a:latin typeface="TradeGothic"/>
-              </a:rPr>
-              <a:t>Third Outline Level</a:t>
-            </a:r>
-            <a:endParaRPr lang="en-US" sz="2400" b="0" u="none" strike="noStrike">
-              <a:solidFill>
-                <a:schemeClr val="dk1"/>
-              </a:solidFill>
-              <a:effectLst/>
-              <a:uFillTx/>
-              <a:latin typeface="TradeGothic"/>
-            </a:endParaRPr>
-          </a:p>
-          <a:p>
-            <a:pPr marL="1728000" lvl="3" indent="-216000" algn="l" defTabSz="457200">
-              <a:lnSpc>
-                <a:spcPct val="100000"/>
-              </a:lnSpc>
-              <a:spcBef>
-                <a:spcPts val="400"/>
-              </a:spcBef>
-              <a:buClr>
-                <a:srgbClr val="000000"/>
-              </a:buClr>
-              <a:buSzPct val="75000"/>
-              <a:buFont typeface="Symbol" charset="2"/>
-              <a:buChar char=""/>
-            </a:pPr>
-            <a:r>
-              <a:rPr lang="en-US" sz="2000" b="0" u="none" strike="noStrike">
-                <a:solidFill>
-                  <a:schemeClr val="dk1"/>
-                </a:solidFill>
-                <a:effectLst/>
-                <a:uFillTx/>
-                <a:latin typeface="TradeGothic"/>
-              </a:rPr>
-              <a:t>Fourth Outline Level</a:t>
-            </a:r>
-            <a:endParaRPr lang="en-US" sz="2000" b="0" u="none" strike="noStrike">
-              <a:solidFill>
-                <a:schemeClr val="dk1"/>
-              </a:solidFill>
-              <a:effectLst/>
-              <a:uFillTx/>
-              <a:latin typeface="TradeGothic"/>
-            </a:endParaRPr>
-          </a:p>
-          <a:p>
-            <a:pPr marL="2160000" lvl="4" indent="-216000" algn="l" defTabSz="457200">
-              <a:lnSpc>
-                <a:spcPct val="100000"/>
-              </a:lnSpc>
-              <a:spcBef>
-                <a:spcPts val="400"/>
-              </a:spcBef>
-              <a:buClr>
-                <a:srgbClr val="000000"/>
-              </a:buClr>
-              <a:buSzPct val="45000"/>
-              <a:buFont typeface="Wingdings" charset="2"/>
-              <a:buChar char=""/>
-            </a:pPr>
-            <a:r>
-              <a:rPr lang="en-US" sz="2000" b="0" u="none" strike="noStrike">
-                <a:solidFill>
-                  <a:schemeClr val="dk1"/>
-                </a:solidFill>
-                <a:effectLst/>
-                <a:uFillTx/>
-                <a:latin typeface="TradeGothic"/>
-              </a:rPr>
-              <a:t>Fifth Outline Level</a:t>
-            </a:r>
-            <a:endParaRPr lang="en-US" sz="2000" b="0" u="none" strike="noStrike">
-              <a:solidFill>
-                <a:schemeClr val="dk1"/>
-              </a:solidFill>
-              <a:effectLst/>
-              <a:uFillTx/>
-              <a:latin typeface="TradeGothic"/>
-            </a:endParaRPr>
-          </a:p>
-          <a:p>
-            <a:pPr marL="2592000" lvl="5" indent="-216000" algn="l" defTabSz="457200">
-              <a:lnSpc>
-                <a:spcPct val="100000"/>
-              </a:lnSpc>
-              <a:spcBef>
-                <a:spcPts val="283"/>
-              </a:spcBef>
-              <a:buClr>
-                <a:srgbClr val="000000"/>
-              </a:buClr>
-              <a:buSzPct val="45000"/>
-              <a:buFont typeface="Wingdings" charset="2"/>
-              <a:buChar char=""/>
-            </a:pPr>
-            <a:r>
-              <a:rPr lang="en-US" sz="2000" b="0" u="none" strike="noStrike">
-                <a:solidFill>
-                  <a:schemeClr val="dk1"/>
-                </a:solidFill>
-                <a:effectLst/>
-                <a:uFillTx/>
-                <a:latin typeface="TradeGothic"/>
-              </a:rPr>
-              <a:t>Sixth Outline Level</a:t>
-            </a:r>
-            <a:endParaRPr lang="en-US" sz="2000" b="0" u="none" strike="noStrike">
-              <a:solidFill>
-                <a:schemeClr val="dk1"/>
-              </a:solidFill>
-              <a:effectLst/>
-              <a:uFillTx/>
-              <a:latin typeface="TradeGothic"/>
-            </a:endParaRPr>
-          </a:p>
-          <a:p>
-            <a:pPr marL="3024000" lvl="6" indent="-216000" algn="l" defTabSz="457200">
-              <a:lnSpc>
-                <a:spcPct val="100000"/>
-              </a:lnSpc>
-              <a:spcBef>
-                <a:spcPts val="283"/>
-              </a:spcBef>
-              <a:buClr>
-                <a:srgbClr val="000000"/>
-              </a:buClr>
-              <a:buSzPct val="45000"/>
-              <a:buFont typeface="Wingdings" charset="2"/>
-              <a:buChar char=""/>
-            </a:pPr>
-            <a:r>
-              <a:rPr lang="en-US" sz="2000" b="0" u="none" strike="noStrike">
-                <a:solidFill>
-                  <a:schemeClr val="dk1"/>
-                </a:solidFill>
-                <a:effectLst/>
-                <a:uFillTx/>
-                <a:latin typeface="TradeGothic"/>
-              </a:rPr>
-              <a:t>Seventh Outline Level</a:t>
-            </a:r>
-            <a:endParaRPr lang="en-US" sz="2000" b="0" u="none" strike="noStrike">
-              <a:solidFill>
-                <a:schemeClr val="dk1"/>
-              </a:solidFill>
-              <a:effectLst/>
-              <a:uFillTx/>
-              <a:latin typeface="TradeGothic"/>
             </a:endParaRPr>
           </a:p>
         </p:txBody>
@@ -7615,8 +7457,8 @@
 </file>
 
 <file path=ppt/slideLayouts/slideLayout8.xml><?xml version="1.0" encoding="utf-8"?>
-<p:sldLayout xmlns:a="http://schemas.openxmlformats.org/drawingml/2006/main" xmlns:p="http://schemas.openxmlformats.org/presentationml/2006/main" xmlns:r="http://schemas.openxmlformats.org/officeDocument/2006/relationships" xmlns:p14="http://schemas.microsoft.com/office/powerpoint/2010/main" xmlns:p15="http://schemas.microsoft.com/office/powerpoint/2012/main" xmlns:mc="http://schemas.openxmlformats.org/markup-compatibility/2006" type="vertTx" preserve="1">
-  <p:cSld name="Title and Vertical Text">
+<p:sldLayout xmlns:a="http://schemas.openxmlformats.org/drawingml/2006/main" xmlns:p="http://schemas.openxmlformats.org/presentationml/2006/main" xmlns:r="http://schemas.openxmlformats.org/officeDocument/2006/relationships" xmlns:p14="http://schemas.microsoft.com/office/powerpoint/2010/main" xmlns:p15="http://schemas.microsoft.com/office/powerpoint/2012/main" xmlns:mc="http://schemas.openxmlformats.org/markup-compatibility/2006" type="blank" preserve="1">
+  <p:cSld name="Content with Caption">
     <p:bg>
       <p:bgPr>
         <a:solidFill>
@@ -7640,7 +7482,7 @@
       </p:grpSpPr>
       <p:sp>
         <p:nvSpPr>
-          <p:cNvPr id="40" name="PlaceHolder 1"/>
+          <p:cNvPr id="38" name="PlaceHolder 1"/>
           <p:cNvSpPr>
             <a:spLocks noGrp="1"/>
           </p:cNvSpPr>
@@ -7650,8 +7492,8 @@
         </p:nvSpPr>
         <p:spPr>
           <a:xfrm>
-            <a:off x="609480" y="-47520"/>
-            <a:ext cx="10971720" cy="1141920"/>
+            <a:off x="609480" y="272880"/>
+            <a:ext cx="4009680" cy="1160640"/>
           </a:xfrm>
           <a:prstGeom prst="rect">
             <a:avLst/>
@@ -7662,19 +7504,19 @@
           </a:ln>
         </p:spPr>
         <p:txBody>
-          <a:bodyPr numCol="1" spcCol="0" lIns="91440" tIns="45720" rIns="91440" bIns="45720" anchor="ctr">
+          <a:bodyPr numCol="1" spcCol="0" lIns="91440" tIns="45720" rIns="91440" bIns="45720" anchor="b">
             <a:noAutofit/>
           </a:bodyPr>
           <a:lstStyle>
-            <a:lvl1pPr indent="0" algn="ctr" defTabSz="457200">
-              <a:lnSpc>
-                <a:spcPct val="100000"/>
-              </a:lnSpc>
-              <a:buNone/>
-              <a:tabLst>
-                <a:tab pos="0" algn="l"/>
-              </a:tabLst>
-              <a:defRPr lang="en-US" sz="4400" b="0" u="none" strike="noStrike">
+            <a:lvl1pPr indent="0" algn="l" defTabSz="457200">
+              <a:lnSpc>
+                <a:spcPct val="100000"/>
+              </a:lnSpc>
+              <a:buNone/>
+              <a:tabLst>
+                <a:tab pos="0" algn="l"/>
+              </a:tabLst>
+              <a:defRPr lang="en-US" sz="2000" b="1" u="none" strike="noStrike">
                 <a:solidFill>
                   <a:schemeClr val="dk1"/>
                 </a:solidFill>
@@ -7686,17 +7528,17 @@
             </a:lvl1pPr>
           </a:lstStyle>
           <a:p>
-            <a:pPr indent="0" algn="ctr" defTabSz="457200">
-              <a:lnSpc>
-                <a:spcPct val="100000"/>
-              </a:lnSpc>
-              <a:buNone/>
-              <a:tabLst>
-                <a:tab pos="0" algn="l"/>
-              </a:tabLst>
-            </a:pPr>
-            <a:r>
-              <a:rPr lang="en-US" sz="4400" b="0" u="none" strike="noStrike">
+            <a:pPr indent="0" algn="l" defTabSz="457200">
+              <a:lnSpc>
+                <a:spcPct val="100000"/>
+              </a:lnSpc>
+              <a:buNone/>
+              <a:tabLst>
+                <a:tab pos="0" algn="l"/>
+              </a:tabLst>
+            </a:pPr>
+            <a:r>
+              <a:rPr lang="en-US" sz="2000" b="1" u="none" strike="noStrike">
                 <a:solidFill>
                   <a:schemeClr val="dk1"/>
                 </a:solidFill>
@@ -7707,7 +7549,7 @@
               </a:rPr>
               <a:t>Click to edit Master title style</a:t>
             </a:r>
-            <a:endParaRPr lang="en-US" sz="4400" b="0" u="none" strike="noStrike">
+            <a:endParaRPr lang="en-US" sz="2000" b="1" u="none" strike="noStrike">
               <a:solidFill>
                 <a:schemeClr val="dk1"/>
               </a:solidFill>
@@ -7720,7 +7562,7 @@
       </p:sp>
       <p:sp>
         <p:nvSpPr>
-          <p:cNvPr id="41" name="PlaceHolder 2"/>
+          <p:cNvPr id="39" name="PlaceHolder 2"/>
           <p:cNvSpPr>
             <a:spLocks noGrp="1"/>
           </p:cNvSpPr>
@@ -7730,8 +7572,8 @@
         </p:nvSpPr>
         <p:spPr>
           <a:xfrm>
-            <a:off x="609480" y="1095480"/>
-            <a:ext cx="10971720" cy="5029560"/>
+            <a:off x="4766760" y="272880"/>
+            <a:ext cx="6814080" cy="5851800"/>
           </a:xfrm>
           <a:prstGeom prst="rect">
             <a:avLst/>
@@ -7742,7 +7584,7 @@
           </a:ln>
         </p:spPr>
         <p:txBody>
-          <a:bodyPr numCol="1" spcCol="0" lIns="91440" tIns="45720" rIns="91440" bIns="45720" anchor="t" vert="eaVert">
+          <a:bodyPr numCol="1" spcCol="0" lIns="91440" tIns="45720" rIns="91440" bIns="45720" anchor="t">
             <a:noAutofit/>
           </a:bodyPr>
           <a:lstStyle>
@@ -8036,7 +7878,93 @@
       </p:sp>
       <p:sp>
         <p:nvSpPr>
-          <p:cNvPr id="42" name="PlaceHolder 3"/>
+          <p:cNvPr id="40" name="PlaceHolder 3"/>
+          <p:cNvSpPr>
+            <a:spLocks noGrp="1"/>
+          </p:cNvSpPr>
+          <p:nvPr>
+            <p:ph type="body"/>
+          </p:nvPr>
+        </p:nvSpPr>
+        <p:spPr>
+          <a:xfrm>
+            <a:off x="609480" y="1434960"/>
+            <a:ext cx="4009680" cy="4689720"/>
+          </a:xfrm>
+          <a:prstGeom prst="rect">
+            <a:avLst/>
+          </a:prstGeom>
+          <a:noFill/>
+          <a:ln w="9360">
+            <a:noFill/>
+          </a:ln>
+        </p:spPr>
+        <p:txBody>
+          <a:bodyPr numCol="1" spcCol="0" lIns="91440" tIns="45720" rIns="91440" bIns="45720" anchor="t">
+            <a:noAutofit/>
+          </a:bodyPr>
+          <a:lstStyle>
+            <a:lvl1pPr indent="0" algn="l" defTabSz="457200">
+              <a:lnSpc>
+                <a:spcPct val="100000"/>
+              </a:lnSpc>
+              <a:spcBef>
+                <a:spcPts val="281"/>
+              </a:spcBef>
+              <a:buNone/>
+              <a:tabLst>
+                <a:tab pos="0" algn="l"/>
+              </a:tabLst>
+              <a:defRPr lang="en-US" sz="1400" b="0" u="none" strike="noStrike">
+                <a:solidFill>
+                  <a:schemeClr val="dk1"/>
+                </a:solidFill>
+                <a:effectLst/>
+                <a:uFillTx/>
+                <a:latin typeface="TradeGothic"/>
+                <a:ea typeface="ＭＳ Ｐゴシック"/>
+              </a:defRPr>
+            </a:lvl1pPr>
+          </a:lstStyle>
+          <a:p>
+            <a:pPr indent="0" algn="l" defTabSz="457200">
+              <a:lnSpc>
+                <a:spcPct val="100000"/>
+              </a:lnSpc>
+              <a:spcBef>
+                <a:spcPts val="281"/>
+              </a:spcBef>
+              <a:buNone/>
+              <a:tabLst>
+                <a:tab pos="0" algn="l"/>
+              </a:tabLst>
+            </a:pPr>
+            <a:r>
+              <a:rPr lang="en-US" sz="1400" b="0" u="none" strike="noStrike">
+                <a:solidFill>
+                  <a:schemeClr val="dk1"/>
+                </a:solidFill>
+                <a:effectLst/>
+                <a:uFillTx/>
+                <a:latin typeface="TradeGothic"/>
+                <a:ea typeface="ＭＳ Ｐゴシック"/>
+              </a:rPr>
+              <a:t>Click to edit Master text styles</a:t>
+            </a:r>
+            <a:endParaRPr lang="en-US" sz="1400" b="0" u="none" strike="noStrike">
+              <a:solidFill>
+                <a:schemeClr val="dk1"/>
+              </a:solidFill>
+              <a:effectLst/>
+              <a:uFillTx/>
+              <a:latin typeface="TradeGothic"/>
+            </a:endParaRPr>
+          </a:p>
+        </p:txBody>
+      </p:sp>
+      <p:sp>
+        <p:nvSpPr>
+          <p:cNvPr id="41" name="PlaceHolder 4"/>
           <p:cNvSpPr>
             <a:spLocks noGrp="1"/>
           </p:cNvSpPr>
@@ -8047,7 +7975,7 @@
         <p:spPr>
           <a:xfrm>
             <a:off x="609480" y="6356520"/>
-            <a:ext cx="2843640" cy="363960"/>
+            <a:ext cx="2843280" cy="363600"/>
           </a:xfrm>
           <a:prstGeom prst="rect">
             <a:avLst/>
@@ -8116,7 +8044,7 @@
       </p:sp>
       <p:sp>
         <p:nvSpPr>
-          <p:cNvPr id="43" name="PlaceHolder 4"/>
+          <p:cNvPr id="42" name="PlaceHolder 5"/>
           <p:cNvSpPr>
             <a:spLocks noGrp="1"/>
           </p:cNvSpPr>
@@ -8127,7 +8055,7 @@
         <p:spPr>
           <a:xfrm>
             <a:off x="4165560" y="6356520"/>
-            <a:ext cx="3859560" cy="363960"/>
+            <a:ext cx="3859200" cy="363600"/>
           </a:xfrm>
           <a:prstGeom prst="rect">
             <a:avLst/>
@@ -8198,7 +8126,7 @@
       </p:sp>
       <p:sp>
         <p:nvSpPr>
-          <p:cNvPr id="44" name="PlaceHolder 5"/>
+          <p:cNvPr id="43" name="PlaceHolder 6"/>
           <p:cNvSpPr>
             <a:spLocks noGrp="1"/>
           </p:cNvSpPr>
@@ -8209,7 +8137,7 @@
         <p:spPr>
           <a:xfrm>
             <a:off x="8737560" y="6356520"/>
-            <a:ext cx="2843640" cy="363960"/>
+            <a:ext cx="2843280" cy="363600"/>
           </a:xfrm>
           <a:prstGeom prst="rect">
             <a:avLst/>
@@ -8253,7 +8181,7 @@
                 <a:tab pos="0" algn="l"/>
               </a:tabLst>
             </a:pPr>
-            <a:fld id="{745B13E1-CEC0-4EB8-9B16-3A2A38E87F91}" type="slidenum">
+            <a:fld id="{0F7D55F4-1882-4F6F-BB75-14DA35FAE73F}" type="slidenum">
               <a:rPr lang="en-US" sz="1200" b="0" u="none" strike="noStrike">
                 <a:solidFill>
                   <a:srgbClr val="898989"/>
@@ -8282,8 +8210,8 @@
 </file>
 
 <file path=ppt/slideLayouts/slideLayout9.xml><?xml version="1.0" encoding="utf-8"?>
-<p:sldLayout xmlns:a="http://schemas.openxmlformats.org/drawingml/2006/main" xmlns:p="http://schemas.openxmlformats.org/presentationml/2006/main" xmlns:r="http://schemas.openxmlformats.org/officeDocument/2006/relationships" xmlns:p14="http://schemas.microsoft.com/office/powerpoint/2010/main" xmlns:p15="http://schemas.microsoft.com/office/powerpoint/2012/main" xmlns:mc="http://schemas.openxmlformats.org/markup-compatibility/2006" type="vertTitleAndTx" preserve="1">
-  <p:cSld name="Vertical Title and Text">
+<p:sldLayout xmlns:a="http://schemas.openxmlformats.org/drawingml/2006/main" xmlns:p="http://schemas.openxmlformats.org/presentationml/2006/main" xmlns:r="http://schemas.openxmlformats.org/officeDocument/2006/relationships" xmlns:p14="http://schemas.microsoft.com/office/powerpoint/2010/main" xmlns:p15="http://schemas.microsoft.com/office/powerpoint/2012/main" xmlns:mc="http://schemas.openxmlformats.org/markup-compatibility/2006" type="blank" preserve="1">
+  <p:cSld name="Picture with Caption">
     <p:bg>
       <p:bgPr>
         <a:solidFill>
@@ -8307,7 +8235,7 @@
       </p:grpSpPr>
       <p:sp>
         <p:nvSpPr>
-          <p:cNvPr id="45" name="PlaceHolder 1"/>
+          <p:cNvPr id="44" name="PlaceHolder 1"/>
           <p:cNvSpPr>
             <a:spLocks noGrp="1"/>
           </p:cNvSpPr>
@@ -8317,8 +8245,8 @@
         </p:nvSpPr>
         <p:spPr>
           <a:xfrm>
-            <a:off x="8839080" y="274680"/>
-            <a:ext cx="2742120" cy="5850360"/>
+            <a:off x="2389680" y="4800600"/>
+            <a:ext cx="7313760" cy="565200"/>
           </a:xfrm>
           <a:prstGeom prst="rect">
             <a:avLst/>
@@ -8329,19 +8257,19 @@
           </a:ln>
         </p:spPr>
         <p:txBody>
-          <a:bodyPr numCol="1" spcCol="0" lIns="91440" tIns="45720" rIns="91440" bIns="45720" anchor="ctr" vert="eaVert">
+          <a:bodyPr numCol="1" spcCol="0" lIns="91440" tIns="45720" rIns="91440" bIns="45720" anchor="b">
             <a:noAutofit/>
           </a:bodyPr>
           <a:lstStyle>
-            <a:lvl1pPr indent="0" algn="ctr" defTabSz="457200">
-              <a:lnSpc>
-                <a:spcPct val="100000"/>
-              </a:lnSpc>
-              <a:buNone/>
-              <a:tabLst>
-                <a:tab pos="0" algn="l"/>
-              </a:tabLst>
-              <a:defRPr lang="en-US" sz="4400" b="0" u="none" strike="noStrike">
+            <a:lvl1pPr indent="0" algn="l" defTabSz="457200">
+              <a:lnSpc>
+                <a:spcPct val="100000"/>
+              </a:lnSpc>
+              <a:buNone/>
+              <a:tabLst>
+                <a:tab pos="0" algn="l"/>
+              </a:tabLst>
+              <a:defRPr lang="en-US" sz="2000" b="1" u="none" strike="noStrike">
                 <a:solidFill>
                   <a:schemeClr val="dk1"/>
                 </a:solidFill>
@@ -8353,17 +8281,17 @@
             </a:lvl1pPr>
           </a:lstStyle>
           <a:p>
-            <a:pPr indent="0" algn="ctr" defTabSz="457200">
-              <a:lnSpc>
-                <a:spcPct val="100000"/>
-              </a:lnSpc>
-              <a:buNone/>
-              <a:tabLst>
-                <a:tab pos="0" algn="l"/>
-              </a:tabLst>
-            </a:pPr>
-            <a:r>
-              <a:rPr lang="en-US" sz="4400" b="0" u="none" strike="noStrike">
+            <a:pPr indent="0" algn="l" defTabSz="457200">
+              <a:lnSpc>
+                <a:spcPct val="100000"/>
+              </a:lnSpc>
+              <a:buNone/>
+              <a:tabLst>
+                <a:tab pos="0" algn="l"/>
+              </a:tabLst>
+            </a:pPr>
+            <a:r>
+              <a:rPr lang="en-US" sz="2000" b="1" u="none" strike="noStrike">
                 <a:solidFill>
                   <a:schemeClr val="dk1"/>
                 </a:solidFill>
@@ -8374,7 +8302,7 @@
               </a:rPr>
               <a:t>Click to edit Master title style</a:t>
             </a:r>
-            <a:endParaRPr lang="en-US" sz="4400" b="0" u="none" strike="noStrike">
+            <a:endParaRPr lang="en-US" sz="2000" b="1" u="none" strike="noStrike">
               <a:solidFill>
                 <a:schemeClr val="dk1"/>
               </a:solidFill>
@@ -8387,7 +8315,7 @@
       </p:sp>
       <p:sp>
         <p:nvSpPr>
-          <p:cNvPr id="46" name="PlaceHolder 2"/>
+          <p:cNvPr id="45" name="PlaceHolder 2"/>
           <p:cNvSpPr>
             <a:spLocks noGrp="1"/>
           </p:cNvSpPr>
@@ -8397,8 +8325,478 @@
         </p:nvSpPr>
         <p:spPr>
           <a:xfrm>
-            <a:off x="609480" y="274680"/>
-            <a:ext cx="8025480" cy="5850360"/>
+            <a:off x="2389680" y="612720"/>
+            <a:ext cx="7313760" cy="4113360"/>
+          </a:xfrm>
+          <a:prstGeom prst="rect">
+            <a:avLst/>
+          </a:prstGeom>
+          <a:noFill/>
+          <a:ln w="0">
+            <a:noFill/>
+          </a:ln>
+        </p:spPr>
+        <p:txBody>
+          <a:bodyPr lIns="90000" tIns="45000" rIns="90000" bIns="45000" anchor="t">
+            <a:normAutofit/>
+          </a:bodyPr>
+          <a:lstStyle>
+            <a:lvl1pPr algn="l" defTabSz="457200">
+              <a:lnSpc>
+                <a:spcPct val="100000"/>
+              </a:lnSpc>
+              <a:spcBef>
+                <a:spcPts val="281"/>
+              </a:spcBef>
+              <a:buClr>
+                <a:srgbClr val="000000"/>
+              </a:buClr>
+              <a:buFont typeface="Arial"/>
+              <a:buChar char="•"/>
+              <a:tabLst>
+                <a:tab pos="0" algn="l"/>
+              </a:tabLst>
+              <a:defRPr lang="en-US" sz="3200" b="0" u="none" strike="noStrike">
+                <a:solidFill>
+                  <a:schemeClr val="dk1"/>
+                </a:solidFill>
+                <a:effectLst/>
+                <a:uFillTx/>
+                <a:latin typeface="TradeGothic"/>
+              </a:defRPr>
+            </a:lvl1pPr>
+            <a:lvl2pPr lvl="1" algn="l" defTabSz="457200">
+              <a:lnSpc>
+                <a:spcPct val="100000"/>
+              </a:lnSpc>
+              <a:spcBef>
+                <a:spcPts val="561"/>
+              </a:spcBef>
+              <a:buClr>
+                <a:srgbClr val="000000"/>
+              </a:buClr>
+              <a:buSzPct val="75000"/>
+              <a:buFont typeface="Symbol" charset="2"/>
+              <a:buChar char=""/>
+              <a:tabLst>
+                <a:tab pos="0" algn="l"/>
+              </a:tabLst>
+              <a:defRPr lang="en-US" sz="3200" b="0" u="none" strike="noStrike">
+                <a:solidFill>
+                  <a:schemeClr val="dk1"/>
+                </a:solidFill>
+                <a:effectLst/>
+                <a:uFillTx/>
+                <a:latin typeface="TradeGothic"/>
+              </a:defRPr>
+            </a:lvl2pPr>
+            <a:lvl3pPr lvl="2" algn="l" defTabSz="457200">
+              <a:lnSpc>
+                <a:spcPct val="100000"/>
+              </a:lnSpc>
+              <a:spcBef>
+                <a:spcPts val="479"/>
+              </a:spcBef>
+              <a:buClr>
+                <a:srgbClr val="000000"/>
+              </a:buClr>
+              <a:buSzPct val="45000"/>
+              <a:buFont typeface="Wingdings" charset="2"/>
+              <a:buChar char=""/>
+              <a:tabLst>
+                <a:tab pos="0" algn="l"/>
+              </a:tabLst>
+              <a:defRPr lang="en-US" sz="3200" b="0" u="none" strike="noStrike">
+                <a:solidFill>
+                  <a:schemeClr val="dk1"/>
+                </a:solidFill>
+                <a:effectLst/>
+                <a:uFillTx/>
+                <a:latin typeface="TradeGothic"/>
+              </a:defRPr>
+            </a:lvl3pPr>
+            <a:lvl4pPr lvl="3" algn="l" defTabSz="457200">
+              <a:lnSpc>
+                <a:spcPct val="100000"/>
+              </a:lnSpc>
+              <a:spcBef>
+                <a:spcPts val="400"/>
+              </a:spcBef>
+              <a:buClr>
+                <a:srgbClr val="000000"/>
+              </a:buClr>
+              <a:buSzPct val="75000"/>
+              <a:buFont typeface="Symbol" charset="2"/>
+              <a:buChar char=""/>
+              <a:tabLst>
+                <a:tab pos="0" algn="l"/>
+              </a:tabLst>
+              <a:defRPr lang="en-US" sz="3200" b="0" u="none" strike="noStrike">
+                <a:solidFill>
+                  <a:schemeClr val="dk1"/>
+                </a:solidFill>
+                <a:effectLst/>
+                <a:uFillTx/>
+                <a:latin typeface="TradeGothic"/>
+              </a:defRPr>
+            </a:lvl4pPr>
+            <a:lvl5pPr lvl="4" algn="l" defTabSz="457200">
+              <a:lnSpc>
+                <a:spcPct val="100000"/>
+              </a:lnSpc>
+              <a:spcBef>
+                <a:spcPts val="400"/>
+              </a:spcBef>
+              <a:buClr>
+                <a:srgbClr val="000000"/>
+              </a:buClr>
+              <a:buSzPct val="45000"/>
+              <a:buFont typeface="Wingdings" charset="2"/>
+              <a:buChar char=""/>
+              <a:tabLst>
+                <a:tab pos="0" algn="l"/>
+              </a:tabLst>
+              <a:defRPr lang="en-US" sz="3200" b="0" u="none" strike="noStrike">
+                <a:solidFill>
+                  <a:schemeClr val="dk1"/>
+                </a:solidFill>
+                <a:effectLst/>
+                <a:uFillTx/>
+                <a:latin typeface="TradeGothic"/>
+              </a:defRPr>
+            </a:lvl5pPr>
+            <a:lvl6pPr lvl="5" algn="l" defTabSz="457200">
+              <a:lnSpc>
+                <a:spcPct val="100000"/>
+              </a:lnSpc>
+              <a:spcBef>
+                <a:spcPts val="283"/>
+              </a:spcBef>
+              <a:buClr>
+                <a:srgbClr val="000000"/>
+              </a:buClr>
+              <a:buSzPct val="45000"/>
+              <a:buFont typeface="Wingdings" charset="2"/>
+              <a:buChar char=""/>
+              <a:tabLst>
+                <a:tab pos="0" algn="l"/>
+              </a:tabLst>
+              <a:defRPr lang="en-US" sz="3200" b="0" u="none" strike="noStrike">
+                <a:solidFill>
+                  <a:schemeClr val="dk1"/>
+                </a:solidFill>
+                <a:effectLst/>
+                <a:uFillTx/>
+                <a:latin typeface="TradeGothic"/>
+              </a:defRPr>
+            </a:lvl6pPr>
+            <a:lvl7pPr lvl="6" algn="l" defTabSz="457200">
+              <a:lnSpc>
+                <a:spcPct val="100000"/>
+              </a:lnSpc>
+              <a:spcBef>
+                <a:spcPts val="283"/>
+              </a:spcBef>
+              <a:buClr>
+                <a:srgbClr val="000000"/>
+              </a:buClr>
+              <a:buSzPct val="45000"/>
+              <a:buFont typeface="Wingdings" charset="2"/>
+              <a:buChar char=""/>
+              <a:tabLst>
+                <a:tab pos="0" algn="l"/>
+              </a:tabLst>
+              <a:defRPr lang="en-US" sz="3200" b="0" u="none" strike="noStrike">
+                <a:solidFill>
+                  <a:schemeClr val="dk1"/>
+                </a:solidFill>
+                <a:effectLst/>
+                <a:uFillTx/>
+                <a:latin typeface="TradeGothic"/>
+              </a:defRPr>
+            </a:lvl7pPr>
+          </a:lstStyle>
+          <a:p>
+            <a:pPr marL="432000" indent="-324000" algn="l" defTabSz="457200">
+              <a:lnSpc>
+                <a:spcPct val="100000"/>
+              </a:lnSpc>
+              <a:spcBef>
+                <a:spcPts val="281"/>
+              </a:spcBef>
+              <a:buClr>
+                <a:srgbClr val="000000"/>
+              </a:buClr>
+              <a:buFont typeface="Arial"/>
+              <a:buChar char="•"/>
+              <a:tabLst>
+                <a:tab pos="0" algn="l"/>
+              </a:tabLst>
+            </a:pPr>
+            <a:r>
+              <a:rPr lang="en-US" sz="3200" b="0" u="none" strike="noStrike">
+                <a:solidFill>
+                  <a:schemeClr val="dk1"/>
+                </a:solidFill>
+                <a:effectLst/>
+                <a:uFillTx/>
+                <a:latin typeface="TradeGothic"/>
+              </a:rPr>
+              <a:t>Click to edit the outline text format</a:t>
+            </a:r>
+            <a:endParaRPr lang="en-US" sz="3200" b="0" u="none" strike="noStrike">
+              <a:solidFill>
+                <a:schemeClr val="dk1"/>
+              </a:solidFill>
+              <a:effectLst/>
+              <a:uFillTx/>
+              <a:latin typeface="TradeGothic"/>
+            </a:endParaRPr>
+          </a:p>
+          <a:p>
+            <a:pPr marL="457200" lvl="1" indent="-324000" algn="l" defTabSz="457200">
+              <a:lnSpc>
+                <a:spcPct val="100000"/>
+              </a:lnSpc>
+              <a:spcBef>
+                <a:spcPts val="561"/>
+              </a:spcBef>
+              <a:buClr>
+                <a:srgbClr val="000000"/>
+              </a:buClr>
+              <a:buSzPct val="75000"/>
+              <a:buFont typeface="Symbol" charset="2"/>
+              <a:buChar char=""/>
+              <a:tabLst>
+                <a:tab pos="0" algn="l"/>
+              </a:tabLst>
+            </a:pPr>
+            <a:r>
+              <a:rPr lang="en-US" sz="3200" b="0" u="none" strike="noStrike">
+                <a:solidFill>
+                  <a:schemeClr val="dk1"/>
+                </a:solidFill>
+                <a:effectLst/>
+                <a:uFillTx/>
+                <a:latin typeface="TradeGothic"/>
+              </a:rPr>
+              <a:t>Second Outline Level</a:t>
+            </a:r>
+            <a:endParaRPr lang="en-US" sz="3200" b="0" u="none" strike="noStrike">
+              <a:solidFill>
+                <a:schemeClr val="dk1"/>
+              </a:solidFill>
+              <a:effectLst/>
+              <a:uFillTx/>
+              <a:latin typeface="TradeGothic"/>
+            </a:endParaRPr>
+          </a:p>
+          <a:p>
+            <a:pPr marL="914400" lvl="2" indent="-288000" algn="l" defTabSz="457200">
+              <a:lnSpc>
+                <a:spcPct val="100000"/>
+              </a:lnSpc>
+              <a:spcBef>
+                <a:spcPts val="479"/>
+              </a:spcBef>
+              <a:buClr>
+                <a:srgbClr val="000000"/>
+              </a:buClr>
+              <a:buSzPct val="45000"/>
+              <a:buFont typeface="Wingdings" charset="2"/>
+              <a:buChar char=""/>
+              <a:tabLst>
+                <a:tab pos="0" algn="l"/>
+              </a:tabLst>
+            </a:pPr>
+            <a:r>
+              <a:rPr lang="en-US" sz="3200" b="0" u="none" strike="noStrike">
+                <a:solidFill>
+                  <a:schemeClr val="dk1"/>
+                </a:solidFill>
+                <a:effectLst/>
+                <a:uFillTx/>
+                <a:latin typeface="TradeGothic"/>
+              </a:rPr>
+              <a:t>Third Outline Level</a:t>
+            </a:r>
+            <a:endParaRPr lang="en-US" sz="3200" b="0" u="none" strike="noStrike">
+              <a:solidFill>
+                <a:schemeClr val="dk1"/>
+              </a:solidFill>
+              <a:effectLst/>
+              <a:uFillTx/>
+              <a:latin typeface="TradeGothic"/>
+            </a:endParaRPr>
+          </a:p>
+          <a:p>
+            <a:pPr marL="1371600" lvl="3" indent="-216000" algn="l" defTabSz="457200">
+              <a:lnSpc>
+                <a:spcPct val="100000"/>
+              </a:lnSpc>
+              <a:spcBef>
+                <a:spcPts val="400"/>
+              </a:spcBef>
+              <a:buClr>
+                <a:srgbClr val="000000"/>
+              </a:buClr>
+              <a:buSzPct val="75000"/>
+              <a:buFont typeface="Symbol" charset="2"/>
+              <a:buChar char=""/>
+              <a:tabLst>
+                <a:tab pos="0" algn="l"/>
+              </a:tabLst>
+            </a:pPr>
+            <a:r>
+              <a:rPr lang="en-US" sz="3200" b="0" u="none" strike="noStrike">
+                <a:solidFill>
+                  <a:schemeClr val="dk1"/>
+                </a:solidFill>
+                <a:effectLst/>
+                <a:uFillTx/>
+                <a:latin typeface="TradeGothic"/>
+              </a:rPr>
+              <a:t>Fourth Outline Level</a:t>
+            </a:r>
+            <a:endParaRPr lang="en-US" sz="3200" b="0" u="none" strike="noStrike">
+              <a:solidFill>
+                <a:schemeClr val="dk1"/>
+              </a:solidFill>
+              <a:effectLst/>
+              <a:uFillTx/>
+              <a:latin typeface="TradeGothic"/>
+            </a:endParaRPr>
+          </a:p>
+          <a:p>
+            <a:pPr marL="1828800" lvl="4" indent="-216000" algn="l" defTabSz="457200">
+              <a:lnSpc>
+                <a:spcPct val="100000"/>
+              </a:lnSpc>
+              <a:spcBef>
+                <a:spcPts val="400"/>
+              </a:spcBef>
+              <a:buClr>
+                <a:srgbClr val="000000"/>
+              </a:buClr>
+              <a:buSzPct val="45000"/>
+              <a:buFont typeface="Wingdings" charset="2"/>
+              <a:buChar char=""/>
+              <a:tabLst>
+                <a:tab pos="0" algn="l"/>
+              </a:tabLst>
+            </a:pPr>
+            <a:r>
+              <a:rPr lang="en-US" sz="3200" b="0" u="none" strike="noStrike">
+                <a:solidFill>
+                  <a:schemeClr val="dk1"/>
+                </a:solidFill>
+                <a:effectLst/>
+                <a:uFillTx/>
+                <a:latin typeface="TradeGothic"/>
+              </a:rPr>
+              <a:t>Fifth Outline Level</a:t>
+            </a:r>
+            <a:endParaRPr lang="en-US" sz="3200" b="0" u="none" strike="noStrike">
+              <a:solidFill>
+                <a:schemeClr val="dk1"/>
+              </a:solidFill>
+              <a:effectLst/>
+              <a:uFillTx/>
+              <a:latin typeface="TradeGothic"/>
+            </a:endParaRPr>
+          </a:p>
+          <a:p>
+            <a:pPr marL="2286000" lvl="5" indent="-216000" algn="l" defTabSz="457200">
+              <a:lnSpc>
+                <a:spcPct val="100000"/>
+              </a:lnSpc>
+              <a:spcBef>
+                <a:spcPts val="283"/>
+              </a:spcBef>
+              <a:buClr>
+                <a:srgbClr val="000000"/>
+              </a:buClr>
+              <a:buSzPct val="45000"/>
+              <a:buFont typeface="Wingdings" charset="2"/>
+              <a:buChar char=""/>
+              <a:tabLst>
+                <a:tab pos="0" algn="l"/>
+              </a:tabLst>
+            </a:pPr>
+            <a:r>
+              <a:rPr lang="en-US" sz="3200" b="0" u="none" strike="noStrike">
+                <a:solidFill>
+                  <a:schemeClr val="dk1"/>
+                </a:solidFill>
+                <a:effectLst/>
+                <a:uFillTx/>
+                <a:latin typeface="TradeGothic"/>
+              </a:rPr>
+              <a:t>Sixth Outline Level</a:t>
+            </a:r>
+            <a:endParaRPr lang="en-US" sz="3200" b="0" u="none" strike="noStrike">
+              <a:solidFill>
+                <a:schemeClr val="dk1"/>
+              </a:solidFill>
+              <a:effectLst/>
+              <a:uFillTx/>
+              <a:latin typeface="TradeGothic"/>
+            </a:endParaRPr>
+          </a:p>
+          <a:p>
+            <a:pPr marL="2743200" lvl="6" indent="-216000" algn="l" defTabSz="457200">
+              <a:lnSpc>
+                <a:spcPct val="100000"/>
+              </a:lnSpc>
+              <a:spcBef>
+                <a:spcPts val="283"/>
+              </a:spcBef>
+              <a:buClr>
+                <a:srgbClr val="000000"/>
+              </a:buClr>
+              <a:buSzPct val="45000"/>
+              <a:buFont typeface="Wingdings" charset="2"/>
+              <a:buChar char=""/>
+              <a:tabLst>
+                <a:tab pos="0" algn="l"/>
+              </a:tabLst>
+            </a:pPr>
+            <a:r>
+              <a:rPr lang="en-US" sz="3200" b="0" u="none" strike="noStrike">
+                <a:solidFill>
+                  <a:schemeClr val="dk1"/>
+                </a:solidFill>
+                <a:effectLst/>
+                <a:uFillTx/>
+                <a:latin typeface="TradeGothic"/>
+              </a:rPr>
+              <a:t>Seventh Outline Level</a:t>
+            </a:r>
+            <a:endParaRPr lang="en-US" sz="3200" b="0" u="none" strike="noStrike">
+              <a:solidFill>
+                <a:schemeClr val="dk1"/>
+              </a:solidFill>
+              <a:effectLst/>
+              <a:uFillTx/>
+              <a:latin typeface="TradeGothic"/>
+            </a:endParaRPr>
+          </a:p>
+        </p:txBody>
+      </p:sp>
+      <p:sp>
+        <p:nvSpPr>
+          <p:cNvPr id="46" name="PlaceHolder 3"/>
+          <p:cNvSpPr>
+            <a:spLocks noGrp="1"/>
+          </p:cNvSpPr>
+          <p:nvPr>
+            <p:ph type="body"/>
+          </p:nvPr>
+        </p:nvSpPr>
+        <p:spPr>
+          <a:xfrm>
+            <a:off x="2389680" y="5367240"/>
+            <a:ext cx="7313760" cy="803520"/>
           </a:xfrm>
           <a:prstGeom prst="rect">
             <a:avLst/>
@@ -8409,23 +8807,22 @@
           </a:ln>
         </p:spPr>
         <p:txBody>
-          <a:bodyPr numCol="1" spcCol="0" lIns="91440" tIns="45720" rIns="91440" bIns="45720" anchor="t" vert="eaVert">
+          <a:bodyPr numCol="1" spcCol="0" lIns="91440" tIns="45720" rIns="91440" bIns="45720" anchor="t">
             <a:noAutofit/>
           </a:bodyPr>
           <a:lstStyle>
-            <a:lvl1pPr algn="l" defTabSz="457200">
-              <a:lnSpc>
-                <a:spcPct val="100000"/>
-              </a:lnSpc>
-              <a:spcBef>
-                <a:spcPts val="641"/>
-              </a:spcBef>
-              <a:buClr>
-                <a:srgbClr val="000000"/>
-              </a:buClr>
-              <a:buFont typeface="Arial"/>
-              <a:buChar char="•"/>
-              <a:defRPr lang="en-US" sz="3200" b="0" u="none" strike="noStrike">
+            <a:lvl1pPr indent="0" algn="l" defTabSz="457200">
+              <a:lnSpc>
+                <a:spcPct val="100000"/>
+              </a:lnSpc>
+              <a:spcBef>
+                <a:spcPts val="281"/>
+              </a:spcBef>
+              <a:buNone/>
+              <a:tabLst>
+                <a:tab pos="0" algn="l"/>
+              </a:tabLst>
+              <a:defRPr lang="en-US" sz="1400" b="0" u="none" strike="noStrike">
                 <a:solidFill>
                   <a:schemeClr val="dk1"/>
                 </a:solidFill>
@@ -8435,111 +8832,22 @@
                 <a:ea typeface="ＭＳ Ｐゴシック"/>
               </a:defRPr>
             </a:lvl1pPr>
-            <a:lvl2pPr lvl="1" algn="l" defTabSz="457200">
-              <a:lnSpc>
-                <a:spcPct val="100000"/>
-              </a:lnSpc>
-              <a:spcBef>
-                <a:spcPts val="561"/>
-              </a:spcBef>
-              <a:buClr>
-                <a:srgbClr val="000000"/>
-              </a:buClr>
-              <a:buFont typeface="Arial"/>
-              <a:buChar char="–"/>
-              <a:defRPr lang="en-US" sz="2800" b="0" u="none" strike="noStrike">
-                <a:solidFill>
-                  <a:schemeClr val="dk1"/>
-                </a:solidFill>
-                <a:effectLst/>
-                <a:uFillTx/>
-                <a:latin typeface="TradeGothic"/>
-                <a:ea typeface="ＭＳ Ｐゴシック"/>
-              </a:defRPr>
-            </a:lvl2pPr>
-            <a:lvl3pPr lvl="2" algn="l" defTabSz="457200">
-              <a:lnSpc>
-                <a:spcPct val="100000"/>
-              </a:lnSpc>
-              <a:spcBef>
-                <a:spcPts val="479"/>
-              </a:spcBef>
-              <a:buClr>
-                <a:srgbClr val="000000"/>
-              </a:buClr>
-              <a:buFont typeface="Arial"/>
-              <a:buChar char="•"/>
-              <a:defRPr lang="en-US" sz="2400" b="0" u="none" strike="noStrike">
-                <a:solidFill>
-                  <a:schemeClr val="dk1"/>
-                </a:solidFill>
-                <a:effectLst/>
-                <a:uFillTx/>
-                <a:latin typeface="TradeGothic"/>
-                <a:ea typeface="ＭＳ Ｐゴシック"/>
-              </a:defRPr>
-            </a:lvl3pPr>
-            <a:lvl4pPr lvl="3" algn="l" defTabSz="457200">
-              <a:lnSpc>
-                <a:spcPct val="100000"/>
-              </a:lnSpc>
-              <a:spcBef>
-                <a:spcPts val="400"/>
-              </a:spcBef>
-              <a:buClr>
-                <a:srgbClr val="000000"/>
-              </a:buClr>
-              <a:buFont typeface="Arial"/>
-              <a:buChar char="–"/>
-              <a:defRPr lang="en-US" sz="2000" b="0" u="none" strike="noStrike">
-                <a:solidFill>
-                  <a:schemeClr val="dk1"/>
-                </a:solidFill>
-                <a:effectLst/>
-                <a:uFillTx/>
-                <a:latin typeface="TradeGothic"/>
-                <a:ea typeface="ＭＳ Ｐゴシック"/>
-              </a:defRPr>
-            </a:lvl4pPr>
-            <a:lvl5pPr lvl="4" algn="l" defTabSz="457200">
-              <a:lnSpc>
-                <a:spcPct val="100000"/>
-              </a:lnSpc>
-              <a:spcBef>
-                <a:spcPts val="400"/>
-              </a:spcBef>
-              <a:buClr>
-                <a:srgbClr val="000000"/>
-              </a:buClr>
-              <a:buFont typeface="Arial"/>
-              <a:buChar char="»"/>
-              <a:defRPr lang="en-US" sz="2000" b="0" u="none" strike="noStrike">
-                <a:solidFill>
-                  <a:schemeClr val="dk1"/>
-                </a:solidFill>
-                <a:effectLst/>
-                <a:uFillTx/>
-                <a:latin typeface="TradeGothic"/>
-                <a:ea typeface="ＭＳ Ｐゴシック"/>
-              </a:defRPr>
-            </a:lvl5pPr>
           </a:lstStyle>
           <a:p>
-            <a:pPr marL="343080" indent="-343080" algn="l" defTabSz="457200">
-              <a:lnSpc>
-                <a:spcPct val="100000"/>
-              </a:lnSpc>
-              <a:spcBef>
-                <a:spcPts val="641"/>
-              </a:spcBef>
-              <a:buClr>
-                <a:srgbClr val="000000"/>
-              </a:buClr>
-              <a:buFont typeface="Arial"/>
-              <a:buChar char="•"/>
-            </a:pPr>
-            <a:r>
-              <a:rPr lang="en-US" sz="3200" b="0" u="none" strike="noStrike">
+            <a:pPr indent="0" algn="l" defTabSz="457200">
+              <a:lnSpc>
+                <a:spcPct val="100000"/>
+              </a:lnSpc>
+              <a:spcBef>
+                <a:spcPts val="281"/>
+              </a:spcBef>
+              <a:buNone/>
+              <a:tabLst>
+                <a:tab pos="0" algn="l"/>
+              </a:tabLst>
+            </a:pPr>
+            <a:r>
+              <a:rPr lang="en-US" sz="1400" b="0" u="none" strike="noStrike">
                 <a:solidFill>
                   <a:schemeClr val="dk1"/>
                 </a:solidFill>
@@ -8550,147 +8858,7 @@
               </a:rPr>
               <a:t>Click to edit Master text styles</a:t>
             </a:r>
-            <a:endParaRPr lang="en-US" sz="3200" b="0" u="none" strike="noStrike">
-              <a:solidFill>
-                <a:schemeClr val="dk1"/>
-              </a:solidFill>
-              <a:effectLst/>
-              <a:uFillTx/>
-              <a:latin typeface="TradeGothic"/>
-            </a:endParaRPr>
-          </a:p>
-          <a:p>
-            <a:pPr marL="743040" lvl="1" indent="-285840" algn="l" defTabSz="457200">
-              <a:lnSpc>
-                <a:spcPct val="100000"/>
-              </a:lnSpc>
-              <a:spcBef>
-                <a:spcPts val="561"/>
-              </a:spcBef>
-              <a:buClr>
-                <a:srgbClr val="000000"/>
-              </a:buClr>
-              <a:buFont typeface="Arial"/>
-              <a:buChar char="–"/>
-            </a:pPr>
-            <a:r>
-              <a:rPr lang="en-US" sz="2800" b="0" u="none" strike="noStrike">
-                <a:solidFill>
-                  <a:schemeClr val="dk1"/>
-                </a:solidFill>
-                <a:effectLst/>
-                <a:uFillTx/>
-                <a:latin typeface="TradeGothic"/>
-                <a:ea typeface="ＭＳ Ｐゴシック"/>
-              </a:rPr>
-              <a:t>Second level</a:t>
-            </a:r>
-            <a:endParaRPr lang="en-US" sz="2800" b="0" u="none" strike="noStrike">
-              <a:solidFill>
-                <a:schemeClr val="dk1"/>
-              </a:solidFill>
-              <a:effectLst/>
-              <a:uFillTx/>
-              <a:latin typeface="TradeGothic"/>
-            </a:endParaRPr>
-          </a:p>
-          <a:p>
-            <a:pPr marL="1143000" lvl="2" indent="-228600" algn="l" defTabSz="457200">
-              <a:lnSpc>
-                <a:spcPct val="100000"/>
-              </a:lnSpc>
-              <a:spcBef>
-                <a:spcPts val="479"/>
-              </a:spcBef>
-              <a:buClr>
-                <a:srgbClr val="000000"/>
-              </a:buClr>
-              <a:buFont typeface="Arial"/>
-              <a:buChar char="•"/>
-            </a:pPr>
-            <a:r>
-              <a:rPr lang="en-US" sz="2400" b="0" u="none" strike="noStrike">
-                <a:solidFill>
-                  <a:schemeClr val="dk1"/>
-                </a:solidFill>
-                <a:effectLst/>
-                <a:uFillTx/>
-                <a:latin typeface="TradeGothic"/>
-                <a:ea typeface="ＭＳ Ｐゴシック"/>
-              </a:rPr>
-              <a:t>Third level</a:t>
-            </a:r>
-            <a:endParaRPr lang="en-US" sz="2400" b="0" u="none" strike="noStrike">
-              <a:solidFill>
-                <a:schemeClr val="dk1"/>
-              </a:solidFill>
-              <a:effectLst/>
-              <a:uFillTx/>
-              <a:latin typeface="TradeGothic"/>
-            </a:endParaRPr>
-          </a:p>
-          <a:p>
-            <a:pPr marL="1600200" lvl="3" indent="-228600" algn="l" defTabSz="457200">
-              <a:lnSpc>
-                <a:spcPct val="100000"/>
-              </a:lnSpc>
-              <a:spcBef>
-                <a:spcPts val="400"/>
-              </a:spcBef>
-              <a:buClr>
-                <a:srgbClr val="000000"/>
-              </a:buClr>
-              <a:buFont typeface="Arial"/>
-              <a:buChar char="–"/>
-            </a:pPr>
-            <a:r>
-              <a:rPr lang="en-US" sz="2000" b="0" u="none" strike="noStrike">
-                <a:solidFill>
-                  <a:schemeClr val="dk1"/>
-                </a:solidFill>
-                <a:effectLst/>
-                <a:uFillTx/>
-                <a:latin typeface="TradeGothic"/>
-                <a:ea typeface="ＭＳ Ｐゴシック"/>
-              </a:rPr>
-              <a:t>Fourth level</a:t>
-            </a:r>
-            <a:endParaRPr lang="en-US" sz="2000" b="0" u="none" strike="noStrike">
-              <a:solidFill>
-                <a:schemeClr val="dk1"/>
-              </a:solidFill>
-              <a:effectLst/>
-              <a:uFillTx/>
-              <a:latin typeface="TradeGothic"/>
-            </a:endParaRPr>
-          </a:p>
-          <a:p>
-            <a:pPr marL="2057400" lvl="4" indent="-228600" algn="l" defTabSz="457200">
-              <a:lnSpc>
-                <a:spcPct val="100000"/>
-              </a:lnSpc>
-              <a:spcBef>
-                <a:spcPts val="400"/>
-              </a:spcBef>
-              <a:buClr>
-                <a:srgbClr val="000000"/>
-              </a:buClr>
-              <a:buFont typeface="Arial"/>
-              <a:buChar char="»"/>
-            </a:pPr>
-            <a:r>
-              <a:rPr lang="en-US" sz="2000" b="0" u="none" strike="noStrike">
-                <a:solidFill>
-                  <a:schemeClr val="dk1"/>
-                </a:solidFill>
-                <a:effectLst/>
-                <a:uFillTx/>
-                <a:latin typeface="TradeGothic"/>
-                <a:ea typeface="ＭＳ Ｐゴシック"/>
-              </a:rPr>
-              <a:t>Fifth level</a:t>
-            </a:r>
-            <a:endParaRPr lang="en-US" sz="2000" b="0" u="none" strike="noStrike">
+            <a:endParaRPr lang="en-US" sz="1400" b="0" u="none" strike="noStrike">
               <a:solidFill>
                 <a:schemeClr val="dk1"/>
               </a:solidFill>
@@ -8703,7 +8871,7 @@
       </p:sp>
       <p:sp>
         <p:nvSpPr>
-          <p:cNvPr id="47" name="PlaceHolder 3"/>
+          <p:cNvPr id="47" name="PlaceHolder 4"/>
           <p:cNvSpPr>
             <a:spLocks noGrp="1"/>
           </p:cNvSpPr>
@@ -8714,7 +8882,7 @@
         <p:spPr>
           <a:xfrm>
             <a:off x="609480" y="6356520"/>
-            <a:ext cx="2843640" cy="363960"/>
+            <a:ext cx="2843280" cy="363600"/>
           </a:xfrm>
           <a:prstGeom prst="rect">
             <a:avLst/>
@@ -8783,7 +8951,7 @@
       </p:sp>
       <p:sp>
         <p:nvSpPr>
-          <p:cNvPr id="48" name="PlaceHolder 4"/>
+          <p:cNvPr id="48" name="PlaceHolder 5"/>
           <p:cNvSpPr>
             <a:spLocks noGrp="1"/>
           </p:cNvSpPr>
@@ -8794,7 +8962,7 @@
         <p:spPr>
           <a:xfrm>
             <a:off x="4165560" y="6356520"/>
-            <a:ext cx="3859560" cy="363960"/>
+            <a:ext cx="3859200" cy="363600"/>
           </a:xfrm>
           <a:prstGeom prst="rect">
             <a:avLst/>
@@ -8865,7 +9033,7 @@
       </p:sp>
       <p:sp>
         <p:nvSpPr>
-          <p:cNvPr id="49" name="PlaceHolder 5"/>
+          <p:cNvPr id="49" name="PlaceHolder 6"/>
           <p:cNvSpPr>
             <a:spLocks noGrp="1"/>
           </p:cNvSpPr>
@@ -8876,7 +9044,7 @@
         <p:spPr>
           <a:xfrm>
             <a:off x="8737560" y="6356520"/>
-            <a:ext cx="2843640" cy="363960"/>
+            <a:ext cx="2843280" cy="363600"/>
           </a:xfrm>
           <a:prstGeom prst="rect">
             <a:avLst/>
@@ -8920,7 +9088,7 @@
                 <a:tab pos="0" algn="l"/>
               </a:tabLst>
             </a:pPr>
-            <a:fld id="{9F7AEC66-0057-4DE8-B486-4F46E4268495}" type="slidenum">
+            <a:fld id="{E1D09453-9A54-4E8F-9EAD-A698DE24574F}" type="slidenum">
               <a:rPr lang="en-US" sz="1200" b="0" u="none" strike="noStrike">
                 <a:solidFill>
                   <a:srgbClr val="898989"/>
@@ -9023,7 +9191,7 @@
         <p:spPr>
           <a:xfrm>
             <a:off x="1523880" y="0"/>
-            <a:ext cx="9142920" cy="6856920"/>
+            <a:ext cx="9142560" cy="6856560"/>
           </a:xfrm>
           <a:prstGeom prst="rect">
             <a:avLst/>
@@ -9077,15 +9245,15 @@
         <p:spPr>
           <a:xfrm>
             <a:off x="6702480" y="894960"/>
-            <a:ext cx="4637520" cy="5153760"/>
+            <a:ext cx="4637160" cy="5153400"/>
           </a:xfrm>
           <a:custGeom>
             <a:avLst/>
             <a:gdLst>
-              <a:gd name="textAreaLeft" fmla="*/ 0 w 4637520"/>
-              <a:gd name="textAreaRight" fmla="*/ 4638600 w 4637520"/>
-              <a:gd name="textAreaTop" fmla="*/ 0 h 5153760"/>
-              <a:gd name="textAreaBottom" fmla="*/ 5154840 h 5153760"/>
+              <a:gd name="textAreaLeft" fmla="*/ 0 w 4637160"/>
+              <a:gd name="textAreaRight" fmla="*/ 4638600 w 4637160"/>
+              <a:gd name="textAreaTop" fmla="*/ 0 h 5153400"/>
+              <a:gd name="textAreaBottom" fmla="*/ 5154840 h 5153400"/>
               <a:gd name="GluePoint1X" fmla="*/ 363179 w 6184806"/>
               <a:gd name="GluePoint1Y" fmla="*/ 3125191 h 5154967"/>
               <a:gd name="GluePoint2X" fmla="*/ 898270 w 6184806"/>
@@ -9846,7 +10014,7 @@
         <p:spPr>
           <a:xfrm>
             <a:off x="7957440" y="1974960"/>
-            <a:ext cx="3202560" cy="3425040"/>
+            <a:ext cx="3202200" cy="3424680"/>
           </a:xfrm>
           <a:prstGeom prst="rect">
             <a:avLst/>
@@ -9870,7 +10038,7 @@
         <p:spPr>
           <a:xfrm>
             <a:off x="1245600" y="648720"/>
-            <a:ext cx="8533440" cy="1751400"/>
+            <a:ext cx="8533080" cy="1751040"/>
           </a:xfrm>
           <a:prstGeom prst="rect">
             <a:avLst/>
@@ -9955,7 +10123,7 @@
         <p:spPr>
           <a:xfrm>
             <a:off x="331200" y="-526680"/>
-            <a:ext cx="10362240" cy="2075400"/>
+            <a:ext cx="10361880" cy="2075040"/>
           </a:xfrm>
           <a:prstGeom prst="rect">
             <a:avLst/>
@@ -9993,7 +10161,7 @@
             </a:r>
             <a:endParaRPr lang="en-US" sz="4000" b="0" u="none" strike="noStrike">
               <a:solidFill>
-                <a:srgbClr val="000000"/>
+                <a:schemeClr val="dk1"/>
               </a:solidFill>
               <a:effectLst/>
               <a:uFillTx/>
@@ -10011,7 +10179,7 @@
         <p:spPr>
           <a:xfrm>
             <a:off x="331200" y="2076480"/>
-            <a:ext cx="5923440" cy="2493360"/>
+            <a:ext cx="5923080" cy="2493360"/>
           </a:xfrm>
           <a:prstGeom prst="rect">
             <a:avLst/>
@@ -10256,7 +10424,7 @@
         <p:spPr>
           <a:xfrm>
             <a:off x="9780120" y="1440"/>
-            <a:ext cx="2248920" cy="1061280"/>
+            <a:ext cx="2248560" cy="1060920"/>
           </a:xfrm>
           <a:prstGeom prst="rect">
             <a:avLst/>
@@ -10306,7 +10474,7 @@
         <p:spPr>
           <a:xfrm>
             <a:off x="0" y="6354720"/>
-            <a:ext cx="12191040" cy="502200"/>
+            <a:ext cx="12190680" cy="501840"/>
           </a:xfrm>
           <a:prstGeom prst="rect">
             <a:avLst/>
@@ -10362,7 +10530,7 @@
         <p:spPr>
           <a:xfrm>
             <a:off x="1691640" y="137160"/>
-            <a:ext cx="8045640" cy="821880"/>
+            <a:ext cx="8045280" cy="821520"/>
           </a:xfrm>
           <a:prstGeom prst="rect">
             <a:avLst/>
@@ -10396,11 +10564,11 @@
                 <a:latin typeface="Arial"/>
                 <a:ea typeface="ＭＳ Ｐゴシック"/>
               </a:rPr>
-              <a:t>DeepCycloNet: AI for Cyclone Tracking &amp; Rapid Intensification</a:t>
+              <a:t>CycML: AI for Cyclone Tracking &amp; Rapid Intensification</a:t>
             </a:r>
             <a:endParaRPr lang="en-US" sz="2100" b="0" u="none" strike="noStrike">
               <a:solidFill>
-                <a:srgbClr val="000000"/>
+                <a:schemeClr val="dk1"/>
               </a:solidFill>
               <a:effectLst/>
               <a:uFillTx/>
@@ -10418,7 +10586,7 @@
         <p:spPr>
           <a:xfrm>
             <a:off x="5669280" y="1234440"/>
-            <a:ext cx="6033960" cy="3634920"/>
+            <a:ext cx="6033600" cy="3634920"/>
           </a:xfrm>
           <a:prstGeom prst="rect">
             <a:avLst/>
@@ -10882,7 +11050,7 @@
         <p:spPr>
           <a:xfrm>
             <a:off x="8737560" y="6356520"/>
-            <a:ext cx="2843640" cy="363960"/>
+            <a:ext cx="2843280" cy="363600"/>
           </a:xfrm>
           <a:prstGeom prst="rect">
             <a:avLst/>
@@ -10926,7 +11094,7 @@
                 <a:tab pos="0" algn="l"/>
               </a:tabLst>
             </a:pPr>
-            <a:fld id="{365C7885-2E06-4CA4-80CC-CFDC925A8B73}" type="slidenum">
+            <a:fld id="{41F726B7-95F9-45CD-A71F-364B1158A35D}" type="slidenum">
               <a:rPr lang="en-US" sz="1200" b="1" u="none" strike="noStrike">
                 <a:solidFill>
                   <a:schemeClr val="lt1"/>
@@ -10962,7 +11130,7 @@
         <p:spPr>
           <a:xfrm>
             <a:off x="4648320" y="6356520"/>
-            <a:ext cx="3202920" cy="363960"/>
+            <a:ext cx="3202560" cy="363600"/>
           </a:xfrm>
           <a:prstGeom prst="rect">
             <a:avLst/>
@@ -11036,7 +11204,7 @@
         <p:spPr>
           <a:xfrm>
             <a:off x="344160" y="267120"/>
-            <a:ext cx="1346760" cy="806400"/>
+            <a:ext cx="1346400" cy="806040"/>
           </a:xfrm>
           <a:prstGeom prst="ellipse">
             <a:avLst/>
@@ -11109,7 +11277,7 @@
         <p:spPr>
           <a:xfrm>
             <a:off x="9780120" y="1440"/>
-            <a:ext cx="2248920" cy="1061280"/>
+            <a:ext cx="2248560" cy="1060920"/>
           </a:xfrm>
           <a:prstGeom prst="rect">
             <a:avLst/>
@@ -11133,7 +11301,7 @@
         <p:spPr>
           <a:xfrm>
             <a:off x="548640" y="1280160"/>
-            <a:ext cx="4936680" cy="3107880"/>
+            <a:ext cx="4936320" cy="3107520"/>
           </a:xfrm>
           <a:prstGeom prst="rect">
             <a:avLst/>
@@ -11153,7 +11321,7 @@
         <p:spPr>
           <a:xfrm>
             <a:off x="548640" y="4434840"/>
-            <a:ext cx="4936680" cy="681120"/>
+            <a:ext cx="4936320" cy="680400"/>
           </a:xfrm>
           <a:prstGeom prst="rect">
             <a:avLst/>
@@ -11271,7 +11439,7 @@
         <p:spPr>
           <a:xfrm>
             <a:off x="0" y="6354720"/>
-            <a:ext cx="12191040" cy="502200"/>
+            <a:ext cx="12190680" cy="501840"/>
           </a:xfrm>
           <a:prstGeom prst="rect">
             <a:avLst/>
@@ -11327,7 +11495,7 @@
         <p:spPr>
           <a:xfrm>
             <a:off x="1691640" y="137160"/>
-            <a:ext cx="8045640" cy="821880"/>
+            <a:ext cx="8045280" cy="821520"/>
           </a:xfrm>
           <a:prstGeom prst="rect">
             <a:avLst/>
@@ -11365,7 +11533,7 @@
             </a:r>
             <a:endParaRPr lang="en-US" sz="2100" b="0" u="none" strike="noStrike">
               <a:solidFill>
-                <a:srgbClr val="000000"/>
+                <a:schemeClr val="dk1"/>
               </a:solidFill>
               <a:effectLst/>
               <a:uFillTx/>
@@ -11383,7 +11551,7 @@
         <p:spPr>
           <a:xfrm>
             <a:off x="548640" y="4343400"/>
-            <a:ext cx="11090520" cy="1492200"/>
+            <a:ext cx="11090160" cy="1491480"/>
           </a:xfrm>
           <a:prstGeom prst="rect">
             <a:avLst/>
@@ -11706,7 +11874,7 @@
         <p:spPr>
           <a:xfrm>
             <a:off x="8737560" y="6356520"/>
-            <a:ext cx="2843640" cy="363960"/>
+            <a:ext cx="2843280" cy="363600"/>
           </a:xfrm>
           <a:prstGeom prst="rect">
             <a:avLst/>
@@ -11750,7 +11918,7 @@
                 <a:tab pos="0" algn="l"/>
               </a:tabLst>
             </a:pPr>
-            <a:fld id="{2B7805F4-1D02-4C19-BF4C-17D9B31D0994}" type="slidenum">
+            <a:fld id="{DD1E2F8D-B8AB-41E8-A8CB-82105D7AD3D9}" type="slidenum">
               <a:rPr lang="en-US" sz="1200" b="1" u="none" strike="noStrike">
                 <a:solidFill>
                   <a:schemeClr val="lt1"/>
@@ -11786,7 +11954,7 @@
         <p:spPr>
           <a:xfrm>
             <a:off x="4648320" y="6356520"/>
-            <a:ext cx="3202920" cy="363960"/>
+            <a:ext cx="3202560" cy="363600"/>
           </a:xfrm>
           <a:prstGeom prst="rect">
             <a:avLst/>
@@ -11860,7 +12028,7 @@
         <p:spPr>
           <a:xfrm rot="21525000">
             <a:off x="338760" y="248040"/>
-            <a:ext cx="1109520" cy="843120"/>
+            <a:ext cx="1109160" cy="842760"/>
           </a:xfrm>
           <a:prstGeom prst="ellipse">
             <a:avLst/>
@@ -11933,7 +12101,7 @@
         <p:spPr>
           <a:xfrm>
             <a:off x="9780120" y="1440"/>
-            <a:ext cx="2248920" cy="1061280"/>
+            <a:ext cx="2248560" cy="1060920"/>
           </a:xfrm>
           <a:prstGeom prst="rect">
             <a:avLst/>
@@ -11957,7 +12125,7 @@
         <p:spPr>
           <a:xfrm>
             <a:off x="541080" y="1080000"/>
-            <a:ext cx="11090520" cy="3125160"/>
+            <a:ext cx="11090160" cy="3124800"/>
           </a:xfrm>
           <a:prstGeom prst="rect">
             <a:avLst/>
@@ -12007,7 +12175,7 @@
         <p:spPr>
           <a:xfrm>
             <a:off x="0" y="6354720"/>
-            <a:ext cx="12191040" cy="502200"/>
+            <a:ext cx="12190680" cy="501840"/>
           </a:xfrm>
           <a:prstGeom prst="rect">
             <a:avLst/>
@@ -12061,7 +12229,7 @@
         <p:spPr>
           <a:xfrm>
             <a:off x="1691640" y="137160"/>
-            <a:ext cx="8045640" cy="821880"/>
+            <a:ext cx="8045280" cy="821520"/>
           </a:xfrm>
           <a:prstGeom prst="rect">
             <a:avLst/>
@@ -12099,7 +12267,7 @@
             </a:r>
             <a:endParaRPr lang="en-US" sz="2100" b="0" u="none" strike="noStrike">
               <a:solidFill>
-                <a:srgbClr val="000000"/>
+                <a:schemeClr val="dk1"/>
               </a:solidFill>
               <a:effectLst/>
               <a:uFillTx/>
@@ -12117,7 +12285,7 @@
         <p:spPr>
           <a:xfrm>
             <a:off x="548640" y="4343400"/>
-            <a:ext cx="11090520" cy="1683000"/>
+            <a:ext cx="11090160" cy="1682280"/>
           </a:xfrm>
           <a:prstGeom prst="rect">
             <a:avLst/>
@@ -12476,7 +12644,7 @@
         <p:spPr>
           <a:xfrm>
             <a:off x="8737560" y="6356520"/>
-            <a:ext cx="2843640" cy="363960"/>
+            <a:ext cx="2843280" cy="363600"/>
           </a:xfrm>
           <a:prstGeom prst="rect">
             <a:avLst/>
@@ -12520,7 +12688,7 @@
                 <a:tab pos="0" algn="l"/>
               </a:tabLst>
             </a:pPr>
-            <a:fld id="{AC46CF91-B115-4A33-B3BF-4D846B835C90}" type="slidenum">
+            <a:fld id="{219D9117-4FC2-4DA1-9C06-A6632C5D7E3F}" type="slidenum">
               <a:rPr lang="en-US" sz="1200" b="1" u="none" strike="noStrike">
                 <a:solidFill>
                   <a:srgbClr val="FFFFFF"/>
@@ -12556,7 +12724,7 @@
         <p:spPr>
           <a:xfrm>
             <a:off x="4648320" y="6356520"/>
-            <a:ext cx="3202920" cy="363960"/>
+            <a:ext cx="3202560" cy="363600"/>
           </a:xfrm>
           <a:prstGeom prst="rect">
             <a:avLst/>
@@ -12630,7 +12798,7 @@
         <p:spPr>
           <a:xfrm>
             <a:off x="329760" y="252360"/>
-            <a:ext cx="1361160" cy="826920"/>
+            <a:ext cx="1360800" cy="826560"/>
           </a:xfrm>
           <a:prstGeom prst="ellipse">
             <a:avLst/>
@@ -12703,7 +12871,7 @@
         <p:spPr>
           <a:xfrm>
             <a:off x="9780120" y="1440"/>
-            <a:ext cx="2248920" cy="1061280"/>
+            <a:ext cx="2248560" cy="1060920"/>
           </a:xfrm>
           <a:prstGeom prst="rect">
             <a:avLst/>
@@ -12727,7 +12895,7 @@
         <p:spPr>
           <a:xfrm>
             <a:off x="548640" y="1188720"/>
-            <a:ext cx="11090520" cy="3016440"/>
+            <a:ext cx="11090160" cy="3016080"/>
           </a:xfrm>
           <a:prstGeom prst="rect">
             <a:avLst/>
@@ -12777,7 +12945,7 @@
         <p:spPr>
           <a:xfrm>
             <a:off x="0" y="6354720"/>
-            <a:ext cx="12191040" cy="502200"/>
+            <a:ext cx="12190680" cy="501840"/>
           </a:xfrm>
           <a:prstGeom prst="rect">
             <a:avLst/>
@@ -12831,7 +12999,7 @@
         <p:spPr>
           <a:xfrm>
             <a:off x="1691640" y="137160"/>
-            <a:ext cx="8045640" cy="821880"/>
+            <a:ext cx="8045280" cy="821520"/>
           </a:xfrm>
           <a:prstGeom prst="rect">
             <a:avLst/>
@@ -12887,7 +13055,7 @@
         <p:spPr>
           <a:xfrm>
             <a:off x="548640" y="4343400"/>
-            <a:ext cx="11090520" cy="1362600"/>
+            <a:ext cx="11090160" cy="1361880"/>
           </a:xfrm>
           <a:prstGeom prst="rect">
             <a:avLst/>
@@ -13210,7 +13378,7 @@
         <p:spPr>
           <a:xfrm>
             <a:off x="8737560" y="6356520"/>
-            <a:ext cx="2843640" cy="363960"/>
+            <a:ext cx="2843280" cy="363600"/>
           </a:xfrm>
           <a:prstGeom prst="rect">
             <a:avLst/>
@@ -13254,7 +13422,7 @@
                 <a:tab pos="0" algn="l"/>
               </a:tabLst>
             </a:pPr>
-            <a:fld id="{01DE7253-0DD6-4EDF-86F0-CE96DFB7507F}" type="slidenum">
+            <a:fld id="{954F9F8E-6CAF-452B-ACC5-F789C6E779F4}" type="slidenum">
               <a:rPr lang="en-US" sz="1200" b="1" u="none" strike="noStrike">
                 <a:solidFill>
                   <a:srgbClr val="FFFFFF"/>
@@ -13290,7 +13458,7 @@
         <p:spPr>
           <a:xfrm>
             <a:off x="4648320" y="6356520"/>
-            <a:ext cx="3202920" cy="363960"/>
+            <a:ext cx="3202560" cy="363600"/>
           </a:xfrm>
           <a:prstGeom prst="rect">
             <a:avLst/>
@@ -13364,7 +13532,7 @@
         <p:spPr>
           <a:xfrm>
             <a:off x="329760" y="252360"/>
-            <a:ext cx="1361160" cy="806400"/>
+            <a:ext cx="1360800" cy="806040"/>
           </a:xfrm>
           <a:prstGeom prst="ellipse">
             <a:avLst/>
@@ -13437,7 +13605,7 @@
         <p:spPr>
           <a:xfrm>
             <a:off x="9780120" y="1440"/>
-            <a:ext cx="2248920" cy="1061280"/>
+            <a:ext cx="2248560" cy="1060920"/>
           </a:xfrm>
           <a:prstGeom prst="rect">
             <a:avLst/>
@@ -13461,7 +13629,7 @@
         <p:spPr>
           <a:xfrm>
             <a:off x="548640" y="1188720"/>
-            <a:ext cx="11090520" cy="3016440"/>
+            <a:ext cx="11090160" cy="3016080"/>
           </a:xfrm>
           <a:prstGeom prst="rect">
             <a:avLst/>
@@ -13511,7 +13679,7 @@
         <p:spPr>
           <a:xfrm>
             <a:off x="0" y="6354720"/>
-            <a:ext cx="12191040" cy="502200"/>
+            <a:ext cx="12190680" cy="501840"/>
           </a:xfrm>
           <a:prstGeom prst="rect">
             <a:avLst/>
@@ -13565,7 +13733,7 @@
         <p:spPr>
           <a:xfrm>
             <a:off x="1691640" y="137160"/>
-            <a:ext cx="8045640" cy="821880"/>
+            <a:ext cx="8045280" cy="821520"/>
           </a:xfrm>
           <a:prstGeom prst="rect">
             <a:avLst/>
@@ -13603,7 +13771,7 @@
             </a:r>
             <a:endParaRPr lang="en-US" sz="2100" b="0" u="none" strike="noStrike">
               <a:solidFill>
-                <a:srgbClr val="000000"/>
+                <a:schemeClr val="dk1"/>
               </a:solidFill>
               <a:effectLst/>
               <a:uFillTx/>
@@ -13621,7 +13789,7 @@
         <p:spPr>
           <a:xfrm>
             <a:off x="548640" y="4343400"/>
-            <a:ext cx="11090520" cy="991800"/>
+            <a:ext cx="11090160" cy="991080"/>
           </a:xfrm>
           <a:prstGeom prst="rect">
             <a:avLst/>
@@ -13836,7 +14004,7 @@
         <p:spPr>
           <a:xfrm>
             <a:off x="8737560" y="6356520"/>
-            <a:ext cx="2843640" cy="363960"/>
+            <a:ext cx="2843280" cy="363600"/>
           </a:xfrm>
           <a:prstGeom prst="rect">
             <a:avLst/>
@@ -13880,7 +14048,7 @@
                 <a:tab pos="0" algn="l"/>
               </a:tabLst>
             </a:pPr>
-            <a:fld id="{E015E7A2-B0A2-4F9A-8C18-11D0407E1B7A}" type="slidenum">
+            <a:fld id="{E131BD8E-373C-436C-B09D-4A366DBD08AE}" type="slidenum">
               <a:rPr lang="en-US" sz="1200" b="1" u="none" strike="noStrike">
                 <a:solidFill>
                   <a:srgbClr val="FFFFFF"/>
@@ -13916,7 +14084,7 @@
         <p:spPr>
           <a:xfrm>
             <a:off x="4648320" y="6356520"/>
-            <a:ext cx="3202920" cy="363960"/>
+            <a:ext cx="3202560" cy="363600"/>
           </a:xfrm>
           <a:prstGeom prst="rect">
             <a:avLst/>
@@ -13990,7 +14158,7 @@
         <p:spPr>
           <a:xfrm>
             <a:off x="329760" y="252360"/>
-            <a:ext cx="1361520" cy="806400"/>
+            <a:ext cx="1361160" cy="806040"/>
           </a:xfrm>
           <a:prstGeom prst="ellipse">
             <a:avLst/>
@@ -14063,7 +14231,7 @@
         <p:spPr>
           <a:xfrm>
             <a:off x="9780120" y="1440"/>
-            <a:ext cx="2248920" cy="1061280"/>
+            <a:ext cx="2248560" cy="1060920"/>
           </a:xfrm>
           <a:prstGeom prst="rect">
             <a:avLst/>
@@ -14087,7 +14255,7 @@
         <p:spPr>
           <a:xfrm>
             <a:off x="548640" y="1188720"/>
-            <a:ext cx="11090520" cy="3016440"/>
+            <a:ext cx="11090160" cy="3016080"/>
           </a:xfrm>
           <a:prstGeom prst="rect">
             <a:avLst/>
